--- a/docs/TIMERA_OUMOULKHAIRI_Presentation.pptx
+++ b/docs/TIMERA_OUMOULKHAIRI_Presentation.pptx
@@ -126,7 +126,7 @@
             <a:srgbClr val="A4A3A4"/>
           </p15:clr>
         </p15:guide>
-        <p15:guide id="2" pos="2880">
+        <p15:guide id="2" pos="2857" userDrawn="1">
           <p15:clr>
             <a:srgbClr val="A4A3A4"/>
           </p15:clr>
@@ -318,7 +318,7 @@
           <a:p>
             <a:fld id="{5BCAD085-E8A6-8845-BD4E-CB4CCA059FC4}" type="datetimeFigureOut">
               <a:rPr lang="en-US" smtClean="0"/>
-              <a:t>5/31/2026</a:t>
+              <a:t>7/3/2026</a:t>
             </a:fld>
             <a:endParaRPr lang="en-US"/>
           </a:p>
@@ -376,6 +376,9 @@
   <p:clrMapOvr>
     <a:masterClrMapping/>
   </p:clrMapOvr>
+  <p:transition spd="slow">
+    <p:wipe/>
+  </p:transition>
 </p:sldLayout>
 </file>
 
@@ -488,7 +491,7 @@
           <a:p>
             <a:fld id="{5BCAD085-E8A6-8845-BD4E-CB4CCA059FC4}" type="datetimeFigureOut">
               <a:rPr lang="en-US" smtClean="0"/>
-              <a:t>5/31/2026</a:t>
+              <a:t>7/3/2026</a:t>
             </a:fld>
             <a:endParaRPr lang="en-US"/>
           </a:p>
@@ -546,6 +549,9 @@
   <p:clrMapOvr>
     <a:masterClrMapping/>
   </p:clrMapOvr>
+  <p:transition spd="slow">
+    <p:wipe/>
+  </p:transition>
 </p:sldLayout>
 </file>
 
@@ -668,7 +674,7 @@
           <a:p>
             <a:fld id="{5BCAD085-E8A6-8845-BD4E-CB4CCA059FC4}" type="datetimeFigureOut">
               <a:rPr lang="en-US" smtClean="0"/>
-              <a:t>5/31/2026</a:t>
+              <a:t>7/3/2026</a:t>
             </a:fld>
             <a:endParaRPr lang="en-US"/>
           </a:p>
@@ -726,6 +732,9 @@
   <p:clrMapOvr>
     <a:masterClrMapping/>
   </p:clrMapOvr>
+  <p:transition spd="slow">
+    <p:wipe/>
+  </p:transition>
 </p:sldLayout>
 </file>
 
@@ -838,7 +847,7 @@
           <a:p>
             <a:fld id="{5BCAD085-E8A6-8845-BD4E-CB4CCA059FC4}" type="datetimeFigureOut">
               <a:rPr lang="en-US" smtClean="0"/>
-              <a:t>5/31/2026</a:t>
+              <a:t>7/3/2026</a:t>
             </a:fld>
             <a:endParaRPr lang="en-US"/>
           </a:p>
@@ -896,6 +905,9 @@
   <p:clrMapOvr>
     <a:masterClrMapping/>
   </p:clrMapOvr>
+  <p:transition spd="slow">
+    <p:wipe/>
+  </p:transition>
 </p:sldLayout>
 </file>
 
@@ -1084,7 +1096,7 @@
           <a:p>
             <a:fld id="{5BCAD085-E8A6-8845-BD4E-CB4CCA059FC4}" type="datetimeFigureOut">
               <a:rPr lang="en-US" smtClean="0"/>
-              <a:t>5/31/2026</a:t>
+              <a:t>7/3/2026</a:t>
             </a:fld>
             <a:endParaRPr lang="en-US"/>
           </a:p>
@@ -1142,6 +1154,9 @@
   <p:clrMapOvr>
     <a:masterClrMapping/>
   </p:clrMapOvr>
+  <p:transition spd="slow">
+    <p:wipe/>
+  </p:transition>
 </p:sldLayout>
 </file>
 
@@ -1372,7 +1387,7 @@
           <a:p>
             <a:fld id="{5BCAD085-E8A6-8845-BD4E-CB4CCA059FC4}" type="datetimeFigureOut">
               <a:rPr lang="en-US" smtClean="0"/>
-              <a:t>5/31/2026</a:t>
+              <a:t>7/3/2026</a:t>
             </a:fld>
             <a:endParaRPr lang="en-US"/>
           </a:p>
@@ -1430,6 +1445,9 @@
   <p:clrMapOvr>
     <a:masterClrMapping/>
   </p:clrMapOvr>
+  <p:transition spd="slow">
+    <p:wipe/>
+  </p:transition>
 </p:sldLayout>
 </file>
 
@@ -1794,7 +1812,7 @@
           <a:p>
             <a:fld id="{5BCAD085-E8A6-8845-BD4E-CB4CCA059FC4}" type="datetimeFigureOut">
               <a:rPr lang="en-US" smtClean="0"/>
-              <a:t>5/31/2026</a:t>
+              <a:t>7/3/2026</a:t>
             </a:fld>
             <a:endParaRPr lang="en-US"/>
           </a:p>
@@ -1852,6 +1870,9 @@
   <p:clrMapOvr>
     <a:masterClrMapping/>
   </p:clrMapOvr>
+  <p:transition spd="slow">
+    <p:wipe/>
+  </p:transition>
 </p:sldLayout>
 </file>
 
@@ -1912,7 +1933,7 @@
           <a:p>
             <a:fld id="{5BCAD085-E8A6-8845-BD4E-CB4CCA059FC4}" type="datetimeFigureOut">
               <a:rPr lang="en-US" smtClean="0"/>
-              <a:t>5/31/2026</a:t>
+              <a:t>7/3/2026</a:t>
             </a:fld>
             <a:endParaRPr lang="en-US"/>
           </a:p>
@@ -1970,6 +1991,9 @@
   <p:clrMapOvr>
     <a:masterClrMapping/>
   </p:clrMapOvr>
+  <p:transition spd="slow">
+    <p:wipe/>
+  </p:transition>
 </p:sldLayout>
 </file>
 
@@ -2007,7 +2031,7 @@
           <a:p>
             <a:fld id="{5BCAD085-E8A6-8845-BD4E-CB4CCA059FC4}" type="datetimeFigureOut">
               <a:rPr lang="en-US" smtClean="0"/>
-              <a:t>5/31/2026</a:t>
+              <a:t>7/3/2026</a:t>
             </a:fld>
             <a:endParaRPr lang="en-US"/>
           </a:p>
@@ -2065,6 +2089,9 @@
   <p:clrMapOvr>
     <a:masterClrMapping/>
   </p:clrMapOvr>
+  <p:transition spd="slow">
+    <p:wipe/>
+  </p:transition>
 </p:sldLayout>
 </file>
 
@@ -2284,7 +2311,7 @@
           <a:p>
             <a:fld id="{5BCAD085-E8A6-8845-BD4E-CB4CCA059FC4}" type="datetimeFigureOut">
               <a:rPr lang="en-US" smtClean="0"/>
-              <a:t>5/31/2026</a:t>
+              <a:t>7/3/2026</a:t>
             </a:fld>
             <a:endParaRPr lang="en-US"/>
           </a:p>
@@ -2342,6 +2369,9 @@
   <p:clrMapOvr>
     <a:masterClrMapping/>
   </p:clrMapOvr>
+  <p:transition spd="slow">
+    <p:wipe/>
+  </p:transition>
 </p:sldLayout>
 </file>
 
@@ -2537,7 +2567,7 @@
           <a:p>
             <a:fld id="{5BCAD085-E8A6-8845-BD4E-CB4CCA059FC4}" type="datetimeFigureOut">
               <a:rPr lang="en-US" smtClean="0"/>
-              <a:t>5/31/2026</a:t>
+              <a:t>7/3/2026</a:t>
             </a:fld>
             <a:endParaRPr lang="en-US"/>
           </a:p>
@@ -2595,6 +2625,9 @@
   <p:clrMapOvr>
     <a:masterClrMapping/>
   </p:clrMapOvr>
+  <p:transition spd="slow">
+    <p:wipe/>
+  </p:transition>
 </p:sldLayout>
 </file>
 
@@ -2750,7 +2783,7 @@
           <a:p>
             <a:fld id="{5BCAD085-E8A6-8845-BD4E-CB4CCA059FC4}" type="datetimeFigureOut">
               <a:rPr lang="en-US" smtClean="0"/>
-              <a:t>5/31/2026</a:t>
+              <a:t>7/3/2026</a:t>
             </a:fld>
             <a:endParaRPr lang="en-US"/>
           </a:p>
@@ -2855,6 +2888,9 @@
     <p:sldLayoutId id="2147483658" r:id="rId10"/>
     <p:sldLayoutId id="2147483659" r:id="rId11"/>
   </p:sldLayoutIdLst>
+  <p:transition spd="slow">
+    <p:wipe/>
+  </p:transition>
   <p:txStyles>
     <p:titleStyle>
       <a:lvl1pPr algn="ctr" defTabSz="457200" rtl="0" eaLnBrk="1" latinLnBrk="0" hangingPunct="1">
@@ -3127,128 +3163,275 @@
       </p:grpSpPr>
       <p:sp>
         <p:nvSpPr>
-          <p:cNvPr id="2" name="Title 1"/>
-          <p:cNvSpPr>
-            <a:spLocks noGrp="1"/>
-          </p:cNvSpPr>
-          <p:nvPr>
-            <p:ph type="title"/>
-          </p:nvPr>
+          <p:cNvPr id="5" name="ZoneTexte 4"/>
+          <p:cNvSpPr txBox="1"/>
+          <p:nvPr/>
         </p:nvSpPr>
-        <p:spPr/>
+        <p:spPr>
+          <a:xfrm>
+            <a:off x="1409700" y="393700"/>
+            <a:ext cx="2324100" cy="736600"/>
+          </a:xfrm>
+          <a:prstGeom prst="rect">
+            <a:avLst/>
+          </a:prstGeom>
+          <a:noFill/>
+        </p:spPr>
         <p:txBody>
-          <a:bodyPr/>
+          <a:bodyPr wrap="square" rtlCol="0">
+            <a:spAutoFit/>
+          </a:bodyPr>
           <a:lstStyle/>
           <a:p>
-            <a:r>
-              <a:rPr dirty="0"/>
-              <a:t>Page de </a:t>
-            </a:r>
-            <a:r>
-              <a:rPr dirty="0" err="1"/>
-              <a:t>titre</a:t>
-            </a:r>
-            <a:endParaRPr dirty="0"/>
+            <a:endParaRPr lang="fr-FR" dirty="0"/>
           </a:p>
         </p:txBody>
       </p:sp>
       <p:sp>
         <p:nvSpPr>
-          <p:cNvPr id="3" name="Content Placeholder 2"/>
-          <p:cNvSpPr>
-            <a:spLocks noGrp="1"/>
-          </p:cNvSpPr>
-          <p:nvPr>
-            <p:ph idx="1"/>
-          </p:nvPr>
+          <p:cNvPr id="6" name="ZoneTexte 5"/>
+          <p:cNvSpPr txBox="1"/>
+          <p:nvPr/>
         </p:nvSpPr>
-        <p:spPr/>
+        <p:spPr>
+          <a:xfrm>
+            <a:off x="1562100" y="571500"/>
+            <a:ext cx="5054600" cy="736600"/>
+          </a:xfrm>
+          <a:prstGeom prst="rect">
+            <a:avLst/>
+          </a:prstGeom>
+          <a:noFill/>
+        </p:spPr>
         <p:txBody>
-          <a:bodyPr/>
+          <a:bodyPr wrap="square" rtlCol="0">
+            <a:spAutoFit/>
+          </a:bodyPr>
           <a:lstStyle/>
           <a:p>
-            <a:pPr marL="0" indent="0">
-              <a:buNone/>
-            </a:pPr>
-            <a:r>
-              <a:rPr b="1" u="sng" dirty="0" err="1" smtClean="0"/>
+            <a:endParaRPr lang="fr-FR" dirty="0"/>
+          </a:p>
+        </p:txBody>
+      </p:sp>
+      <p:sp>
+        <p:nvSpPr>
+          <p:cNvPr id="7" name="ZoneTexte 6"/>
+          <p:cNvSpPr txBox="1"/>
+          <p:nvPr/>
+        </p:nvSpPr>
+        <p:spPr>
+          <a:xfrm>
+            <a:off x="1562100" y="571500"/>
+            <a:ext cx="5054600" cy="736600"/>
+          </a:xfrm>
+          <a:prstGeom prst="rect">
+            <a:avLst/>
+          </a:prstGeom>
+          <a:noFill/>
+        </p:spPr>
+        <p:txBody>
+          <a:bodyPr wrap="square" rtlCol="0">
+            <a:spAutoFit/>
+          </a:bodyPr>
+          <a:lstStyle/>
+          <a:p>
+            <a:endParaRPr lang="fr-FR" dirty="0"/>
+          </a:p>
+        </p:txBody>
+      </p:sp>
+      <p:sp>
+        <p:nvSpPr>
+          <p:cNvPr id="8" name="ZoneTexte 7"/>
+          <p:cNvSpPr txBox="1"/>
+          <p:nvPr/>
+        </p:nvSpPr>
+        <p:spPr>
+          <a:xfrm>
+            <a:off x="2997200" y="691059"/>
+            <a:ext cx="2476500" cy="769441"/>
+          </a:xfrm>
+          <a:prstGeom prst="rect">
+            <a:avLst/>
+          </a:prstGeom>
+          <a:noFill/>
+        </p:spPr>
+        <p:txBody>
+          <a:bodyPr wrap="square" rtlCol="0">
+            <a:spAutoFit/>
+          </a:bodyPr>
+          <a:lstStyle/>
+          <a:p>
+            <a:pPr algn="ctr"/>
+            <a:r>
+              <a:rPr lang="fr-FR" sz="4400" b="1" dirty="0" smtClean="0">
+                <a:solidFill>
+                  <a:schemeClr val="tx2">
+                    <a:lumMod val="75000"/>
+                  </a:schemeClr>
+                </a:solidFill>
+              </a:rPr>
               <a:t>AfriTalent</a:t>
             </a:r>
-            <a:r>
-              <a:rPr lang="en-US" dirty="0" smtClean="0"/>
-              <a:t>:</a:t>
-            </a:r>
-            <a:r>
-              <a:rPr lang="fr-FR" dirty="0"/>
-              <a:t>Plateforme de mise en relation entre freelances africains et </a:t>
-            </a:r>
-            <a:r>
-              <a:rPr lang="fr-FR" dirty="0" smtClean="0"/>
-              <a:t>entreprises</a:t>
-            </a:r>
-            <a:endParaRPr dirty="0"/>
-          </a:p>
-          <a:p>
-            <a:pPr marL="0" indent="0">
-              <a:buNone/>
-            </a:pPr>
-            <a:r>
-              <a:rPr lang="en-US" b="1" dirty="0" err="1" smtClean="0"/>
+            <a:endParaRPr lang="fr-FR" sz="4400" b="1" dirty="0">
+              <a:solidFill>
+                <a:schemeClr val="tx2">
+                  <a:lumMod val="75000"/>
+                </a:schemeClr>
+              </a:solidFill>
+            </a:endParaRPr>
+          </a:p>
+        </p:txBody>
+      </p:sp>
+      <p:sp>
+        <p:nvSpPr>
+          <p:cNvPr id="9" name="ZoneTexte 8"/>
+          <p:cNvSpPr txBox="1"/>
+          <p:nvPr/>
+        </p:nvSpPr>
+        <p:spPr>
+          <a:xfrm>
+            <a:off x="1206500" y="2299846"/>
+            <a:ext cx="7010400" cy="954107"/>
+          </a:xfrm>
+          <a:prstGeom prst="rect">
+            <a:avLst/>
+          </a:prstGeom>
+          <a:noFill/>
+          <a:ln>
+            <a:noFill/>
+          </a:ln>
+        </p:spPr>
+        <p:txBody>
+          <a:bodyPr wrap="square" rtlCol="0">
+            <a:spAutoFit/>
+          </a:bodyPr>
+          <a:lstStyle/>
+          <a:p>
+            <a:pPr algn="ctr"/>
+            <a:r>
+              <a:rPr lang="fr-FR" sz="2800" dirty="0" smtClean="0">
+                <a:solidFill>
+                  <a:schemeClr val="tx2">
+                    <a:lumMod val="60000"/>
+                    <a:lumOff val="40000"/>
+                  </a:schemeClr>
+                </a:solidFill>
+              </a:rPr>
+              <a:t>Plateforme </a:t>
+            </a:r>
+            <a:r>
+              <a:rPr lang="fr-FR" sz="2800" dirty="0">
+                <a:solidFill>
+                  <a:schemeClr val="tx2">
+                    <a:lumMod val="60000"/>
+                    <a:lumOff val="40000"/>
+                  </a:schemeClr>
+                </a:solidFill>
+              </a:rPr>
+              <a:t>de mise en relation entre freelances africains </a:t>
+            </a:r>
+            <a:r>
+              <a:rPr lang="fr-FR" sz="2800" dirty="0" smtClean="0">
+                <a:solidFill>
+                  <a:schemeClr val="tx2">
+                    <a:lumMod val="60000"/>
+                    <a:lumOff val="40000"/>
+                  </a:schemeClr>
+                </a:solidFill>
+              </a:rPr>
+              <a:t>et entreprises</a:t>
+            </a:r>
+            <a:endParaRPr lang="fr-FR" sz="2800" dirty="0">
+              <a:solidFill>
+                <a:schemeClr val="tx2">
+                  <a:lumMod val="60000"/>
+                  <a:lumOff val="40000"/>
+                </a:schemeClr>
+              </a:solidFill>
+            </a:endParaRPr>
+          </a:p>
+        </p:txBody>
+      </p:sp>
+      <p:sp>
+        <p:nvSpPr>
+          <p:cNvPr id="10" name="ZoneTexte 9"/>
+          <p:cNvSpPr txBox="1"/>
+          <p:nvPr/>
+        </p:nvSpPr>
+        <p:spPr>
+          <a:xfrm>
+            <a:off x="2428875" y="4274998"/>
+            <a:ext cx="3181350" cy="1200329"/>
+          </a:xfrm>
+          <a:prstGeom prst="rect">
+            <a:avLst/>
+          </a:prstGeom>
+          <a:noFill/>
+          <a:ln>
+            <a:noFill/>
+          </a:ln>
+        </p:spPr>
+        <p:txBody>
+          <a:bodyPr wrap="square" rtlCol="0">
+            <a:spAutoFit/>
+          </a:bodyPr>
+          <a:lstStyle/>
+          <a:p>
+            <a:pPr algn="ctr"/>
+            <a:r>
+              <a:rPr lang="fr-FR" sz="2400" b="1" dirty="0" err="1"/>
               <a:t>Oumoul</a:t>
             </a:r>
             <a:r>
-              <a:rPr lang="en-US" b="1" dirty="0" smtClean="0"/>
+              <a:rPr lang="fr-FR" sz="2400" b="1" dirty="0"/>
               <a:t> </a:t>
             </a:r>
             <a:r>
-              <a:rPr lang="en-US" b="1" dirty="0" err="1" smtClean="0"/>
+              <a:rPr lang="fr-FR" sz="2400" b="1" dirty="0" err="1"/>
               <a:t>Khairi</a:t>
             </a:r>
             <a:r>
-              <a:rPr b="1" dirty="0" smtClean="0"/>
+              <a:rPr lang="fr-FR" sz="2400" b="1" dirty="0"/>
               <a:t> </a:t>
             </a:r>
             <a:r>
-              <a:rPr b="1" dirty="0" err="1"/>
+              <a:rPr lang="fr-FR" sz="2400" b="1" dirty="0" err="1"/>
               <a:t>Timéra</a:t>
             </a:r>
-            <a:endParaRPr b="1" dirty="0"/>
-          </a:p>
-          <a:p>
-            <a:pPr marL="0" indent="0">
-              <a:buNone/>
-            </a:pPr>
-            <a:r>
-              <a:rPr b="1" dirty="0"/>
-              <a:t>ISI </a:t>
-            </a:r>
-            <a:r>
-              <a:rPr b="1" dirty="0" smtClean="0"/>
-              <a:t>—</a:t>
-            </a:r>
-            <a:r>
-              <a:rPr lang="en-US" b="1" dirty="0" smtClean="0"/>
-              <a:t> L1</a:t>
-            </a:r>
-            <a:r>
-              <a:rPr b="1" dirty="0" smtClean="0"/>
-              <a:t> </a:t>
-            </a:r>
-            <a:r>
-              <a:rPr b="1" dirty="0" err="1"/>
+            <a:r>
+              <a:rPr lang="fr-FR" sz="2400" dirty="0"/>
+              <a:t/>
+            </a:r>
+            <a:br>
+              <a:rPr lang="fr-FR" sz="2400" dirty="0"/>
+            </a:br>
+            <a:r>
+              <a:rPr lang="fr-FR" sz="2400" b="1" dirty="0"/>
+              <a:t>ISI — L1 </a:t>
+            </a:r>
+            <a:r>
+              <a:rPr lang="fr-FR" sz="2400" b="1" dirty="0" err="1"/>
               <a:t>Cybersécurité</a:t>
             </a:r>
-            <a:endParaRPr b="1" dirty="0"/>
-          </a:p>
-          <a:p>
-            <a:pPr marL="0" indent="0">
-              <a:buNone/>
-            </a:pPr>
-            <a:r>
-              <a:rPr lang="en-US" b="1" dirty="0" smtClean="0"/>
+            <a:r>
+              <a:rPr lang="fr-FR" sz="2400" dirty="0"/>
+              <a:t/>
+            </a:r>
+            <a:br>
+              <a:rPr lang="fr-FR" sz="2400" dirty="0"/>
+            </a:br>
+            <a:r>
+              <a:rPr lang="fr-FR" sz="2400" b="1" dirty="0"/>
               <a:t>31-05-2026</a:t>
             </a:r>
-            <a:endParaRPr b="1" dirty="0"/>
+            <a:endParaRPr lang="fr-FR" sz="2400" dirty="0">
+              <a:solidFill>
+                <a:schemeClr val="tx2">
+                  <a:lumMod val="60000"/>
+                  <a:lumOff val="40000"/>
+                </a:schemeClr>
+              </a:solidFill>
+            </a:endParaRPr>
           </a:p>
         </p:txBody>
       </p:sp>
@@ -3257,6 +3440,9 @@
   <p:clrMapOvr>
     <a:masterClrMapping/>
   </p:clrMapOvr>
+  <p:transition spd="slow">
+    <p:wipe/>
+  </p:transition>
   <p:timing>
     <p:tnLst>
       <p:par>
@@ -3294,17 +3480,32 @@
             <p:ph type="title"/>
           </p:nvPr>
         </p:nvSpPr>
-        <p:spPr/>
+        <p:spPr>
+          <a:xfrm>
+            <a:off x="825500" y="215901"/>
+            <a:ext cx="5245100" cy="406400"/>
+          </a:xfrm>
+        </p:spPr>
         <p:txBody>
-          <a:bodyPr/>
+          <a:bodyPr>
+            <a:normAutofit fontScale="90000"/>
+          </a:bodyPr>
           <a:lstStyle/>
           <a:p>
             <a:r>
-              <a:rPr dirty="0" err="1"/>
+              <a:rPr sz="4000" b="1" dirty="0" err="1">
+                <a:solidFill>
+                  <a:srgbClr val="002060"/>
+                </a:solidFill>
+              </a:rPr>
               <a:t>Git</a:t>
             </a:r>
             <a:r>
-              <a:rPr dirty="0"/>
+              <a:rPr sz="4000" b="1" dirty="0">
+                <a:solidFill>
+                  <a:srgbClr val="002060"/>
+                </a:solidFill>
+              </a:rPr>
               <a:t> &amp; GitHub</a:t>
             </a:r>
           </a:p>
@@ -3320,499 +3521,1236 @@
             <p:ph idx="1"/>
           </p:nvPr>
         </p:nvSpPr>
-        <p:spPr/>
+        <p:spPr>
+          <a:xfrm>
+            <a:off x="152400" y="762002"/>
+            <a:ext cx="8229600" cy="2666999"/>
+          </a:xfrm>
+        </p:spPr>
         <p:txBody>
           <a:bodyPr>
             <a:normAutofit fontScale="47500" lnSpcReduction="20000"/>
           </a:bodyPr>
           <a:lstStyle/>
           <a:p>
+            <a:pPr marL="0" indent="0">
+              <a:buNone/>
+            </a:pPr>
             <a:r>
               <a:rPr b="1" u="sng" dirty="0" err="1">
                 <a:solidFill>
+                  <a:srgbClr val="002060"/>
+                </a:solidFill>
+              </a:rPr>
+              <a:t>Historique</a:t>
+            </a:r>
+            <a:r>
+              <a:rPr b="1" u="sng" dirty="0">
+                <a:solidFill>
+                  <a:srgbClr val="002060"/>
+                </a:solidFill>
+              </a:rPr>
+              <a:t> des commits </a:t>
+            </a:r>
+            <a:r>
+              <a:rPr b="1" u="sng" dirty="0" err="1" smtClean="0">
+                <a:solidFill>
+                  <a:srgbClr val="002060"/>
+                </a:solidFill>
+              </a:rPr>
+              <a:t>organisé</a:t>
+            </a:r>
+            <a:endParaRPr lang="en-US" b="1" u="sng" dirty="0" smtClean="0">
+              <a:solidFill>
+                <a:srgbClr val="002060"/>
+              </a:solidFill>
+            </a:endParaRPr>
+          </a:p>
+          <a:p>
+            <a:pPr marL="0" indent="0">
+              <a:buNone/>
+            </a:pPr>
+            <a:r>
+              <a:rPr lang="fr-FR" b="1" dirty="0" smtClean="0"/>
+              <a:t>Commit 1 </a:t>
+            </a:r>
+            <a:r>
+              <a:rPr lang="fr-FR" b="1" dirty="0"/>
+              <a:t>:</a:t>
+            </a:r>
+            <a:r>
+              <a:rPr lang="fr-FR" dirty="0"/>
+              <a:t> </a:t>
+            </a:r>
+            <a:r>
+              <a:rPr lang="fr-FR" dirty="0" smtClean="0"/>
+              <a:t> </a:t>
+            </a:r>
+            <a:r>
+              <a:rPr lang="fr-FR" dirty="0" smtClean="0">
+                <a:solidFill>
+                  <a:schemeClr val="tx2">
+                    <a:lumMod val="60000"/>
+                    <a:lumOff val="40000"/>
+                  </a:schemeClr>
+                </a:solidFill>
+              </a:rPr>
+              <a:t>Init </a:t>
+            </a:r>
+            <a:r>
+              <a:rPr lang="fr-FR" dirty="0">
+                <a:solidFill>
+                  <a:schemeClr val="tx2">
+                    <a:lumMod val="60000"/>
+                    <a:lumOff val="40000"/>
+                  </a:schemeClr>
+                </a:solidFill>
+              </a:rPr>
+              <a:t>: création du dépôt, arborescence des fichiers et structure HTML de base </a:t>
+            </a:r>
+            <a:endParaRPr lang="fr-FR" dirty="0" smtClean="0">
+              <a:solidFill>
+                <a:schemeClr val="tx2">
+                  <a:lumMod val="60000"/>
+                  <a:lumOff val="40000"/>
+                </a:schemeClr>
+              </a:solidFill>
+            </a:endParaRPr>
+          </a:p>
+          <a:p>
+            <a:pPr marL="0" indent="0">
+              <a:buNone/>
+            </a:pPr>
+            <a:r>
+              <a:rPr lang="fr-FR" b="1" dirty="0" smtClean="0"/>
+              <a:t>Commit 2 </a:t>
+            </a:r>
+            <a:r>
+              <a:rPr lang="fr-FR" b="1" dirty="0"/>
+              <a:t>:</a:t>
+            </a:r>
+            <a:r>
+              <a:rPr lang="fr-FR" dirty="0"/>
+              <a:t> </a:t>
+            </a:r>
+            <a:r>
+              <a:rPr lang="fr-FR" dirty="0" smtClean="0"/>
+              <a:t> </a:t>
+            </a:r>
+            <a:r>
+              <a:rPr lang="fr-FR" dirty="0" smtClean="0">
+                <a:solidFill>
+                  <a:schemeClr val="tx2">
+                    <a:lumMod val="60000"/>
+                    <a:lumOff val="40000"/>
+                  </a:schemeClr>
+                </a:solidFill>
+              </a:rPr>
+              <a:t>HTML </a:t>
+            </a:r>
+            <a:r>
+              <a:rPr lang="fr-FR" dirty="0">
+                <a:solidFill>
+                  <a:schemeClr val="tx2">
+                    <a:lumMod val="60000"/>
+                    <a:lumOff val="40000"/>
+                  </a:schemeClr>
+                </a:solidFill>
+              </a:rPr>
+              <a:t>: structure complète des 5 pages avec sections et contenu texte </a:t>
+            </a:r>
+            <a:endParaRPr lang="fr-FR" dirty="0" smtClean="0">
+              <a:solidFill>
+                <a:schemeClr val="tx2">
+                  <a:lumMod val="60000"/>
+                  <a:lumOff val="40000"/>
+                </a:schemeClr>
+              </a:solidFill>
+            </a:endParaRPr>
+          </a:p>
+          <a:p>
+            <a:pPr marL="0" indent="0">
+              <a:buNone/>
+            </a:pPr>
+            <a:r>
+              <a:rPr lang="fr-FR" b="1" dirty="0" smtClean="0"/>
+              <a:t>Commit 3 </a:t>
+            </a:r>
+            <a:r>
+              <a:rPr lang="fr-FR" b="1" dirty="0"/>
+              <a:t>:</a:t>
+            </a:r>
+            <a:r>
+              <a:rPr lang="fr-FR" dirty="0"/>
+              <a:t> </a:t>
+            </a:r>
+            <a:r>
+              <a:rPr lang="fr-FR" dirty="0" smtClean="0"/>
+              <a:t> </a:t>
+            </a:r>
+            <a:r>
+              <a:rPr lang="fr-FR" dirty="0" smtClean="0">
+                <a:solidFill>
+                  <a:schemeClr val="tx2">
+                    <a:lumMod val="60000"/>
+                    <a:lumOff val="40000"/>
+                  </a:schemeClr>
+                </a:solidFill>
+              </a:rPr>
+              <a:t>CSS </a:t>
+            </a:r>
+            <a:r>
+              <a:rPr lang="fr-FR" dirty="0">
+                <a:solidFill>
+                  <a:schemeClr val="tx2">
+                    <a:lumMod val="60000"/>
+                    <a:lumOff val="40000"/>
+                  </a:schemeClr>
+                </a:solidFill>
+              </a:rPr>
+              <a:t>: variables, typographie, layout général et styles de base</a:t>
+            </a:r>
+          </a:p>
+          <a:p>
+            <a:pPr marL="0" indent="0">
+              <a:buNone/>
+            </a:pPr>
+            <a:r>
+              <a:rPr lang="fr-FR" b="1" dirty="0" smtClean="0"/>
+              <a:t>Commit 4 </a:t>
+            </a:r>
+            <a:r>
+              <a:rPr lang="fr-FR" b="1" dirty="0"/>
+              <a:t>:</a:t>
+            </a:r>
+            <a:r>
+              <a:rPr lang="fr-FR" dirty="0"/>
+              <a:t> </a:t>
+            </a:r>
+            <a:r>
+              <a:rPr lang="fr-FR" dirty="0" smtClean="0"/>
+              <a:t> </a:t>
+            </a:r>
+            <a:r>
+              <a:rPr lang="fr-FR" dirty="0" smtClean="0">
+                <a:solidFill>
+                  <a:schemeClr val="tx2">
+                    <a:lumMod val="60000"/>
+                    <a:lumOff val="40000"/>
+                  </a:schemeClr>
+                </a:solidFill>
+              </a:rPr>
+              <a:t>CSS </a:t>
+            </a:r>
+            <a:r>
+              <a:rPr lang="fr-FR" dirty="0">
+                <a:solidFill>
+                  <a:schemeClr val="tx2">
+                    <a:lumMod val="60000"/>
+                    <a:lumOff val="40000"/>
+                  </a:schemeClr>
+                </a:solidFill>
+              </a:rPr>
+              <a:t>: Bento Grid, sections hero et catégories, effets hover </a:t>
+            </a:r>
+            <a:endParaRPr lang="fr-FR" dirty="0" smtClean="0">
+              <a:solidFill>
+                <a:schemeClr val="tx2">
+                  <a:lumMod val="60000"/>
+                  <a:lumOff val="40000"/>
+                </a:schemeClr>
+              </a:solidFill>
+            </a:endParaRPr>
+          </a:p>
+          <a:p>
+            <a:pPr marL="0" indent="0">
+              <a:buNone/>
+            </a:pPr>
+            <a:r>
+              <a:rPr lang="fr-FR" b="1" dirty="0" smtClean="0"/>
+              <a:t>Commit 5 </a:t>
+            </a:r>
+            <a:r>
+              <a:rPr lang="fr-FR" b="1" dirty="0"/>
+              <a:t>:</a:t>
+            </a:r>
+            <a:r>
+              <a:rPr lang="fr-FR" dirty="0"/>
+              <a:t> </a:t>
+            </a:r>
+            <a:r>
+              <a:rPr lang="fr-FR" dirty="0" smtClean="0"/>
+              <a:t> </a:t>
+            </a:r>
+            <a:r>
+              <a:rPr lang="fr-FR" dirty="0" smtClean="0">
+                <a:solidFill>
+                  <a:schemeClr val="tx2">
+                    <a:lumMod val="60000"/>
+                    <a:lumOff val="40000"/>
+                  </a:schemeClr>
+                </a:solidFill>
+              </a:rPr>
+              <a:t>CSS </a:t>
+            </a:r>
+            <a:r>
+              <a:rPr lang="fr-FR" dirty="0">
+                <a:solidFill>
+                  <a:schemeClr val="tx2">
+                    <a:lumMod val="60000"/>
+                    <a:lumOff val="40000"/>
+                  </a:schemeClr>
+                </a:solidFill>
+              </a:rPr>
+              <a:t>: responsive design mobile et tablette, media queries </a:t>
+            </a:r>
+            <a:endParaRPr lang="fr-FR" dirty="0" smtClean="0">
+              <a:solidFill>
+                <a:schemeClr val="tx2">
+                  <a:lumMod val="60000"/>
+                  <a:lumOff val="40000"/>
+                </a:schemeClr>
+              </a:solidFill>
+            </a:endParaRPr>
+          </a:p>
+          <a:p>
+            <a:pPr marL="0" indent="0">
+              <a:buNone/>
+            </a:pPr>
+            <a:r>
+              <a:rPr lang="fr-FR" b="1" dirty="0" smtClean="0"/>
+              <a:t>Commit 6 </a:t>
+            </a:r>
+            <a:r>
+              <a:rPr lang="fr-FR" b="1" dirty="0"/>
+              <a:t>:</a:t>
+            </a:r>
+            <a:r>
+              <a:rPr lang="fr-FR" dirty="0"/>
+              <a:t> </a:t>
+            </a:r>
+            <a:r>
+              <a:rPr lang="fr-FR" dirty="0" smtClean="0"/>
+              <a:t> </a:t>
+            </a:r>
+            <a:r>
+              <a:rPr lang="fr-FR" dirty="0" smtClean="0">
+                <a:solidFill>
+                  <a:schemeClr val="tx2">
+                    <a:lumMod val="60000"/>
+                    <a:lumOff val="40000"/>
+                  </a:schemeClr>
+                </a:solidFill>
+              </a:rPr>
+              <a:t>JS </a:t>
+            </a:r>
+            <a:r>
+              <a:rPr lang="fr-FR" dirty="0">
+                <a:solidFill>
+                  <a:schemeClr val="tx2">
+                    <a:lumMod val="60000"/>
+                    <a:lumOff val="40000"/>
+                  </a:schemeClr>
+                </a:solidFill>
+              </a:rPr>
+              <a:t>: dark mode avec localStorage, navbar dynamique au scroll</a:t>
+            </a:r>
+          </a:p>
+          <a:p>
+            <a:pPr marL="0" indent="0">
+              <a:buNone/>
+            </a:pPr>
+            <a:r>
+              <a:rPr lang="fr-FR" b="1" dirty="0" smtClean="0"/>
+              <a:t>Commit 7 </a:t>
+            </a:r>
+            <a:r>
+              <a:rPr lang="fr-FR" b="1" dirty="0"/>
+              <a:t>:</a:t>
+            </a:r>
+            <a:r>
+              <a:rPr lang="fr-FR" dirty="0"/>
+              <a:t> </a:t>
+            </a:r>
+            <a:r>
+              <a:rPr lang="fr-FR" dirty="0" smtClean="0"/>
+              <a:t> </a:t>
+            </a:r>
+            <a:r>
+              <a:rPr lang="fr-FR" dirty="0" smtClean="0">
+                <a:solidFill>
+                  <a:schemeClr val="tx2">
+                    <a:lumMod val="60000"/>
+                    <a:lumOff val="40000"/>
+                  </a:schemeClr>
+                </a:solidFill>
+              </a:rPr>
+              <a:t>JS </a:t>
+            </a:r>
+            <a:r>
+              <a:rPr lang="fr-FR" dirty="0">
+                <a:solidFill>
+                  <a:schemeClr val="tx2">
+                    <a:lumMod val="60000"/>
+                    <a:lumOff val="40000"/>
+                  </a:schemeClr>
+                </a:solidFill>
+              </a:rPr>
+              <a:t>: compteurs animés au scroll et animations fade-in des sections </a:t>
+            </a:r>
+            <a:endParaRPr lang="fr-FR" dirty="0" smtClean="0">
+              <a:solidFill>
+                <a:schemeClr val="tx2">
+                  <a:lumMod val="60000"/>
+                  <a:lumOff val="40000"/>
+                </a:schemeClr>
+              </a:solidFill>
+            </a:endParaRPr>
+          </a:p>
+          <a:p>
+            <a:pPr marL="0" indent="0">
+              <a:buNone/>
+            </a:pPr>
+            <a:r>
+              <a:rPr lang="fr-FR" b="1" dirty="0" smtClean="0"/>
+              <a:t>Commit 8 </a:t>
+            </a:r>
+            <a:r>
+              <a:rPr lang="fr-FR" b="1" dirty="0"/>
+              <a:t>:</a:t>
+            </a:r>
+            <a:r>
+              <a:rPr lang="fr-FR" dirty="0"/>
+              <a:t> </a:t>
+            </a:r>
+            <a:r>
+              <a:rPr lang="fr-FR" dirty="0" smtClean="0"/>
+              <a:t> </a:t>
+            </a:r>
+            <a:r>
+              <a:rPr lang="fr-FR" dirty="0" smtClean="0">
+                <a:solidFill>
+                  <a:schemeClr val="tx2">
+                    <a:lumMod val="60000"/>
+                    <a:lumOff val="40000"/>
+                  </a:schemeClr>
+                </a:solidFill>
+              </a:rPr>
+              <a:t>JS </a:t>
+            </a:r>
+            <a:r>
+              <a:rPr lang="fr-FR" dirty="0">
+                <a:solidFill>
+                  <a:schemeClr val="tx2">
+                    <a:lumMod val="60000"/>
+                    <a:lumOff val="40000"/>
+                  </a:schemeClr>
+                </a:solidFill>
+              </a:rPr>
+              <a:t>: filtrage dynamique des freelances et validation du formulaire de contact</a:t>
+            </a:r>
+          </a:p>
+          <a:p>
+            <a:pPr marL="0" indent="0">
+              <a:buNone/>
+            </a:pPr>
+            <a:r>
+              <a:rPr lang="fr-FR" b="1" dirty="0" smtClean="0"/>
+              <a:t>Commit 9 </a:t>
+            </a:r>
+            <a:r>
+              <a:rPr lang="fr-FR" b="1" dirty="0"/>
+              <a:t>:</a:t>
+            </a:r>
+            <a:r>
+              <a:rPr lang="fr-FR" dirty="0"/>
+              <a:t> </a:t>
+            </a:r>
+            <a:r>
+              <a:rPr lang="fr-FR" dirty="0" smtClean="0"/>
+              <a:t> </a:t>
+            </a:r>
+            <a:r>
+              <a:rPr lang="fr-FR" dirty="0" smtClean="0">
+                <a:solidFill>
+                  <a:schemeClr val="tx2">
+                    <a:lumMod val="60000"/>
+                    <a:lumOff val="40000"/>
+                  </a:schemeClr>
+                </a:solidFill>
+              </a:rPr>
+              <a:t>Finalisation </a:t>
+            </a:r>
+            <a:r>
+              <a:rPr lang="fr-FR" dirty="0">
+                <a:solidFill>
+                  <a:schemeClr val="tx2">
+                    <a:lumMod val="60000"/>
+                    <a:lumOff val="40000"/>
+                  </a:schemeClr>
+                </a:solidFill>
+              </a:rPr>
+              <a:t>: corrections responsive, optimisation du code et commentaires</a:t>
+            </a:r>
+          </a:p>
+          <a:p>
+            <a:pPr marL="0" indent="0">
+              <a:buNone/>
+            </a:pPr>
+            <a:r>
+              <a:rPr lang="fr-FR" b="1" dirty="0" smtClean="0"/>
+              <a:t>Commit 10 </a:t>
+            </a:r>
+            <a:r>
+              <a:rPr lang="fr-FR" b="1" dirty="0"/>
+              <a:t>:</a:t>
+            </a:r>
+            <a:r>
+              <a:rPr lang="fr-FR" dirty="0"/>
+              <a:t> </a:t>
+            </a:r>
+            <a:r>
+              <a:rPr lang="fr-FR" dirty="0">
+                <a:solidFill>
+                  <a:schemeClr val="tx2">
+                    <a:lumMod val="60000"/>
+                    <a:lumOff val="40000"/>
+                  </a:schemeClr>
+                </a:solidFill>
+              </a:rPr>
+              <a:t>Déploiement : GitHub Pages activé, README finalisé et présentation PowerPoint </a:t>
+            </a:r>
+            <a:r>
+              <a:rPr lang="fr-FR" dirty="0" smtClean="0">
+                <a:solidFill>
+                  <a:schemeClr val="tx2">
+                    <a:lumMod val="60000"/>
+                    <a:lumOff val="40000"/>
+                  </a:schemeClr>
+                </a:solidFill>
+              </a:rPr>
+              <a:t>ajoutée</a:t>
+            </a:r>
+            <a:endParaRPr dirty="0">
+              <a:solidFill>
+                <a:schemeClr val="tx2">
+                  <a:lumMod val="60000"/>
+                  <a:lumOff val="40000"/>
+                </a:schemeClr>
+              </a:solidFill>
+            </a:endParaRPr>
+          </a:p>
+        </p:txBody>
+      </p:sp>
+      <p:sp>
+        <p:nvSpPr>
+          <p:cNvPr id="4" name="Content Placeholder 2"/>
+          <p:cNvSpPr txBox="1">
+            <a:spLocks/>
+          </p:cNvSpPr>
+          <p:nvPr/>
+        </p:nvSpPr>
+        <p:spPr>
+          <a:xfrm>
+            <a:off x="304800" y="3505201"/>
+            <a:ext cx="4546600" cy="571499"/>
+          </a:xfrm>
+          <a:prstGeom prst="rect">
+            <a:avLst/>
+          </a:prstGeom>
+        </p:spPr>
+        <p:txBody>
+          <a:bodyPr vert="horz" lIns="91440" tIns="45720" rIns="91440" bIns="45720" rtlCol="0">
+            <a:normAutofit/>
+          </a:bodyPr>
+          <a:lstStyle>
+            <a:lvl1pPr marL="342900" indent="-342900" algn="l" defTabSz="457200" rtl="0" eaLnBrk="1" latinLnBrk="0" hangingPunct="1">
+              <a:spcBef>
+                <a:spcPct val="20000"/>
+              </a:spcBef>
+              <a:buFont typeface="Arial"/>
+              <a:buChar char="•"/>
+              <a:defRPr sz="3200" kern="1200">
+                <a:solidFill>
+                  <a:schemeClr val="tx1"/>
+                </a:solidFill>
+                <a:latin typeface="+mn-lt"/>
+                <a:ea typeface="+mn-ea"/>
+                <a:cs typeface="+mn-cs"/>
+              </a:defRPr>
+            </a:lvl1pPr>
+            <a:lvl2pPr marL="742950" indent="-285750" algn="l" defTabSz="457200" rtl="0" eaLnBrk="1" latinLnBrk="0" hangingPunct="1">
+              <a:spcBef>
+                <a:spcPct val="20000"/>
+              </a:spcBef>
+              <a:buFont typeface="Arial"/>
+              <a:buChar char="–"/>
+              <a:defRPr sz="2800" kern="1200">
+                <a:solidFill>
+                  <a:schemeClr val="tx1"/>
+                </a:solidFill>
+                <a:latin typeface="+mn-lt"/>
+                <a:ea typeface="+mn-ea"/>
+                <a:cs typeface="+mn-cs"/>
+              </a:defRPr>
+            </a:lvl2pPr>
+            <a:lvl3pPr marL="1143000" indent="-228600" algn="l" defTabSz="457200" rtl="0" eaLnBrk="1" latinLnBrk="0" hangingPunct="1">
+              <a:spcBef>
+                <a:spcPct val="20000"/>
+              </a:spcBef>
+              <a:buFont typeface="Arial"/>
+              <a:buChar char="•"/>
+              <a:defRPr sz="2400" kern="1200">
+                <a:solidFill>
+                  <a:schemeClr val="tx1"/>
+                </a:solidFill>
+                <a:latin typeface="+mn-lt"/>
+                <a:ea typeface="+mn-ea"/>
+                <a:cs typeface="+mn-cs"/>
+              </a:defRPr>
+            </a:lvl3pPr>
+            <a:lvl4pPr marL="1600200" indent="-228600" algn="l" defTabSz="457200" rtl="0" eaLnBrk="1" latinLnBrk="0" hangingPunct="1">
+              <a:spcBef>
+                <a:spcPct val="20000"/>
+              </a:spcBef>
+              <a:buFont typeface="Arial"/>
+              <a:buChar char="–"/>
+              <a:defRPr sz="2000" kern="1200">
+                <a:solidFill>
+                  <a:schemeClr val="tx1"/>
+                </a:solidFill>
+                <a:latin typeface="+mn-lt"/>
+                <a:ea typeface="+mn-ea"/>
+                <a:cs typeface="+mn-cs"/>
+              </a:defRPr>
+            </a:lvl4pPr>
+            <a:lvl5pPr marL="2057400" indent="-228600" algn="l" defTabSz="457200" rtl="0" eaLnBrk="1" latinLnBrk="0" hangingPunct="1">
+              <a:spcBef>
+                <a:spcPct val="20000"/>
+              </a:spcBef>
+              <a:buFont typeface="Arial"/>
+              <a:buChar char="»"/>
+              <a:defRPr sz="2000" kern="1200">
+                <a:solidFill>
+                  <a:schemeClr val="tx1"/>
+                </a:solidFill>
+                <a:latin typeface="+mn-lt"/>
+                <a:ea typeface="+mn-ea"/>
+                <a:cs typeface="+mn-cs"/>
+              </a:defRPr>
+            </a:lvl5pPr>
+            <a:lvl6pPr marL="2514600" indent="-228600" algn="l" defTabSz="457200" rtl="0" eaLnBrk="1" latinLnBrk="0" hangingPunct="1">
+              <a:spcBef>
+                <a:spcPct val="20000"/>
+              </a:spcBef>
+              <a:buFont typeface="Arial"/>
+              <a:buChar char="•"/>
+              <a:defRPr sz="2000" kern="1200">
+                <a:solidFill>
+                  <a:schemeClr val="tx1"/>
+                </a:solidFill>
+                <a:latin typeface="+mn-lt"/>
+                <a:ea typeface="+mn-ea"/>
+                <a:cs typeface="+mn-cs"/>
+              </a:defRPr>
+            </a:lvl6pPr>
+            <a:lvl7pPr marL="2971800" indent="-228600" algn="l" defTabSz="457200" rtl="0" eaLnBrk="1" latinLnBrk="0" hangingPunct="1">
+              <a:spcBef>
+                <a:spcPct val="20000"/>
+              </a:spcBef>
+              <a:buFont typeface="Arial"/>
+              <a:buChar char="•"/>
+              <a:defRPr sz="2000" kern="1200">
+                <a:solidFill>
+                  <a:schemeClr val="tx1"/>
+                </a:solidFill>
+                <a:latin typeface="+mn-lt"/>
+                <a:ea typeface="+mn-ea"/>
+                <a:cs typeface="+mn-cs"/>
+              </a:defRPr>
+            </a:lvl7pPr>
+            <a:lvl8pPr marL="3429000" indent="-228600" algn="l" defTabSz="457200" rtl="0" eaLnBrk="1" latinLnBrk="0" hangingPunct="1">
+              <a:spcBef>
+                <a:spcPct val="20000"/>
+              </a:spcBef>
+              <a:buFont typeface="Arial"/>
+              <a:buChar char="•"/>
+              <a:defRPr sz="2000" kern="1200">
+                <a:solidFill>
+                  <a:schemeClr val="tx1"/>
+                </a:solidFill>
+                <a:latin typeface="+mn-lt"/>
+                <a:ea typeface="+mn-ea"/>
+                <a:cs typeface="+mn-cs"/>
+              </a:defRPr>
+            </a:lvl8pPr>
+            <a:lvl9pPr marL="3886200" indent="-228600" algn="l" defTabSz="457200" rtl="0" eaLnBrk="1" latinLnBrk="0" hangingPunct="1">
+              <a:spcBef>
+                <a:spcPct val="20000"/>
+              </a:spcBef>
+              <a:buFont typeface="Arial"/>
+              <a:buChar char="•"/>
+              <a:defRPr sz="2000" kern="1200">
+                <a:solidFill>
+                  <a:schemeClr val="tx1"/>
+                </a:solidFill>
+                <a:latin typeface="+mn-lt"/>
+                <a:ea typeface="+mn-ea"/>
+                <a:cs typeface="+mn-cs"/>
+              </a:defRPr>
+            </a:lvl9pPr>
+          </a:lstStyle>
+          <a:p>
+            <a:pPr marL="0" indent="0">
+              <a:buNone/>
+            </a:pPr>
+            <a:r>
+              <a:rPr lang="fr-FR" sz="1600" b="1" u="sng" dirty="0">
+                <a:solidFill>
                   <a:srgbClr val="C00000"/>
                 </a:solidFill>
               </a:rPr>
-              <a:t>Historique</a:t>
-            </a:r>
-            <a:r>
-              <a:rPr b="1" u="sng" dirty="0">
+              <a:t>Workflow Git </a:t>
+            </a:r>
+            <a:r>
+              <a:rPr lang="fr-FR" sz="1600" b="1" u="sng" dirty="0" smtClean="0">
                 <a:solidFill>
                   <a:srgbClr val="C00000"/>
                 </a:solidFill>
               </a:rPr>
-              <a:t> des commits </a:t>
-            </a:r>
-            <a:r>
-              <a:rPr b="1" u="sng" dirty="0" err="1" smtClean="0">
-                <a:solidFill>
-                  <a:srgbClr val="C00000"/>
-                </a:solidFill>
-              </a:rPr>
-              <a:t>organisé</a:t>
-            </a:r>
-            <a:endParaRPr lang="en-US" b="1" u="sng" dirty="0" smtClean="0">
+              <a:t>structuré</a:t>
+            </a:r>
+            <a:endParaRPr lang="fr-FR" sz="1600" b="1" u="sng" dirty="0">
               <a:solidFill>
                 <a:srgbClr val="C00000"/>
               </a:solidFill>
             </a:endParaRPr>
           </a:p>
-          <a:p>
-            <a:r>
-              <a:rPr lang="fr-FR" b="1" dirty="0" smtClean="0"/>
-              <a:t>Commit 1 </a:t>
-            </a:r>
-            <a:r>
-              <a:rPr lang="fr-FR" b="1" dirty="0"/>
-              <a:t>:</a:t>
-            </a:r>
-            <a:r>
-              <a:rPr lang="fr-FR" dirty="0"/>
-              <a:t> </a:t>
-            </a:r>
-            <a:r>
-              <a:rPr lang="fr-FR" dirty="0" err="1"/>
-              <a:t>Init</a:t>
-            </a:r>
-            <a:r>
-              <a:rPr lang="fr-FR" dirty="0"/>
-              <a:t> : création du dépôt, arborescence des fichiers et structure HTML de base </a:t>
-            </a:r>
-            <a:endParaRPr lang="fr-FR" dirty="0" smtClean="0"/>
-          </a:p>
-          <a:p>
-            <a:r>
-              <a:rPr lang="fr-FR" b="1" dirty="0" err="1" smtClean="0"/>
-              <a:t>Comiit</a:t>
-            </a:r>
-            <a:r>
-              <a:rPr lang="fr-FR" b="1" dirty="0" smtClean="0"/>
-              <a:t> 2 </a:t>
-            </a:r>
-            <a:r>
-              <a:rPr lang="fr-FR" b="1" dirty="0"/>
-              <a:t>:</a:t>
-            </a:r>
-            <a:r>
-              <a:rPr lang="fr-FR" dirty="0"/>
-              <a:t> HTML : structure complète des 5 pages avec sections et contenu texte </a:t>
-            </a:r>
-            <a:endParaRPr lang="fr-FR" dirty="0" smtClean="0"/>
-          </a:p>
-          <a:p>
-            <a:r>
-              <a:rPr lang="fr-FR" b="1" dirty="0" smtClean="0"/>
-              <a:t>Commit 3 </a:t>
-            </a:r>
-            <a:r>
-              <a:rPr lang="fr-FR" b="1" dirty="0"/>
-              <a:t>:</a:t>
-            </a:r>
-            <a:r>
-              <a:rPr lang="fr-FR" dirty="0"/>
-              <a:t> CSS : variables, typographie, </a:t>
-            </a:r>
-            <a:r>
-              <a:rPr lang="fr-FR" dirty="0" err="1"/>
-              <a:t>layout</a:t>
-            </a:r>
-            <a:r>
-              <a:rPr lang="fr-FR" dirty="0"/>
-              <a:t> général et styles de base</a:t>
-            </a:r>
-          </a:p>
-          <a:p>
-            <a:r>
-              <a:rPr lang="fr-FR" b="1" dirty="0" smtClean="0"/>
-              <a:t>Commit 4 </a:t>
-            </a:r>
-            <a:r>
-              <a:rPr lang="fr-FR" b="1" dirty="0"/>
-              <a:t>:</a:t>
-            </a:r>
-            <a:r>
-              <a:rPr lang="fr-FR" dirty="0"/>
-              <a:t> CSS : Bento </a:t>
-            </a:r>
-            <a:r>
-              <a:rPr lang="fr-FR" dirty="0" err="1"/>
-              <a:t>Grid</a:t>
-            </a:r>
-            <a:r>
-              <a:rPr lang="fr-FR" dirty="0"/>
-              <a:t>, sections </a:t>
-            </a:r>
-            <a:r>
-              <a:rPr lang="fr-FR" dirty="0" err="1"/>
-              <a:t>hero</a:t>
-            </a:r>
-            <a:r>
-              <a:rPr lang="fr-FR" dirty="0"/>
-              <a:t> et catégories, effets </a:t>
-            </a:r>
-            <a:r>
-              <a:rPr lang="fr-FR" dirty="0" err="1"/>
-              <a:t>hover</a:t>
-            </a:r>
-            <a:r>
-              <a:rPr lang="fr-FR" dirty="0"/>
-              <a:t> </a:t>
-            </a:r>
-            <a:endParaRPr lang="fr-FR" dirty="0" smtClean="0"/>
-          </a:p>
-          <a:p>
-            <a:r>
-              <a:rPr lang="fr-FR" b="1" dirty="0" smtClean="0"/>
-              <a:t>Commit 5 </a:t>
-            </a:r>
-            <a:r>
-              <a:rPr lang="fr-FR" b="1" dirty="0"/>
-              <a:t>:</a:t>
-            </a:r>
-            <a:r>
-              <a:rPr lang="fr-FR" dirty="0"/>
-              <a:t> CSS : responsive design mobile et tablette, media </a:t>
-            </a:r>
-            <a:r>
-              <a:rPr lang="fr-FR" dirty="0" err="1"/>
-              <a:t>queries</a:t>
-            </a:r>
-            <a:r>
-              <a:rPr lang="fr-FR" dirty="0"/>
-              <a:t> </a:t>
-            </a:r>
-            <a:endParaRPr lang="fr-FR" dirty="0" smtClean="0"/>
-          </a:p>
-          <a:p>
-            <a:r>
-              <a:rPr lang="fr-FR" b="1" dirty="0" smtClean="0"/>
-              <a:t>Commit 6 </a:t>
-            </a:r>
-            <a:r>
-              <a:rPr lang="fr-FR" b="1" dirty="0"/>
-              <a:t>:</a:t>
-            </a:r>
-            <a:r>
-              <a:rPr lang="fr-FR" dirty="0"/>
-              <a:t> JS : </a:t>
-            </a:r>
-            <a:r>
-              <a:rPr lang="fr-FR" dirty="0" err="1"/>
-              <a:t>dark</a:t>
-            </a:r>
-            <a:r>
-              <a:rPr lang="fr-FR" dirty="0"/>
-              <a:t> mode avec </a:t>
-            </a:r>
-            <a:r>
-              <a:rPr lang="fr-FR" dirty="0" err="1"/>
-              <a:t>localStorage</a:t>
-            </a:r>
-            <a:r>
-              <a:rPr lang="fr-FR" dirty="0"/>
-              <a:t>, </a:t>
-            </a:r>
-            <a:r>
-              <a:rPr lang="fr-FR" dirty="0" err="1"/>
-              <a:t>navbar</a:t>
-            </a:r>
-            <a:r>
-              <a:rPr lang="fr-FR" dirty="0"/>
-              <a:t> dynamique au scroll</a:t>
-            </a:r>
-          </a:p>
-          <a:p>
-            <a:r>
-              <a:rPr lang="fr-FR" b="1" dirty="0" smtClean="0"/>
-              <a:t>Commit 7 </a:t>
-            </a:r>
-            <a:r>
-              <a:rPr lang="fr-FR" b="1" dirty="0"/>
-              <a:t>:</a:t>
-            </a:r>
-            <a:r>
-              <a:rPr lang="fr-FR" dirty="0"/>
-              <a:t> JS : compteurs animés au scroll et animations fade-in des sections </a:t>
-            </a:r>
-            <a:endParaRPr lang="fr-FR" dirty="0" smtClean="0"/>
-          </a:p>
-          <a:p>
-            <a:r>
-              <a:rPr lang="fr-FR" b="1" dirty="0" smtClean="0"/>
-              <a:t>Commit 8 </a:t>
-            </a:r>
-            <a:r>
-              <a:rPr lang="fr-FR" b="1" dirty="0"/>
-              <a:t>:</a:t>
-            </a:r>
-            <a:r>
-              <a:rPr lang="fr-FR" dirty="0"/>
-              <a:t> JS : filtrage dynamique des freelances et validation du formulaire de contact</a:t>
-            </a:r>
-          </a:p>
-          <a:p>
-            <a:r>
-              <a:rPr lang="fr-FR" b="1" dirty="0" smtClean="0"/>
-              <a:t>Commit 9 </a:t>
-            </a:r>
-            <a:r>
-              <a:rPr lang="fr-FR" b="1" dirty="0"/>
-              <a:t>:</a:t>
-            </a:r>
-            <a:r>
-              <a:rPr lang="fr-FR" dirty="0"/>
-              <a:t> Finalisation : corrections responsive, optimisation du code et commentaires</a:t>
-            </a:r>
-          </a:p>
-          <a:p>
-            <a:r>
-              <a:rPr lang="fr-FR" b="1" dirty="0" smtClean="0"/>
-              <a:t>Commit 10 </a:t>
-            </a:r>
-            <a:r>
-              <a:rPr lang="fr-FR" b="1" dirty="0"/>
-              <a:t>:</a:t>
-            </a:r>
-            <a:r>
-              <a:rPr lang="fr-FR" dirty="0"/>
-              <a:t> Déploiement : GitHub Pages activé, README finalisé et présentation PowerPoint </a:t>
-            </a:r>
-            <a:r>
-              <a:rPr lang="fr-FR" dirty="0" smtClean="0"/>
-              <a:t>ajoutée</a:t>
-            </a:r>
-            <a:endParaRPr dirty="0"/>
-          </a:p>
-          <a:p>
-            <a:r>
-              <a:rPr b="1" u="sng" dirty="0" smtClean="0">
-                <a:solidFill>
-                  <a:srgbClr val="C00000"/>
-                </a:solidFill>
-              </a:rPr>
-              <a:t>Workflow </a:t>
-            </a:r>
-            <a:r>
-              <a:rPr b="1" u="sng" dirty="0" err="1">
-                <a:solidFill>
-                  <a:srgbClr val="C00000"/>
-                </a:solidFill>
-              </a:rPr>
-              <a:t>Git</a:t>
-            </a:r>
-            <a:r>
-              <a:rPr b="1" u="sng" dirty="0">
-                <a:solidFill>
-                  <a:srgbClr val="C00000"/>
-                </a:solidFill>
-              </a:rPr>
-              <a:t> </a:t>
-            </a:r>
-            <a:r>
-              <a:rPr b="1" u="sng" dirty="0" err="1" smtClean="0">
-                <a:solidFill>
-                  <a:srgbClr val="C00000"/>
-                </a:solidFill>
-              </a:rPr>
-              <a:t>structuré</a:t>
-            </a:r>
-            <a:endParaRPr lang="en-US" b="1" u="sng" dirty="0" smtClean="0">
+        </p:txBody>
+      </p:sp>
+      <p:sp>
+        <p:nvSpPr>
+          <p:cNvPr id="5" name="Content Placeholder 2"/>
+          <p:cNvSpPr txBox="1">
+            <a:spLocks/>
+          </p:cNvSpPr>
+          <p:nvPr/>
+        </p:nvSpPr>
+        <p:spPr>
+          <a:xfrm>
+            <a:off x="457200" y="6045201"/>
+            <a:ext cx="6769100" cy="825499"/>
+          </a:xfrm>
+          <a:prstGeom prst="rect">
+            <a:avLst/>
+          </a:prstGeom>
+        </p:spPr>
+        <p:txBody>
+          <a:bodyPr vert="horz" lIns="91440" tIns="45720" rIns="91440" bIns="45720" rtlCol="0">
+            <a:normAutofit fontScale="92500"/>
+          </a:bodyPr>
+          <a:lstStyle>
+            <a:lvl1pPr marL="342900" indent="-342900" algn="l" defTabSz="457200" rtl="0" eaLnBrk="1" latinLnBrk="0" hangingPunct="1">
+              <a:spcBef>
+                <a:spcPct val="20000"/>
+              </a:spcBef>
+              <a:buFont typeface="Arial"/>
+              <a:buChar char="•"/>
+              <a:defRPr sz="3200" kern="1200">
+                <a:solidFill>
+                  <a:schemeClr val="tx1"/>
+                </a:solidFill>
+                <a:latin typeface="+mn-lt"/>
+                <a:ea typeface="+mn-ea"/>
+                <a:cs typeface="+mn-cs"/>
+              </a:defRPr>
+            </a:lvl1pPr>
+            <a:lvl2pPr marL="742950" indent="-285750" algn="l" defTabSz="457200" rtl="0" eaLnBrk="1" latinLnBrk="0" hangingPunct="1">
+              <a:spcBef>
+                <a:spcPct val="20000"/>
+              </a:spcBef>
+              <a:buFont typeface="Arial"/>
+              <a:buChar char="–"/>
+              <a:defRPr sz="2800" kern="1200">
+                <a:solidFill>
+                  <a:schemeClr val="tx1"/>
+                </a:solidFill>
+                <a:latin typeface="+mn-lt"/>
+                <a:ea typeface="+mn-ea"/>
+                <a:cs typeface="+mn-cs"/>
+              </a:defRPr>
+            </a:lvl2pPr>
+            <a:lvl3pPr marL="1143000" indent="-228600" algn="l" defTabSz="457200" rtl="0" eaLnBrk="1" latinLnBrk="0" hangingPunct="1">
+              <a:spcBef>
+                <a:spcPct val="20000"/>
+              </a:spcBef>
+              <a:buFont typeface="Arial"/>
+              <a:buChar char="•"/>
+              <a:defRPr sz="2400" kern="1200">
+                <a:solidFill>
+                  <a:schemeClr val="tx1"/>
+                </a:solidFill>
+                <a:latin typeface="+mn-lt"/>
+                <a:ea typeface="+mn-ea"/>
+                <a:cs typeface="+mn-cs"/>
+              </a:defRPr>
+            </a:lvl3pPr>
+            <a:lvl4pPr marL="1600200" indent="-228600" algn="l" defTabSz="457200" rtl="0" eaLnBrk="1" latinLnBrk="0" hangingPunct="1">
+              <a:spcBef>
+                <a:spcPct val="20000"/>
+              </a:spcBef>
+              <a:buFont typeface="Arial"/>
+              <a:buChar char="–"/>
+              <a:defRPr sz="2000" kern="1200">
+                <a:solidFill>
+                  <a:schemeClr val="tx1"/>
+                </a:solidFill>
+                <a:latin typeface="+mn-lt"/>
+                <a:ea typeface="+mn-ea"/>
+                <a:cs typeface="+mn-cs"/>
+              </a:defRPr>
+            </a:lvl4pPr>
+            <a:lvl5pPr marL="2057400" indent="-228600" algn="l" defTabSz="457200" rtl="0" eaLnBrk="1" latinLnBrk="0" hangingPunct="1">
+              <a:spcBef>
+                <a:spcPct val="20000"/>
+              </a:spcBef>
+              <a:buFont typeface="Arial"/>
+              <a:buChar char="»"/>
+              <a:defRPr sz="2000" kern="1200">
+                <a:solidFill>
+                  <a:schemeClr val="tx1"/>
+                </a:solidFill>
+                <a:latin typeface="+mn-lt"/>
+                <a:ea typeface="+mn-ea"/>
+                <a:cs typeface="+mn-cs"/>
+              </a:defRPr>
+            </a:lvl5pPr>
+            <a:lvl6pPr marL="2514600" indent="-228600" algn="l" defTabSz="457200" rtl="0" eaLnBrk="1" latinLnBrk="0" hangingPunct="1">
+              <a:spcBef>
+                <a:spcPct val="20000"/>
+              </a:spcBef>
+              <a:buFont typeface="Arial"/>
+              <a:buChar char="•"/>
+              <a:defRPr sz="2000" kern="1200">
+                <a:solidFill>
+                  <a:schemeClr val="tx1"/>
+                </a:solidFill>
+                <a:latin typeface="+mn-lt"/>
+                <a:ea typeface="+mn-ea"/>
+                <a:cs typeface="+mn-cs"/>
+              </a:defRPr>
+            </a:lvl6pPr>
+            <a:lvl7pPr marL="2971800" indent="-228600" algn="l" defTabSz="457200" rtl="0" eaLnBrk="1" latinLnBrk="0" hangingPunct="1">
+              <a:spcBef>
+                <a:spcPct val="20000"/>
+              </a:spcBef>
+              <a:buFont typeface="Arial"/>
+              <a:buChar char="•"/>
+              <a:defRPr sz="2000" kern="1200">
+                <a:solidFill>
+                  <a:schemeClr val="tx1"/>
+                </a:solidFill>
+                <a:latin typeface="+mn-lt"/>
+                <a:ea typeface="+mn-ea"/>
+                <a:cs typeface="+mn-cs"/>
+              </a:defRPr>
+            </a:lvl7pPr>
+            <a:lvl8pPr marL="3429000" indent="-228600" algn="l" defTabSz="457200" rtl="0" eaLnBrk="1" latinLnBrk="0" hangingPunct="1">
+              <a:spcBef>
+                <a:spcPct val="20000"/>
+              </a:spcBef>
+              <a:buFont typeface="Arial"/>
+              <a:buChar char="•"/>
+              <a:defRPr sz="2000" kern="1200">
+                <a:solidFill>
+                  <a:schemeClr val="tx1"/>
+                </a:solidFill>
+                <a:latin typeface="+mn-lt"/>
+                <a:ea typeface="+mn-ea"/>
+                <a:cs typeface="+mn-cs"/>
+              </a:defRPr>
+            </a:lvl8pPr>
+            <a:lvl9pPr marL="3886200" indent="-228600" algn="l" defTabSz="457200" rtl="0" eaLnBrk="1" latinLnBrk="0" hangingPunct="1">
+              <a:spcBef>
+                <a:spcPct val="20000"/>
+              </a:spcBef>
+              <a:buFont typeface="Arial"/>
+              <a:buChar char="•"/>
+              <a:defRPr sz="2000" kern="1200">
+                <a:solidFill>
+                  <a:schemeClr val="tx1"/>
+                </a:solidFill>
+                <a:latin typeface="+mn-lt"/>
+                <a:ea typeface="+mn-ea"/>
+                <a:cs typeface="+mn-cs"/>
+              </a:defRPr>
+            </a:lvl9pPr>
+          </a:lstStyle>
+          <a:p>
+            <a:pPr marL="0" indent="0">
+              <a:buNone/>
+            </a:pPr>
+            <a:r>
+              <a:rPr lang="fr-FR" sz="1600" b="1" u="sng" dirty="0">
+                <a:solidFill>
+                  <a:srgbClr val="002060"/>
+                </a:solidFill>
+              </a:rPr>
+              <a:t>Déploiement du site en ligne:</a:t>
+            </a:r>
+          </a:p>
+          <a:p>
+            <a:pPr marL="0" indent="0">
+              <a:buNone/>
+            </a:pPr>
+            <a:r>
+              <a:rPr lang="fr-FR" sz="1600" b="1" u="sng" dirty="0">
+                <a:solidFill>
+                  <a:schemeClr val="tx2">
+                    <a:lumMod val="60000"/>
+                    <a:lumOff val="40000"/>
+                  </a:schemeClr>
+                </a:solidFill>
+              </a:rPr>
+              <a:t>https://</a:t>
+            </a:r>
+            <a:r>
+              <a:rPr lang="fr-FR" sz="1800" b="1" u="sng" dirty="0">
+                <a:solidFill>
+                  <a:schemeClr val="tx2">
+                    <a:lumMod val="60000"/>
+                    <a:lumOff val="40000"/>
+                  </a:schemeClr>
+                </a:solidFill>
+              </a:rPr>
+              <a:t>sophiesticated221.github.io/TIMERA-OUMOULKHAIRI-AfriTalent</a:t>
+            </a:r>
+            <a:r>
+              <a:rPr lang="fr-FR" sz="1600" b="1" u="sng" dirty="0">
+                <a:solidFill>
+                  <a:schemeClr val="tx2">
+                    <a:lumMod val="60000"/>
+                    <a:lumOff val="40000"/>
+                  </a:schemeClr>
+                </a:solidFill>
+              </a:rPr>
+              <a:t>/</a:t>
+            </a:r>
+          </a:p>
+          <a:p>
+            <a:pPr marL="0" indent="0">
+              <a:buNone/>
+            </a:pPr>
+            <a:endParaRPr lang="fr-FR" sz="6400" b="1" u="sng" dirty="0">
               <a:solidFill>
-                <a:srgbClr val="C00000"/>
+                <a:schemeClr val="tx2">
+                  <a:lumMod val="60000"/>
+                  <a:lumOff val="40000"/>
+                </a:schemeClr>
               </a:solidFill>
             </a:endParaRPr>
           </a:p>
-          <a:p>
-            <a:r>
-              <a:rPr lang="en-US" dirty="0" err="1" smtClean="0">
-                <a:solidFill>
-                  <a:srgbClr val="FFC000"/>
-                </a:solidFill>
-              </a:rPr>
-              <a:t>Git</a:t>
-            </a:r>
-            <a:r>
-              <a:rPr lang="en-US" dirty="0" smtClean="0"/>
-              <a:t> </a:t>
-            </a:r>
-            <a:r>
-              <a:rPr lang="en-US" dirty="0" err="1" smtClean="0"/>
-              <a:t>init</a:t>
-            </a:r>
-            <a:r>
-              <a:rPr lang="en-US" dirty="0" smtClean="0"/>
-              <a:t> : initialization du </a:t>
-            </a:r>
-            <a:r>
-              <a:rPr lang="en-US" dirty="0" err="1" smtClean="0"/>
-              <a:t>projet</a:t>
-            </a:r>
-            <a:endParaRPr lang="en-US" dirty="0" smtClean="0"/>
-          </a:p>
-          <a:p>
-            <a:r>
-              <a:rPr lang="en-US" dirty="0" err="1" smtClean="0">
-                <a:solidFill>
-                  <a:srgbClr val="FFC000"/>
-                </a:solidFill>
-              </a:rPr>
-              <a:t>Git</a:t>
-            </a:r>
-            <a:r>
-              <a:rPr lang="en-US" dirty="0" smtClean="0"/>
-              <a:t> add . : </a:t>
-            </a:r>
-            <a:r>
-              <a:rPr lang="en-US" dirty="0" err="1" smtClean="0"/>
-              <a:t>ajout</a:t>
-            </a:r>
-            <a:r>
-              <a:rPr lang="en-US" dirty="0" smtClean="0"/>
-              <a:t> des modifications</a:t>
-            </a:r>
-          </a:p>
-          <a:p>
-            <a:r>
-              <a:rPr lang="en-US" dirty="0" err="1" smtClean="0">
-                <a:solidFill>
-                  <a:srgbClr val="FFC000"/>
-                </a:solidFill>
-              </a:rPr>
-              <a:t>Git</a:t>
-            </a:r>
-            <a:r>
-              <a:rPr lang="en-US" dirty="0" smtClean="0">
-                <a:solidFill>
-                  <a:srgbClr val="FFFF00"/>
-                </a:solidFill>
-              </a:rPr>
-              <a:t> </a:t>
-            </a:r>
-            <a:r>
-              <a:rPr lang="en-US" dirty="0" smtClean="0"/>
-              <a:t>commit –m “message” : </a:t>
-            </a:r>
-            <a:r>
-              <a:rPr lang="en-US" dirty="0" err="1" smtClean="0"/>
-              <a:t>sauvegarde</a:t>
-            </a:r>
-            <a:r>
-              <a:rPr lang="en-US" dirty="0" smtClean="0"/>
-              <a:t> des </a:t>
-            </a:r>
-            <a:r>
-              <a:rPr lang="en-US" dirty="0" err="1" smtClean="0"/>
-              <a:t>etapes</a:t>
-            </a:r>
-            <a:endParaRPr lang="en-US" dirty="0" smtClean="0"/>
-          </a:p>
-          <a:p>
-            <a:r>
-              <a:rPr lang="en-US" dirty="0" err="1" smtClean="0">
-                <a:solidFill>
-                  <a:srgbClr val="FFC000"/>
-                </a:solidFill>
-              </a:rPr>
-              <a:t>Git</a:t>
-            </a:r>
-            <a:r>
-              <a:rPr lang="en-US" dirty="0" smtClean="0"/>
-              <a:t> push : envoi sur </a:t>
-            </a:r>
-            <a:r>
-              <a:rPr lang="en-US" dirty="0" err="1" smtClean="0"/>
-              <a:t>Github</a:t>
-            </a:r>
-            <a:endParaRPr dirty="0"/>
-          </a:p>
-          <a:p>
-            <a:r>
-              <a:rPr b="1" u="sng" dirty="0" err="1">
-                <a:solidFill>
-                  <a:srgbClr val="C00000"/>
-                </a:solidFill>
-              </a:rPr>
-              <a:t>Déploiement</a:t>
-            </a:r>
-            <a:r>
-              <a:rPr b="1" u="sng" dirty="0">
-                <a:solidFill>
-                  <a:srgbClr val="C00000"/>
-                </a:solidFill>
-              </a:rPr>
-              <a:t> du site </a:t>
-            </a:r>
-            <a:r>
-              <a:rPr b="1" u="sng" dirty="0" err="1">
-                <a:solidFill>
-                  <a:srgbClr val="C00000"/>
-                </a:solidFill>
-              </a:rPr>
-              <a:t>en</a:t>
-            </a:r>
-            <a:r>
-              <a:rPr b="1" u="sng" dirty="0">
-                <a:solidFill>
-                  <a:srgbClr val="C00000"/>
-                </a:solidFill>
-              </a:rPr>
-              <a:t> </a:t>
-            </a:r>
-            <a:r>
-              <a:rPr b="1" u="sng" dirty="0" err="1" smtClean="0">
-                <a:solidFill>
-                  <a:srgbClr val="C00000"/>
-                </a:solidFill>
-              </a:rPr>
-              <a:t>ligne</a:t>
-            </a:r>
-            <a:r>
-              <a:rPr lang="en-US" b="1" u="sng" dirty="0" smtClean="0">
-                <a:solidFill>
-                  <a:srgbClr val="C00000"/>
-                </a:solidFill>
-              </a:rPr>
-              <a:t>:</a:t>
-            </a:r>
-          </a:p>
-          <a:p>
-            <a:r>
-              <a:rPr lang="fr-FR" b="1" u="sng" dirty="0">
-                <a:solidFill>
-                  <a:srgbClr val="FF0000"/>
-                </a:solidFill>
-              </a:rPr>
-              <a:t>https</a:t>
-            </a:r>
-            <a:r>
-              <a:rPr lang="fr-FR" b="1" u="sng">
-                <a:solidFill>
-                  <a:srgbClr val="FF0000"/>
-                </a:solidFill>
-              </a:rPr>
-              <a:t>://</a:t>
-            </a:r>
-            <a:r>
-              <a:rPr lang="fr-FR" b="1" u="sng" smtClean="0">
-                <a:solidFill>
-                  <a:srgbClr val="FF0000"/>
-                </a:solidFill>
-              </a:rPr>
-              <a:t>sophiesticated221.github.io/TIMERA-OUMOULKHAIRI-AfriTalent/</a:t>
-            </a:r>
-            <a:endParaRPr b="1" u="sng" dirty="0">
-              <a:solidFill>
-                <a:srgbClr val="FF0000"/>
-              </a:solidFill>
-            </a:endParaRPr>
-          </a:p>
         </p:txBody>
       </p:sp>
+      <p:graphicFrame>
+        <p:nvGraphicFramePr>
+          <p:cNvPr id="7" name="Tableau 6"/>
+          <p:cNvGraphicFramePr>
+            <a:graphicFrameLocks noGrp="1"/>
+          </p:cNvGraphicFramePr>
+          <p:nvPr>
+            <p:extLst>
+              <p:ext uri="{D42A27DB-BD31-4B8C-83A1-F6EECF244321}">
+                <p14:modId xmlns:p14="http://schemas.microsoft.com/office/powerpoint/2010/main" val="75277741"/>
+              </p:ext>
+            </p:extLst>
+          </p:nvPr>
+        </p:nvGraphicFramePr>
+        <p:xfrm>
+          <a:off x="457200" y="4076700"/>
+          <a:ext cx="6096000" cy="1841500"/>
+        </p:xfrm>
+        <a:graphic>
+          <a:graphicData uri="http://schemas.openxmlformats.org/drawingml/2006/table">
+            <a:tbl>
+              <a:tblPr firstRow="1" bandRow="1">
+                <a:tableStyleId>{5C22544A-7EE6-4342-B048-85BDC9FD1C3A}</a:tableStyleId>
+              </a:tblPr>
+              <a:tblGrid>
+                <a:gridCol w="3048000">
+                  <a:extLst>
+                    <a:ext uri="{9D8B030D-6E8A-4147-A177-3AD203B41FA5}">
+                      <a16:colId xmlns:a16="http://schemas.microsoft.com/office/drawing/2014/main" val="2388351973"/>
+                    </a:ext>
+                  </a:extLst>
+                </a:gridCol>
+                <a:gridCol w="3048000">
+                  <a:extLst>
+                    <a:ext uri="{9D8B030D-6E8A-4147-A177-3AD203B41FA5}">
+                      <a16:colId xmlns:a16="http://schemas.microsoft.com/office/drawing/2014/main" val="3864936712"/>
+                    </a:ext>
+                  </a:extLst>
+                </a:gridCol>
+              </a:tblGrid>
+              <a:tr h="368300">
+                <a:tc>
+                  <a:txBody>
+                    <a:bodyPr/>
+                    <a:lstStyle/>
+                    <a:p>
+                      <a:r>
+                        <a:rPr lang="en-US" dirty="0" err="1" smtClean="0"/>
+                        <a:t>Etapes</a:t>
+                      </a:r>
+                      <a:endParaRPr lang="fr-FR" dirty="0"/>
+                    </a:p>
+                  </a:txBody>
+                  <a:tcPr/>
+                </a:tc>
+                <a:tc>
+                  <a:txBody>
+                    <a:bodyPr/>
+                    <a:lstStyle/>
+                    <a:p>
+                      <a:r>
+                        <a:rPr lang="en-US" dirty="0" smtClean="0"/>
+                        <a:t>Description</a:t>
+                      </a:r>
+                      <a:endParaRPr lang="fr-FR" dirty="0"/>
+                    </a:p>
+                  </a:txBody>
+                  <a:tcPr/>
+                </a:tc>
+                <a:extLst>
+                  <a:ext uri="{0D108BD9-81ED-4DB2-BD59-A6C34878D82A}">
+                    <a16:rowId xmlns:a16="http://schemas.microsoft.com/office/drawing/2014/main" val="750231188"/>
+                  </a:ext>
+                </a:extLst>
+              </a:tr>
+              <a:tr h="368300">
+                <a:tc>
+                  <a:txBody>
+                    <a:bodyPr/>
+                    <a:lstStyle/>
+                    <a:p>
+                      <a:r>
+                        <a:rPr lang="fr-FR" sz="1800" dirty="0" smtClean="0">
+                          <a:solidFill>
+                            <a:srgbClr val="FFC000"/>
+                          </a:solidFill>
+                        </a:rPr>
+                        <a:t>Git</a:t>
+                      </a:r>
+                      <a:r>
+                        <a:rPr lang="fr-FR" sz="1800" dirty="0" smtClean="0"/>
+                        <a:t> </a:t>
+                      </a:r>
+                      <a:r>
+                        <a:rPr lang="fr-FR" sz="1800" dirty="0" err="1" smtClean="0"/>
+                        <a:t>init</a:t>
+                      </a:r>
+                      <a:r>
+                        <a:rPr lang="fr-FR" sz="1800" dirty="0" smtClean="0"/>
+                        <a:t> </a:t>
+                      </a:r>
+                      <a:endParaRPr lang="fr-FR" dirty="0"/>
+                    </a:p>
+                  </a:txBody>
+                  <a:tcPr/>
+                </a:tc>
+                <a:tc>
+                  <a:txBody>
+                    <a:bodyPr/>
+                    <a:lstStyle/>
+                    <a:p>
+                      <a:pPr marL="0" indent="0">
+                        <a:buNone/>
+                      </a:pPr>
+                      <a:r>
+                        <a:rPr lang="fr-FR" sz="1800" dirty="0" smtClean="0"/>
+                        <a:t>initialisation du projet</a:t>
+                      </a:r>
+                      <a:endParaRPr lang="fr-FR" sz="1800" dirty="0"/>
+                    </a:p>
+                  </a:txBody>
+                  <a:tcPr/>
+                </a:tc>
+                <a:extLst>
+                  <a:ext uri="{0D108BD9-81ED-4DB2-BD59-A6C34878D82A}">
+                    <a16:rowId xmlns:a16="http://schemas.microsoft.com/office/drawing/2014/main" val="878116757"/>
+                  </a:ext>
+                </a:extLst>
+              </a:tr>
+              <a:tr h="368300">
+                <a:tc>
+                  <a:txBody>
+                    <a:bodyPr/>
+                    <a:lstStyle/>
+                    <a:p>
+                      <a:r>
+                        <a:rPr lang="fr-FR" sz="1800" dirty="0" smtClean="0">
+                          <a:solidFill>
+                            <a:srgbClr val="FFC000"/>
+                          </a:solidFill>
+                        </a:rPr>
+                        <a:t>Git</a:t>
+                      </a:r>
+                      <a:r>
+                        <a:rPr lang="fr-FR" sz="1800" dirty="0" smtClean="0"/>
+                        <a:t> </a:t>
+                      </a:r>
+                      <a:r>
+                        <a:rPr lang="fr-FR" sz="1800" dirty="0" err="1" smtClean="0"/>
+                        <a:t>add</a:t>
+                      </a:r>
+                      <a:r>
+                        <a:rPr lang="fr-FR" sz="1800" dirty="0" smtClean="0"/>
+                        <a:t>  .</a:t>
+                      </a:r>
+                      <a:endParaRPr lang="fr-FR" dirty="0"/>
+                    </a:p>
+                  </a:txBody>
+                  <a:tcPr/>
+                </a:tc>
+                <a:tc>
+                  <a:txBody>
+                    <a:bodyPr/>
+                    <a:lstStyle/>
+                    <a:p>
+                      <a:pPr marL="0" indent="0">
+                        <a:buNone/>
+                      </a:pPr>
+                      <a:r>
+                        <a:rPr lang="fr-FR" sz="1800" dirty="0" smtClean="0"/>
+                        <a:t>ajout des modifications</a:t>
+                      </a:r>
+                      <a:endParaRPr lang="fr-FR" sz="1800" dirty="0"/>
+                    </a:p>
+                  </a:txBody>
+                  <a:tcPr/>
+                </a:tc>
+                <a:extLst>
+                  <a:ext uri="{0D108BD9-81ED-4DB2-BD59-A6C34878D82A}">
+                    <a16:rowId xmlns:a16="http://schemas.microsoft.com/office/drawing/2014/main" val="886353165"/>
+                  </a:ext>
+                </a:extLst>
+              </a:tr>
+              <a:tr h="368300">
+                <a:tc>
+                  <a:txBody>
+                    <a:bodyPr/>
+                    <a:lstStyle/>
+                    <a:p>
+                      <a:r>
+                        <a:rPr lang="fr-FR" sz="1800" dirty="0" smtClean="0">
+                          <a:solidFill>
+                            <a:srgbClr val="FFC000"/>
+                          </a:solidFill>
+                        </a:rPr>
+                        <a:t>Git</a:t>
+                      </a:r>
+                      <a:r>
+                        <a:rPr lang="fr-FR" sz="1800" dirty="0" smtClean="0">
+                          <a:solidFill>
+                            <a:srgbClr val="FFFF00"/>
+                          </a:solidFill>
+                        </a:rPr>
+                        <a:t> </a:t>
+                      </a:r>
+                      <a:r>
+                        <a:rPr lang="fr-FR" sz="1800" dirty="0" smtClean="0"/>
+                        <a:t>commit –m “message” </a:t>
+                      </a:r>
+                      <a:endParaRPr lang="fr-FR" dirty="0"/>
+                    </a:p>
+                  </a:txBody>
+                  <a:tcPr/>
+                </a:tc>
+                <a:tc>
+                  <a:txBody>
+                    <a:bodyPr/>
+                    <a:lstStyle/>
+                    <a:p>
+                      <a:pPr marL="0" indent="0">
+                        <a:buNone/>
+                      </a:pPr>
+                      <a:r>
+                        <a:rPr lang="fr-FR" sz="1800" dirty="0" smtClean="0"/>
+                        <a:t>sauvegarde des étapes</a:t>
+                      </a:r>
+                      <a:endParaRPr lang="fr-FR" sz="1800" dirty="0"/>
+                    </a:p>
+                  </a:txBody>
+                  <a:tcPr/>
+                </a:tc>
+                <a:extLst>
+                  <a:ext uri="{0D108BD9-81ED-4DB2-BD59-A6C34878D82A}">
+                    <a16:rowId xmlns:a16="http://schemas.microsoft.com/office/drawing/2014/main" val="3510914039"/>
+                  </a:ext>
+                </a:extLst>
+              </a:tr>
+              <a:tr h="368300">
+                <a:tc>
+                  <a:txBody>
+                    <a:bodyPr/>
+                    <a:lstStyle/>
+                    <a:p>
+                      <a:r>
+                        <a:rPr lang="fr-FR" sz="1800" dirty="0" smtClean="0">
+                          <a:solidFill>
+                            <a:srgbClr val="FFC000"/>
+                          </a:solidFill>
+                        </a:rPr>
+                        <a:t>Git</a:t>
+                      </a:r>
+                      <a:r>
+                        <a:rPr lang="fr-FR" sz="1800" dirty="0" smtClean="0"/>
+                        <a:t> push </a:t>
+                      </a:r>
+                      <a:endParaRPr lang="fr-FR" dirty="0"/>
+                    </a:p>
+                  </a:txBody>
+                  <a:tcPr/>
+                </a:tc>
+                <a:tc>
+                  <a:txBody>
+                    <a:bodyPr/>
+                    <a:lstStyle/>
+                    <a:p>
+                      <a:pPr marL="0" indent="0">
+                        <a:buNone/>
+                      </a:pPr>
+                      <a:r>
+                        <a:rPr lang="fr-FR" sz="1800" dirty="0" smtClean="0"/>
+                        <a:t>envoi sur </a:t>
+                      </a:r>
+                      <a:r>
+                        <a:rPr lang="fr-FR" sz="1800" dirty="0" err="1" smtClean="0"/>
+                        <a:t>Github</a:t>
+                      </a:r>
+                      <a:endParaRPr lang="fr-FR" sz="1800" dirty="0"/>
+                    </a:p>
+                  </a:txBody>
+                  <a:tcPr/>
+                </a:tc>
+                <a:extLst>
+                  <a:ext uri="{0D108BD9-81ED-4DB2-BD59-A6C34878D82A}">
+                    <a16:rowId xmlns:a16="http://schemas.microsoft.com/office/drawing/2014/main" val="2428161458"/>
+                  </a:ext>
+                </a:extLst>
+              </a:tr>
+            </a:tbl>
+          </a:graphicData>
+        </a:graphic>
+      </p:graphicFrame>
     </p:spTree>
   </p:cSld>
   <p:clrMapOvr>
     <a:masterClrMapping/>
   </p:clrMapOvr>
+  <p:transition spd="slow">
+    <p:wipe/>
+  </p:transition>
   <p:timing>
     <p:tnLst>
       <p:par>
@@ -3850,14 +4788,50 @@
             <p:ph type="title"/>
           </p:nvPr>
         </p:nvSpPr>
-        <p:spPr/>
+        <p:spPr>
+          <a:xfrm>
+            <a:off x="1778000" y="236538"/>
+            <a:ext cx="5892800" cy="846138"/>
+          </a:xfrm>
+          <a:ln>
+            <a:noFill/>
+          </a:ln>
+        </p:spPr>
         <p:txBody>
-          <a:bodyPr/>
+          <a:bodyPr>
+            <a:normAutofit/>
+          </a:bodyPr>
           <a:lstStyle/>
           <a:p>
             <a:r>
-              <a:t>Difficultés rencontrées</a:t>
-            </a:r>
+              <a:rPr b="1" dirty="0" err="1">
+                <a:solidFill>
+                  <a:srgbClr val="002060"/>
+                </a:solidFill>
+              </a:rPr>
+              <a:t>Difficultés</a:t>
+            </a:r>
+            <a:r>
+              <a:rPr b="1" dirty="0">
+                <a:solidFill>
+                  <a:srgbClr val="002060"/>
+                </a:solidFill>
+              </a:rPr>
+              <a:t> </a:t>
+            </a:r>
+            <a:r>
+              <a:rPr lang="en-US" b="1" dirty="0" smtClean="0">
+                <a:solidFill>
+                  <a:srgbClr val="002060"/>
+                </a:solidFill>
+              </a:rPr>
+              <a:t>&amp; Solutions</a:t>
+            </a:r>
+            <a:endParaRPr b="1" dirty="0">
+              <a:solidFill>
+                <a:srgbClr val="002060"/>
+              </a:solidFill>
+            </a:endParaRPr>
           </a:p>
         </p:txBody>
       </p:sp>
@@ -3871,290 +4845,501 @@
             <p:ph idx="1"/>
           </p:nvPr>
         </p:nvSpPr>
-        <p:spPr/>
+        <p:spPr>
+          <a:xfrm>
+            <a:off x="203200" y="1417638"/>
+            <a:ext cx="4114800" cy="2697163"/>
+          </a:xfrm>
+          <a:solidFill>
+            <a:srgbClr val="EDF2F9"/>
+          </a:solidFill>
+          <a:effectLst>
+            <a:softEdge rad="63500"/>
+          </a:effectLst>
+        </p:spPr>
         <p:txBody>
           <a:bodyPr>
-            <a:normAutofit fontScale="85000" lnSpcReduction="20000"/>
+            <a:normAutofit/>
           </a:bodyPr>
           <a:lstStyle/>
           <a:p>
-            <a:r>
-              <a:rPr dirty="0" smtClean="0"/>
+            <a:pPr marL="0" indent="0">
+              <a:buNone/>
+            </a:pPr>
+            <a:r>
+              <a:rPr sz="2000" dirty="0" smtClean="0"/>
               <a:t>1. </a:t>
             </a:r>
             <a:r>
-              <a:rPr lang="en-US" b="1" dirty="0" smtClean="0"/>
-              <a:t>Flash </a:t>
-            </a:r>
-            <a:r>
-              <a:rPr lang="en-US" b="1" dirty="0" err="1" smtClean="0"/>
-              <a:t>en</a:t>
-            </a:r>
-            <a:r>
-              <a:rPr lang="en-US" b="1" dirty="0" smtClean="0"/>
-              <a:t> mode somber </a:t>
-            </a:r>
-            <a:r>
-              <a:rPr lang="en-US" b="1" dirty="0" err="1" smtClean="0"/>
-              <a:t>lors</a:t>
-            </a:r>
-            <a:r>
-              <a:rPr lang="en-US" b="1" dirty="0" smtClean="0"/>
-              <a:t> du </a:t>
-            </a:r>
-            <a:r>
-              <a:rPr lang="en-US" b="1" dirty="0" err="1" smtClean="0"/>
-              <a:t>changement</a:t>
-            </a:r>
-            <a:r>
-              <a:rPr lang="en-US" b="1" dirty="0" smtClean="0"/>
-              <a:t> de page</a:t>
-            </a:r>
-          </a:p>
-          <a:p>
-            <a:r>
-              <a:rPr lang="en-US" b="1" dirty="0" smtClean="0"/>
+              <a:rPr lang="en-US" sz="2000" b="1" dirty="0" smtClean="0">
+                <a:solidFill>
+                  <a:srgbClr val="002060"/>
+                </a:solidFill>
+              </a:rPr>
+              <a:t>Flash en mode somber lors du changement de page</a:t>
+            </a:r>
+          </a:p>
+          <a:p>
+            <a:pPr marL="0" indent="0">
+              <a:buNone/>
+            </a:pPr>
+            <a:r>
+              <a:rPr lang="en-US" sz="2000" b="1" dirty="0" smtClean="0"/>
               <a:t>Solution</a:t>
             </a:r>
             <a:r>
-              <a:rPr lang="en-US" dirty="0" smtClean="0"/>
-              <a:t>: </a:t>
-            </a:r>
-            <a:r>
-              <a:rPr lang="en-US" dirty="0" err="1" smtClean="0"/>
-              <a:t>ajout</a:t>
-            </a:r>
-            <a:r>
-              <a:rPr lang="en-US" dirty="0" smtClean="0"/>
-              <a:t> d’un script </a:t>
-            </a:r>
-            <a:r>
-              <a:rPr lang="en-US" dirty="0" err="1" smtClean="0"/>
-              <a:t>dans</a:t>
-            </a:r>
-            <a:r>
-              <a:rPr lang="en-US" dirty="0" smtClean="0"/>
-              <a:t> le &lt;head&gt; pour </a:t>
-            </a:r>
-            <a:r>
-              <a:rPr lang="en-US" dirty="0" err="1" smtClean="0"/>
-              <a:t>appliquernle</a:t>
-            </a:r>
-            <a:r>
-              <a:rPr lang="en-US" dirty="0" smtClean="0"/>
+              <a:rPr lang="en-US" sz="2000" dirty="0" smtClean="0"/>
+              <a:t>: ajout d’un script dans le &lt;head&gt; pour appliquer le th</a:t>
+            </a:r>
+            <a:r>
+              <a:rPr lang="fr-FR" sz="2000" dirty="0"/>
+              <a:t>è</a:t>
+            </a:r>
+            <a:r>
+              <a:rPr lang="en-US" sz="2000" dirty="0" smtClean="0"/>
+              <a:t>me d</a:t>
+            </a:r>
+            <a:r>
+              <a:rPr lang="fr-FR" sz="2000" dirty="0" smtClean="0"/>
+              <a:t>è</a:t>
+            </a:r>
+            <a:r>
+              <a:rPr lang="en-US" sz="2000" dirty="0" smtClean="0"/>
+              <a:t>s le chargement de la page (avant l’affichage du contenu), ce qui a supprim</a:t>
+            </a:r>
+            <a:r>
+              <a:rPr lang="fr-FR" sz="2000" dirty="0" smtClean="0"/>
+              <a:t>é</a:t>
+            </a:r>
+            <a:r>
+              <a:rPr lang="en-US" sz="2000" dirty="0" smtClean="0"/>
+              <a:t> le flash </a:t>
+            </a:r>
+          </a:p>
+        </p:txBody>
+      </p:sp>
+      <p:sp>
+        <p:nvSpPr>
+          <p:cNvPr id="4" name="Content Placeholder 2"/>
+          <p:cNvSpPr txBox="1">
+            <a:spLocks/>
+          </p:cNvSpPr>
+          <p:nvPr/>
+        </p:nvSpPr>
+        <p:spPr>
+          <a:xfrm>
+            <a:off x="4724400" y="1417639"/>
+            <a:ext cx="4114800" cy="2697162"/>
+          </a:xfrm>
+          <a:prstGeom prst="rect">
+            <a:avLst/>
+          </a:prstGeom>
+          <a:solidFill>
+            <a:srgbClr val="EDF2F9"/>
+          </a:solidFill>
+          <a:effectLst>
+            <a:softEdge rad="63500"/>
+          </a:effectLst>
+        </p:spPr>
+        <p:txBody>
+          <a:bodyPr vert="horz" lIns="91440" tIns="45720" rIns="91440" bIns="45720" rtlCol="0">
+            <a:normAutofit/>
+          </a:bodyPr>
+          <a:lstStyle>
+            <a:lvl1pPr marL="342900" indent="-342900" algn="l" defTabSz="457200" rtl="0" eaLnBrk="1" latinLnBrk="0" hangingPunct="1">
+              <a:spcBef>
+                <a:spcPct val="20000"/>
+              </a:spcBef>
+              <a:buFont typeface="Arial"/>
+              <a:buChar char="•"/>
+              <a:defRPr sz="3200" kern="1200">
+                <a:solidFill>
+                  <a:schemeClr val="tx1"/>
+                </a:solidFill>
+                <a:latin typeface="+mn-lt"/>
+                <a:ea typeface="+mn-ea"/>
+                <a:cs typeface="+mn-cs"/>
+              </a:defRPr>
+            </a:lvl1pPr>
+            <a:lvl2pPr marL="742950" indent="-285750" algn="l" defTabSz="457200" rtl="0" eaLnBrk="1" latinLnBrk="0" hangingPunct="1">
+              <a:spcBef>
+                <a:spcPct val="20000"/>
+              </a:spcBef>
+              <a:buFont typeface="Arial"/>
+              <a:buChar char="–"/>
+              <a:defRPr sz="2800" kern="1200">
+                <a:solidFill>
+                  <a:schemeClr val="tx1"/>
+                </a:solidFill>
+                <a:latin typeface="+mn-lt"/>
+                <a:ea typeface="+mn-ea"/>
+                <a:cs typeface="+mn-cs"/>
+              </a:defRPr>
+            </a:lvl2pPr>
+            <a:lvl3pPr marL="1143000" indent="-228600" algn="l" defTabSz="457200" rtl="0" eaLnBrk="1" latinLnBrk="0" hangingPunct="1">
+              <a:spcBef>
+                <a:spcPct val="20000"/>
+              </a:spcBef>
+              <a:buFont typeface="Arial"/>
+              <a:buChar char="•"/>
+              <a:defRPr sz="2400" kern="1200">
+                <a:solidFill>
+                  <a:schemeClr val="tx1"/>
+                </a:solidFill>
+                <a:latin typeface="+mn-lt"/>
+                <a:ea typeface="+mn-ea"/>
+                <a:cs typeface="+mn-cs"/>
+              </a:defRPr>
+            </a:lvl3pPr>
+            <a:lvl4pPr marL="1600200" indent="-228600" algn="l" defTabSz="457200" rtl="0" eaLnBrk="1" latinLnBrk="0" hangingPunct="1">
+              <a:spcBef>
+                <a:spcPct val="20000"/>
+              </a:spcBef>
+              <a:buFont typeface="Arial"/>
+              <a:buChar char="–"/>
+              <a:defRPr sz="2000" kern="1200">
+                <a:solidFill>
+                  <a:schemeClr val="tx1"/>
+                </a:solidFill>
+                <a:latin typeface="+mn-lt"/>
+                <a:ea typeface="+mn-ea"/>
+                <a:cs typeface="+mn-cs"/>
+              </a:defRPr>
+            </a:lvl4pPr>
+            <a:lvl5pPr marL="2057400" indent="-228600" algn="l" defTabSz="457200" rtl="0" eaLnBrk="1" latinLnBrk="0" hangingPunct="1">
+              <a:spcBef>
+                <a:spcPct val="20000"/>
+              </a:spcBef>
+              <a:buFont typeface="Arial"/>
+              <a:buChar char="»"/>
+              <a:defRPr sz="2000" kern="1200">
+                <a:solidFill>
+                  <a:schemeClr val="tx1"/>
+                </a:solidFill>
+                <a:latin typeface="+mn-lt"/>
+                <a:ea typeface="+mn-ea"/>
+                <a:cs typeface="+mn-cs"/>
+              </a:defRPr>
+            </a:lvl5pPr>
+            <a:lvl6pPr marL="2514600" indent="-228600" algn="l" defTabSz="457200" rtl="0" eaLnBrk="1" latinLnBrk="0" hangingPunct="1">
+              <a:spcBef>
+                <a:spcPct val="20000"/>
+              </a:spcBef>
+              <a:buFont typeface="Arial"/>
+              <a:buChar char="•"/>
+              <a:defRPr sz="2000" kern="1200">
+                <a:solidFill>
+                  <a:schemeClr val="tx1"/>
+                </a:solidFill>
+                <a:latin typeface="+mn-lt"/>
+                <a:ea typeface="+mn-ea"/>
+                <a:cs typeface="+mn-cs"/>
+              </a:defRPr>
+            </a:lvl6pPr>
+            <a:lvl7pPr marL="2971800" indent="-228600" algn="l" defTabSz="457200" rtl="0" eaLnBrk="1" latinLnBrk="0" hangingPunct="1">
+              <a:spcBef>
+                <a:spcPct val="20000"/>
+              </a:spcBef>
+              <a:buFont typeface="Arial"/>
+              <a:buChar char="•"/>
+              <a:defRPr sz="2000" kern="1200">
+                <a:solidFill>
+                  <a:schemeClr val="tx1"/>
+                </a:solidFill>
+                <a:latin typeface="+mn-lt"/>
+                <a:ea typeface="+mn-ea"/>
+                <a:cs typeface="+mn-cs"/>
+              </a:defRPr>
+            </a:lvl7pPr>
+            <a:lvl8pPr marL="3429000" indent="-228600" algn="l" defTabSz="457200" rtl="0" eaLnBrk="1" latinLnBrk="0" hangingPunct="1">
+              <a:spcBef>
+                <a:spcPct val="20000"/>
+              </a:spcBef>
+              <a:buFont typeface="Arial"/>
+              <a:buChar char="•"/>
+              <a:defRPr sz="2000" kern="1200">
+                <a:solidFill>
+                  <a:schemeClr val="tx1"/>
+                </a:solidFill>
+                <a:latin typeface="+mn-lt"/>
+                <a:ea typeface="+mn-ea"/>
+                <a:cs typeface="+mn-cs"/>
+              </a:defRPr>
+            </a:lvl8pPr>
+            <a:lvl9pPr marL="3886200" indent="-228600" algn="l" defTabSz="457200" rtl="0" eaLnBrk="1" latinLnBrk="0" hangingPunct="1">
+              <a:spcBef>
+                <a:spcPct val="20000"/>
+              </a:spcBef>
+              <a:buFont typeface="Arial"/>
+              <a:buChar char="•"/>
+              <a:defRPr sz="2000" kern="1200">
+                <a:solidFill>
+                  <a:schemeClr val="tx1"/>
+                </a:solidFill>
+                <a:latin typeface="+mn-lt"/>
+                <a:ea typeface="+mn-ea"/>
+                <a:cs typeface="+mn-cs"/>
+              </a:defRPr>
+            </a:lvl9pPr>
+          </a:lstStyle>
+          <a:p>
+            <a:pPr marL="0" indent="0">
+              <a:buNone/>
+            </a:pPr>
+            <a:r>
+              <a:rPr lang="fr-FR" sz="2000" dirty="0"/>
+              <a:t>2. </a:t>
+            </a:r>
+            <a:r>
+              <a:rPr lang="fr-FR" sz="2000" b="1" dirty="0" smtClean="0">
+                <a:solidFill>
+                  <a:srgbClr val="002060"/>
+                </a:solidFill>
+              </a:rPr>
+              <a:t>Problème </a:t>
+            </a:r>
+            <a:r>
+              <a:rPr lang="fr-FR" sz="2000" b="1" dirty="0">
+                <a:solidFill>
+                  <a:srgbClr val="002060"/>
+                </a:solidFill>
+              </a:rPr>
+              <a:t>de débordements des éléments</a:t>
+            </a:r>
+          </a:p>
+          <a:p>
+            <a:pPr marL="0" indent="0">
+              <a:buNone/>
+            </a:pPr>
+            <a:r>
+              <a:rPr lang="fr-FR" sz="2000" b="1" dirty="0"/>
+              <a:t>  Solution: </a:t>
+            </a:r>
+            <a:r>
+              <a:rPr lang="fr-FR" sz="2000" dirty="0"/>
+              <a:t>correction du CSS et </a:t>
+            </a:r>
+            <a:r>
+              <a:rPr lang="fr-FR" sz="2000" dirty="0" smtClean="0"/>
+              <a:t>utilisation </a:t>
+            </a:r>
+            <a:r>
+              <a:rPr lang="fr-FR" sz="2000" dirty="0"/>
+              <a:t>de Bootstrap (gestion du responsive, flexbox et ajustement des largeurs</a:t>
+            </a:r>
+            <a:r>
+              <a:rPr lang="fr-FR" sz="2000" dirty="0" smtClean="0"/>
+              <a:t>)</a:t>
+            </a:r>
+            <a:endParaRPr lang="fr-FR" sz="2000" dirty="0"/>
+          </a:p>
+        </p:txBody>
+      </p:sp>
+      <p:sp>
+        <p:nvSpPr>
+          <p:cNvPr id="5" name="Content Placeholder 2"/>
+          <p:cNvSpPr txBox="1">
+            <a:spLocks/>
+          </p:cNvSpPr>
+          <p:nvPr/>
+        </p:nvSpPr>
+        <p:spPr>
+          <a:xfrm>
+            <a:off x="2514600" y="4449763"/>
+            <a:ext cx="4622800" cy="2281237"/>
+          </a:xfrm>
+          <a:prstGeom prst="rect">
+            <a:avLst/>
+          </a:prstGeom>
+          <a:solidFill>
+            <a:srgbClr val="EDF2F9"/>
+          </a:solidFill>
+          <a:effectLst>
+            <a:softEdge rad="63500"/>
+          </a:effectLst>
+        </p:spPr>
+        <p:txBody>
+          <a:bodyPr vert="horz" lIns="91440" tIns="45720" rIns="91440" bIns="45720" rtlCol="0">
+            <a:normAutofit/>
+          </a:bodyPr>
+          <a:lstStyle>
+            <a:lvl1pPr marL="342900" indent="-342900" algn="l" defTabSz="457200" rtl="0" eaLnBrk="1" latinLnBrk="0" hangingPunct="1">
+              <a:spcBef>
+                <a:spcPct val="20000"/>
+              </a:spcBef>
+              <a:buFont typeface="Arial"/>
+              <a:buChar char="•"/>
+              <a:defRPr sz="3200" kern="1200">
+                <a:solidFill>
+                  <a:schemeClr val="tx1"/>
+                </a:solidFill>
+                <a:latin typeface="+mn-lt"/>
+                <a:ea typeface="+mn-ea"/>
+                <a:cs typeface="+mn-cs"/>
+              </a:defRPr>
+            </a:lvl1pPr>
+            <a:lvl2pPr marL="742950" indent="-285750" algn="l" defTabSz="457200" rtl="0" eaLnBrk="1" latinLnBrk="0" hangingPunct="1">
+              <a:spcBef>
+                <a:spcPct val="20000"/>
+              </a:spcBef>
+              <a:buFont typeface="Arial"/>
+              <a:buChar char="–"/>
+              <a:defRPr sz="2800" kern="1200">
+                <a:solidFill>
+                  <a:schemeClr val="tx1"/>
+                </a:solidFill>
+                <a:latin typeface="+mn-lt"/>
+                <a:ea typeface="+mn-ea"/>
+                <a:cs typeface="+mn-cs"/>
+              </a:defRPr>
+            </a:lvl2pPr>
+            <a:lvl3pPr marL="1143000" indent="-228600" algn="l" defTabSz="457200" rtl="0" eaLnBrk="1" latinLnBrk="0" hangingPunct="1">
+              <a:spcBef>
+                <a:spcPct val="20000"/>
+              </a:spcBef>
+              <a:buFont typeface="Arial"/>
+              <a:buChar char="•"/>
+              <a:defRPr sz="2400" kern="1200">
+                <a:solidFill>
+                  <a:schemeClr val="tx1"/>
+                </a:solidFill>
+                <a:latin typeface="+mn-lt"/>
+                <a:ea typeface="+mn-ea"/>
+                <a:cs typeface="+mn-cs"/>
+              </a:defRPr>
+            </a:lvl3pPr>
+            <a:lvl4pPr marL="1600200" indent="-228600" algn="l" defTabSz="457200" rtl="0" eaLnBrk="1" latinLnBrk="0" hangingPunct="1">
+              <a:spcBef>
+                <a:spcPct val="20000"/>
+              </a:spcBef>
+              <a:buFont typeface="Arial"/>
+              <a:buChar char="–"/>
+              <a:defRPr sz="2000" kern="1200">
+                <a:solidFill>
+                  <a:schemeClr val="tx1"/>
+                </a:solidFill>
+                <a:latin typeface="+mn-lt"/>
+                <a:ea typeface="+mn-ea"/>
+                <a:cs typeface="+mn-cs"/>
+              </a:defRPr>
+            </a:lvl4pPr>
+            <a:lvl5pPr marL="2057400" indent="-228600" algn="l" defTabSz="457200" rtl="0" eaLnBrk="1" latinLnBrk="0" hangingPunct="1">
+              <a:spcBef>
+                <a:spcPct val="20000"/>
+              </a:spcBef>
+              <a:buFont typeface="Arial"/>
+              <a:buChar char="»"/>
+              <a:defRPr sz="2000" kern="1200">
+                <a:solidFill>
+                  <a:schemeClr val="tx1"/>
+                </a:solidFill>
+                <a:latin typeface="+mn-lt"/>
+                <a:ea typeface="+mn-ea"/>
+                <a:cs typeface="+mn-cs"/>
+              </a:defRPr>
+            </a:lvl5pPr>
+            <a:lvl6pPr marL="2514600" indent="-228600" algn="l" defTabSz="457200" rtl="0" eaLnBrk="1" latinLnBrk="0" hangingPunct="1">
+              <a:spcBef>
+                <a:spcPct val="20000"/>
+              </a:spcBef>
+              <a:buFont typeface="Arial"/>
+              <a:buChar char="•"/>
+              <a:defRPr sz="2000" kern="1200">
+                <a:solidFill>
+                  <a:schemeClr val="tx1"/>
+                </a:solidFill>
+                <a:latin typeface="+mn-lt"/>
+                <a:ea typeface="+mn-ea"/>
+                <a:cs typeface="+mn-cs"/>
+              </a:defRPr>
+            </a:lvl6pPr>
+            <a:lvl7pPr marL="2971800" indent="-228600" algn="l" defTabSz="457200" rtl="0" eaLnBrk="1" latinLnBrk="0" hangingPunct="1">
+              <a:spcBef>
+                <a:spcPct val="20000"/>
+              </a:spcBef>
+              <a:buFont typeface="Arial"/>
+              <a:buChar char="•"/>
+              <a:defRPr sz="2000" kern="1200">
+                <a:solidFill>
+                  <a:schemeClr val="tx1"/>
+                </a:solidFill>
+                <a:latin typeface="+mn-lt"/>
+                <a:ea typeface="+mn-ea"/>
+                <a:cs typeface="+mn-cs"/>
+              </a:defRPr>
+            </a:lvl7pPr>
+            <a:lvl8pPr marL="3429000" indent="-228600" algn="l" defTabSz="457200" rtl="0" eaLnBrk="1" latinLnBrk="0" hangingPunct="1">
+              <a:spcBef>
+                <a:spcPct val="20000"/>
+              </a:spcBef>
+              <a:buFont typeface="Arial"/>
+              <a:buChar char="•"/>
+              <a:defRPr sz="2000" kern="1200">
+                <a:solidFill>
+                  <a:schemeClr val="tx1"/>
+                </a:solidFill>
+                <a:latin typeface="+mn-lt"/>
+                <a:ea typeface="+mn-ea"/>
+                <a:cs typeface="+mn-cs"/>
+              </a:defRPr>
+            </a:lvl8pPr>
+            <a:lvl9pPr marL="3886200" indent="-228600" algn="l" defTabSz="457200" rtl="0" eaLnBrk="1" latinLnBrk="0" hangingPunct="1">
+              <a:spcBef>
+                <a:spcPct val="20000"/>
+              </a:spcBef>
+              <a:buFont typeface="Arial"/>
+              <a:buChar char="•"/>
+              <a:defRPr sz="2000" kern="1200">
+                <a:solidFill>
+                  <a:schemeClr val="tx1"/>
+                </a:solidFill>
+                <a:latin typeface="+mn-lt"/>
+                <a:ea typeface="+mn-ea"/>
+                <a:cs typeface="+mn-cs"/>
+              </a:defRPr>
+            </a:lvl9pPr>
+          </a:lstStyle>
+          <a:p>
+            <a:pPr marL="0" indent="0">
+              <a:buNone/>
+            </a:pPr>
+            <a:r>
+              <a:rPr lang="fr-FR" sz="2000" dirty="0" smtClean="0"/>
               <a:t> </a:t>
             </a:r>
             <a:r>
-              <a:rPr lang="en-US" dirty="0" err="1" smtClean="0"/>
-              <a:t>th</a:t>
-            </a:r>
-            <a:r>
-              <a:rPr lang="fr-FR" dirty="0" smtClean="0"/>
-              <a:t>e</a:t>
-            </a:r>
-            <a:r>
-              <a:rPr lang="en-US" dirty="0" smtClean="0"/>
-              <a:t>me d</a:t>
-            </a:r>
-            <a:r>
-              <a:rPr lang="fr-FR" dirty="0" smtClean="0"/>
-              <a:t>è</a:t>
-            </a:r>
-            <a:r>
-              <a:rPr lang="en-US" dirty="0" smtClean="0"/>
-              <a:t>s le </a:t>
-            </a:r>
-            <a:r>
-              <a:rPr lang="en-US" dirty="0" err="1" smtClean="0"/>
-              <a:t>chargement</a:t>
-            </a:r>
-            <a:r>
-              <a:rPr lang="en-US" dirty="0" smtClean="0"/>
-              <a:t> de la page (</a:t>
-            </a:r>
-            <a:r>
-              <a:rPr lang="en-US" dirty="0" err="1" smtClean="0"/>
-              <a:t>avant</a:t>
-            </a:r>
-            <a:r>
-              <a:rPr lang="en-US" dirty="0" smtClean="0"/>
-              <a:t> </a:t>
-            </a:r>
-            <a:r>
-              <a:rPr lang="en-US" dirty="0" err="1" smtClean="0"/>
-              <a:t>l’affichage</a:t>
-            </a:r>
-            <a:r>
-              <a:rPr lang="en-US" dirty="0" smtClean="0"/>
-              <a:t> du </a:t>
-            </a:r>
-            <a:r>
-              <a:rPr lang="en-US" dirty="0" err="1" smtClean="0"/>
-              <a:t>contenu</a:t>
-            </a:r>
-            <a:r>
-              <a:rPr lang="en-US" dirty="0" smtClean="0"/>
-              <a:t>), </a:t>
-            </a:r>
-            <a:r>
-              <a:rPr lang="en-US" dirty="0" err="1" smtClean="0"/>
-              <a:t>ce</a:t>
-            </a:r>
-            <a:r>
-              <a:rPr lang="en-US" dirty="0" smtClean="0"/>
-              <a:t> qui a </a:t>
-            </a:r>
-            <a:r>
-              <a:rPr lang="en-US" dirty="0" err="1" smtClean="0"/>
-              <a:t>supprim</a:t>
-            </a:r>
-            <a:r>
-              <a:rPr lang="fr-FR" dirty="0" smtClean="0"/>
-              <a:t>é</a:t>
-            </a:r>
-            <a:r>
-              <a:rPr lang="en-US" dirty="0" smtClean="0"/>
-              <a:t> le flash </a:t>
-            </a:r>
-          </a:p>
-          <a:p>
-            <a:r>
-              <a:rPr dirty="0" smtClean="0"/>
-              <a:t>2</a:t>
-            </a:r>
-            <a:r>
-              <a:rPr dirty="0"/>
-              <a:t>. </a:t>
-            </a:r>
-            <a:r>
-              <a:rPr lang="en-US" b="1" dirty="0" err="1" smtClean="0"/>
-              <a:t>Pobl</a:t>
-            </a:r>
-            <a:r>
-              <a:rPr lang="fr-FR" b="1" dirty="0" smtClean="0"/>
-              <a:t>è</a:t>
-            </a:r>
-            <a:r>
-              <a:rPr lang="en-US" b="1" dirty="0" smtClean="0"/>
-              <a:t>me de d</a:t>
-            </a:r>
-            <a:r>
-              <a:rPr lang="fr-FR" b="1" dirty="0" smtClean="0"/>
-              <a:t>é</a:t>
-            </a:r>
-            <a:r>
-              <a:rPr lang="en-US" b="1" dirty="0" err="1" smtClean="0"/>
-              <a:t>bordements</a:t>
-            </a:r>
-            <a:r>
-              <a:rPr lang="en-US" b="1" dirty="0" smtClean="0"/>
-              <a:t> des </a:t>
-            </a:r>
-            <a:r>
-              <a:rPr lang="fr-FR" b="1" dirty="0" smtClean="0"/>
-              <a:t>é</a:t>
-            </a:r>
-            <a:r>
-              <a:rPr lang="en-US" b="1" dirty="0" err="1" smtClean="0"/>
-              <a:t>léments</a:t>
-            </a:r>
-            <a:endParaRPr lang="en-US" b="1" dirty="0" smtClean="0"/>
-          </a:p>
-          <a:p>
-            <a:r>
-              <a:rPr lang="en-US" b="1" dirty="0" smtClean="0"/>
-              <a:t>Solution: </a:t>
-            </a:r>
-            <a:r>
-              <a:rPr lang="en-US" dirty="0" smtClean="0"/>
-              <a:t>correction du CSS et utilization de Bootstrap (</a:t>
-            </a:r>
-            <a:r>
-              <a:rPr lang="en-US" dirty="0" err="1" smtClean="0"/>
-              <a:t>gestion</a:t>
-            </a:r>
-            <a:r>
-              <a:rPr lang="en-US" dirty="0" smtClean="0"/>
-              <a:t> du responsive, flexbox et </a:t>
-            </a:r>
-            <a:r>
-              <a:rPr lang="en-US" dirty="0" err="1" smtClean="0"/>
-              <a:t>ajustement</a:t>
-            </a:r>
-            <a:r>
-              <a:rPr lang="en-US" dirty="0" smtClean="0"/>
-              <a:t> des </a:t>
-            </a:r>
-            <a:r>
-              <a:rPr lang="en-US" dirty="0" err="1" smtClean="0"/>
-              <a:t>largeurs</a:t>
-            </a:r>
-            <a:r>
-              <a:rPr lang="en-US" dirty="0" smtClean="0"/>
+              <a:rPr lang="fr-FR" sz="2000" dirty="0"/>
+              <a:t>3. </a:t>
+            </a:r>
+            <a:r>
+              <a:rPr lang="fr-FR" sz="2000" b="1" dirty="0">
+                <a:solidFill>
+                  <a:srgbClr val="002060"/>
+                </a:solidFill>
+              </a:rPr>
+              <a:t>Page freelance qui ne s’affiche pas correctement</a:t>
+            </a:r>
+          </a:p>
+          <a:p>
+            <a:pPr marL="0" indent="0">
+              <a:buNone/>
+            </a:pPr>
+            <a:r>
+              <a:rPr lang="fr-FR" sz="2000" b="1" dirty="0"/>
+              <a:t>Solution</a:t>
+            </a:r>
+            <a:r>
+              <a:rPr lang="fr-FR" sz="2000" dirty="0"/>
+              <a:t>: suppression d’une propriété CSS (</a:t>
+            </a:r>
+            <a:r>
+              <a:rPr lang="fr-FR" sz="2000" dirty="0" err="1"/>
+              <a:t>opacity</a:t>
+            </a:r>
+            <a:r>
+              <a:rPr lang="fr-FR" sz="2000" dirty="0"/>
               <a:t>)</a:t>
             </a:r>
-          </a:p>
-          <a:p>
-            <a:r>
-              <a:rPr dirty="0" smtClean="0"/>
-              <a:t>3</a:t>
-            </a:r>
-            <a:r>
-              <a:rPr dirty="0"/>
-              <a:t>. </a:t>
-            </a:r>
-            <a:r>
-              <a:rPr lang="en-US" b="1" dirty="0" smtClean="0"/>
-              <a:t>Page freelance qui ne </a:t>
-            </a:r>
-            <a:r>
-              <a:rPr lang="en-US" b="1" dirty="0" err="1" smtClean="0"/>
-              <a:t>s’affiche</a:t>
-            </a:r>
-            <a:r>
-              <a:rPr lang="en-US" b="1" dirty="0" smtClean="0"/>
-              <a:t> pas </a:t>
-            </a:r>
-            <a:r>
-              <a:rPr lang="en-US" b="1" dirty="0" err="1" smtClean="0"/>
-              <a:t>correctement</a:t>
-            </a:r>
-            <a:endParaRPr lang="en-US" b="1" dirty="0" smtClean="0"/>
-          </a:p>
-          <a:p>
-            <a:r>
-              <a:rPr lang="en-US" b="1" dirty="0" smtClean="0"/>
-              <a:t>Solution</a:t>
-            </a:r>
-            <a:r>
-              <a:rPr lang="en-US" dirty="0" smtClean="0"/>
-              <a:t>: suppression </a:t>
-            </a:r>
-            <a:r>
-              <a:rPr lang="en-US" dirty="0" err="1" smtClean="0"/>
-              <a:t>d’une</a:t>
-            </a:r>
-            <a:r>
-              <a:rPr lang="en-US" dirty="0" smtClean="0"/>
-              <a:t> </a:t>
-            </a:r>
-            <a:r>
-              <a:rPr lang="en-US" dirty="0" err="1" smtClean="0"/>
-              <a:t>propri</a:t>
-            </a:r>
-            <a:r>
-              <a:rPr lang="fr-FR" dirty="0" smtClean="0"/>
-              <a:t>été</a:t>
-            </a:r>
-            <a:r>
-              <a:rPr lang="en-US" dirty="0"/>
-              <a:t> </a:t>
-            </a:r>
-            <a:r>
-              <a:rPr lang="en-US" dirty="0" smtClean="0"/>
-              <a:t>CSS (opacity)</a:t>
-            </a:r>
-            <a:endParaRPr dirty="0"/>
           </a:p>
         </p:txBody>
       </p:sp>
@@ -4163,6 +5348,9 @@
   <p:clrMapOvr>
     <a:masterClrMapping/>
   </p:clrMapOvr>
+  <p:transition spd="slow">
+    <p:wipe/>
+  </p:transition>
   <p:timing>
     <p:tnLst>
       <p:par>
@@ -4200,14 +5388,47 @@
             <p:ph type="title"/>
           </p:nvPr>
         </p:nvSpPr>
-        <p:spPr/>
+        <p:spPr>
+          <a:xfrm>
+            <a:off x="1638300" y="80962"/>
+            <a:ext cx="4978400" cy="681038"/>
+          </a:xfrm>
+        </p:spPr>
         <p:txBody>
-          <a:bodyPr/>
+          <a:bodyPr>
+            <a:normAutofit fontScale="90000"/>
+          </a:bodyPr>
           <a:lstStyle/>
           <a:p>
             <a:r>
-              <a:t>Ressources utilisées</a:t>
-            </a:r>
+              <a:rPr b="1" dirty="0" err="1">
+                <a:solidFill>
+                  <a:srgbClr val="002060"/>
+                </a:solidFill>
+              </a:rPr>
+              <a:t>Ressources</a:t>
+            </a:r>
+            <a:r>
+              <a:rPr b="1" dirty="0">
+                <a:solidFill>
+                  <a:srgbClr val="002060"/>
+                </a:solidFill>
+              </a:rPr>
+              <a:t> </a:t>
+            </a:r>
+            <a:r>
+              <a:rPr b="1" dirty="0" err="1">
+                <a:solidFill>
+                  <a:srgbClr val="002060"/>
+                </a:solidFill>
+              </a:rPr>
+              <a:t>utilisées</a:t>
+            </a:r>
+            <a:endParaRPr b="1" dirty="0">
+              <a:solidFill>
+                <a:srgbClr val="002060"/>
+              </a:solidFill>
+            </a:endParaRPr>
           </a:p>
         </p:txBody>
       </p:sp>
@@ -4221,54 +5442,147 @@
             <p:ph idx="1"/>
           </p:nvPr>
         </p:nvSpPr>
-        <p:spPr/>
+        <p:spPr>
+          <a:xfrm>
+            <a:off x="355600" y="1371600"/>
+            <a:ext cx="3263900" cy="4525963"/>
+          </a:xfrm>
+        </p:spPr>
         <p:txBody>
           <a:bodyPr>
             <a:normAutofit/>
           </a:bodyPr>
           <a:lstStyle/>
           <a:p>
-            <a:r>
-              <a:rPr dirty="0"/>
+            <a:pPr>
+              <a:buFont typeface="Wingdings" panose="05000000000000000000" pitchFamily="2" charset="2"/>
+              <a:buChar char="v"/>
+            </a:pPr>
+            <a:r>
+              <a:rPr dirty="0">
+                <a:solidFill>
+                  <a:schemeClr val="accent1">
+                    <a:lumMod val="75000"/>
+                  </a:schemeClr>
+                </a:solidFill>
+              </a:rPr>
               <a:t>Bootstrap</a:t>
             </a:r>
           </a:p>
           <a:p>
-            <a:r>
-              <a:rPr lang="en-US" dirty="0" smtClean="0"/>
+            <a:pPr>
+              <a:buFont typeface="Wingdings" panose="05000000000000000000" pitchFamily="2" charset="2"/>
+              <a:buChar char="v"/>
+            </a:pPr>
+            <a:r>
+              <a:rPr lang="en-US" dirty="0" smtClean="0">
+                <a:solidFill>
+                  <a:schemeClr val="accent1">
+                    <a:lumMod val="75000"/>
+                  </a:schemeClr>
+                </a:solidFill>
+              </a:rPr>
               <a:t>W3C Validator</a:t>
             </a:r>
-            <a:endParaRPr dirty="0"/>
-          </a:p>
-          <a:p>
-            <a:r>
-              <a:rPr dirty="0" err="1" smtClean="0"/>
+            <a:endParaRPr dirty="0">
+              <a:solidFill>
+                <a:schemeClr val="accent1">
+                  <a:lumMod val="75000"/>
+                </a:schemeClr>
+              </a:solidFill>
+            </a:endParaRPr>
+          </a:p>
+          <a:p>
+            <a:pPr>
+              <a:buFont typeface="Wingdings" panose="05000000000000000000" pitchFamily="2" charset="2"/>
+              <a:buChar char="v"/>
+            </a:pPr>
+            <a:r>
+              <a:rPr dirty="0" err="1" smtClean="0">
+                <a:solidFill>
+                  <a:schemeClr val="accent1">
+                    <a:lumMod val="75000"/>
+                  </a:schemeClr>
+                </a:solidFill>
+              </a:rPr>
               <a:t>Unsplash</a:t>
             </a:r>
-            <a:endParaRPr dirty="0"/>
-          </a:p>
-          <a:p>
-            <a:r>
-              <a:rPr dirty="0"/>
+            <a:endParaRPr dirty="0">
+              <a:solidFill>
+                <a:schemeClr val="accent1">
+                  <a:lumMod val="75000"/>
+                </a:schemeClr>
+              </a:solidFill>
+            </a:endParaRPr>
+          </a:p>
+          <a:p>
+            <a:pPr>
+              <a:buFont typeface="Wingdings" panose="05000000000000000000" pitchFamily="2" charset="2"/>
+              <a:buChar char="v"/>
+            </a:pPr>
+            <a:r>
+              <a:rPr dirty="0">
+                <a:solidFill>
+                  <a:schemeClr val="accent1">
+                    <a:lumMod val="75000"/>
+                  </a:schemeClr>
+                </a:solidFill>
+              </a:rPr>
               <a:t>Bootstrap Icons</a:t>
             </a:r>
           </a:p>
           <a:p>
-            <a:r>
-              <a:rPr dirty="0"/>
+            <a:pPr>
+              <a:buFont typeface="Wingdings" panose="05000000000000000000" pitchFamily="2" charset="2"/>
+              <a:buChar char="v"/>
+            </a:pPr>
+            <a:r>
+              <a:rPr dirty="0">
+                <a:solidFill>
+                  <a:schemeClr val="accent1">
+                    <a:lumMod val="75000"/>
+                  </a:schemeClr>
+                </a:solidFill>
+              </a:rPr>
               <a:t>Google Fonts</a:t>
             </a:r>
           </a:p>
           <a:p>
-            <a:r>
-              <a:rPr lang="en-US" dirty="0" smtClean="0"/>
+            <a:pPr>
+              <a:buFont typeface="Wingdings" panose="05000000000000000000" pitchFamily="2" charset="2"/>
+              <a:buChar char="v"/>
+            </a:pPr>
+            <a:r>
+              <a:rPr lang="en-US" dirty="0" smtClean="0">
+                <a:solidFill>
+                  <a:schemeClr val="accent1">
+                    <a:lumMod val="75000"/>
+                  </a:schemeClr>
+                </a:solidFill>
+              </a:rPr>
               <a:t>Google image</a:t>
             </a:r>
-            <a:endParaRPr dirty="0"/>
-          </a:p>
-          <a:p>
-            <a:r>
-              <a:rPr dirty="0"/>
+            <a:endParaRPr dirty="0">
+              <a:solidFill>
+                <a:schemeClr val="accent1">
+                  <a:lumMod val="75000"/>
+                </a:schemeClr>
+              </a:solidFill>
+            </a:endParaRPr>
+          </a:p>
+          <a:p>
+            <a:pPr>
+              <a:buFont typeface="Wingdings" panose="05000000000000000000" pitchFamily="2" charset="2"/>
+              <a:buChar char="v"/>
+            </a:pPr>
+            <a:r>
+              <a:rPr dirty="0">
+                <a:solidFill>
+                  <a:schemeClr val="accent1">
+                    <a:lumMod val="75000"/>
+                  </a:schemeClr>
+                </a:solidFill>
+              </a:rPr>
               <a:t>GitHub</a:t>
             </a:r>
           </a:p>
@@ -4279,6 +5593,9 @@
   <p:clrMapOvr>
     <a:masterClrMapping/>
   </p:clrMapOvr>
+  <p:transition spd="slow">
+    <p:wipe/>
+  </p:transition>
   <p:timing>
     <p:tnLst>
       <p:par>
@@ -4316,13 +5633,33 @@
             <p:ph type="title"/>
           </p:nvPr>
         </p:nvSpPr>
-        <p:spPr/>
+        <p:spPr>
+          <a:xfrm>
+            <a:off x="1663700" y="101600"/>
+            <a:ext cx="4724400" cy="744538"/>
+          </a:xfrm>
+        </p:spPr>
         <p:txBody>
-          <a:bodyPr/>
+          <a:bodyPr>
+            <a:normAutofit fontScale="90000"/>
+          </a:bodyPr>
           <a:lstStyle/>
           <a:p>
             <a:r>
-              <a:t>Démonstration live</a:t>
+              <a:rPr b="1" dirty="0" err="1">
+                <a:solidFill>
+                  <a:srgbClr val="002060"/>
+                </a:solidFill>
+              </a:rPr>
+              <a:t>Démonstration</a:t>
+            </a:r>
+            <a:r>
+              <a:rPr b="1" dirty="0">
+                <a:solidFill>
+                  <a:srgbClr val="002060"/>
+                </a:solidFill>
+              </a:rPr>
+              <a:t> live</a:t>
             </a:r>
           </a:p>
         </p:txBody>
@@ -4337,28 +5674,119 @@
             <p:ph idx="1"/>
           </p:nvPr>
         </p:nvSpPr>
-        <p:spPr/>
+        <p:spPr>
+          <a:xfrm>
+            <a:off x="139700" y="1828801"/>
+            <a:ext cx="7518400" cy="2311399"/>
+          </a:xfrm>
+        </p:spPr>
         <p:txBody>
-          <a:bodyPr/>
+          <a:bodyPr>
+            <a:normAutofit lnSpcReduction="10000"/>
+          </a:bodyPr>
           <a:lstStyle/>
           <a:p>
-            <a:r>
-              <a:t>Présentation en direct du site AfriTalent.</a:t>
-            </a:r>
-          </a:p>
-          <a:p>
-            <a:r>
+            <a:pPr>
+              <a:buFont typeface="Wingdings" panose="05000000000000000000" pitchFamily="2" charset="2"/>
+              <a:buChar char="Ø"/>
+            </a:pPr>
+            <a:r>
+              <a:rPr dirty="0" err="1">
+                <a:solidFill>
+                  <a:schemeClr val="accent1">
+                    <a:lumMod val="75000"/>
+                  </a:schemeClr>
+                </a:solidFill>
+              </a:rPr>
+              <a:t>Présentation</a:t>
+            </a:r>
+            <a:r>
+              <a:rPr dirty="0">
+                <a:solidFill>
+                  <a:schemeClr val="accent1">
+                    <a:lumMod val="75000"/>
+                  </a:schemeClr>
+                </a:solidFill>
+              </a:rPr>
+              <a:t> en direct du site </a:t>
+            </a:r>
+            <a:r>
+              <a:rPr dirty="0" err="1">
+                <a:solidFill>
+                  <a:schemeClr val="accent1">
+                    <a:lumMod val="75000"/>
+                  </a:schemeClr>
+                </a:solidFill>
+              </a:rPr>
+              <a:t>AfriTalent</a:t>
+            </a:r>
+            <a:r>
+              <a:rPr dirty="0">
+                <a:solidFill>
+                  <a:schemeClr val="accent1">
+                    <a:lumMod val="75000"/>
+                  </a:schemeClr>
+                </a:solidFill>
+              </a:rPr>
+              <a:t>.</a:t>
+            </a:r>
+          </a:p>
+          <a:p>
+            <a:pPr>
+              <a:buFont typeface="Wingdings" panose="05000000000000000000" pitchFamily="2" charset="2"/>
+              <a:buChar char="Ø"/>
+            </a:pPr>
+            <a:r>
+              <a:rPr dirty="0">
+                <a:solidFill>
+                  <a:schemeClr val="accent1">
+                    <a:lumMod val="75000"/>
+                  </a:schemeClr>
+                </a:solidFill>
+              </a:rPr>
               <a:t>Navigation entre les pages.</a:t>
             </a:r>
           </a:p>
           <a:p>
-            <a:r>
+            <a:pPr>
+              <a:buFont typeface="Wingdings" panose="05000000000000000000" pitchFamily="2" charset="2"/>
+              <a:buChar char="Ø"/>
+            </a:pPr>
+            <a:r>
+              <a:rPr dirty="0">
+                <a:solidFill>
+                  <a:schemeClr val="accent1">
+                    <a:lumMod val="75000"/>
+                  </a:schemeClr>
+                </a:solidFill>
+              </a:rPr>
               <a:t>Activation du dark mode.</a:t>
             </a:r>
           </a:p>
           <a:p>
-            <a:r>
-              <a:t>Affichage responsive mobile.</a:t>
+            <a:pPr>
+              <a:buFont typeface="Wingdings" panose="05000000000000000000" pitchFamily="2" charset="2"/>
+              <a:buChar char="Ø"/>
+            </a:pPr>
+            <a:r>
+              <a:rPr dirty="0" err="1">
+                <a:solidFill>
+                  <a:schemeClr val="accent1">
+                    <a:lumMod val="75000"/>
+                  </a:schemeClr>
+                </a:solidFill>
+              </a:rPr>
+              <a:t>Affichage</a:t>
+            </a:r>
+            <a:r>
+              <a:rPr dirty="0">
+                <a:solidFill>
+                  <a:schemeClr val="accent1">
+                    <a:lumMod val="75000"/>
+                  </a:schemeClr>
+                </a:solidFill>
+              </a:rPr>
+              <a:t> responsive mobile.</a:t>
             </a:r>
           </a:p>
         </p:txBody>
@@ -4368,6 +5796,9 @@
   <p:clrMapOvr>
     <a:masterClrMapping/>
   </p:clrMapOvr>
+  <p:transition spd="slow">
+    <p:wipe/>
+  </p:transition>
   <p:timing>
     <p:tnLst>
       <p:par>
@@ -4405,12 +5836,24 @@
             <p:ph type="title"/>
           </p:nvPr>
         </p:nvSpPr>
-        <p:spPr/>
+        <p:spPr>
+          <a:xfrm>
+            <a:off x="2209800" y="444500"/>
+            <a:ext cx="3314700" cy="1066800"/>
+          </a:xfrm>
+        </p:spPr>
         <p:txBody>
-          <a:bodyPr/>
+          <a:bodyPr>
+            <a:normAutofit/>
+          </a:bodyPr>
           <a:lstStyle/>
           <a:p>
             <a:r>
+              <a:rPr b="1" dirty="0">
+                <a:solidFill>
+                  <a:srgbClr val="002060"/>
+                </a:solidFill>
+              </a:rPr>
               <a:t>Conclusion</a:t>
             </a:r>
           </a:p>
@@ -4426,23 +5869,215 @@
             <p:ph idx="1"/>
           </p:nvPr>
         </p:nvSpPr>
-        <p:spPr/>
+        <p:spPr>
+          <a:xfrm>
+            <a:off x="266700" y="1600202"/>
+            <a:ext cx="8229600" cy="2882900"/>
+          </a:xfrm>
+        </p:spPr>
         <p:txBody>
           <a:bodyPr/>
           <a:lstStyle/>
           <a:p>
-            <a:r>
-              <a:t>Projet permettant de renforcer les compétences en développement front-end.</a:t>
-            </a:r>
-          </a:p>
-          <a:p>
-            <a:r>
-              <a:t>Maîtrise du responsive design, du JavaScript et de GitHub.</a:t>
-            </a:r>
-          </a:p>
-          <a:p>
-            <a:r>
-              <a:t>Expérience enrichissante en conception UI/UX.</a:t>
+            <a:pPr marL="0" indent="0">
+              <a:buNone/>
+            </a:pPr>
+            <a:r>
+              <a:rPr dirty="0" err="1" smtClean="0">
+                <a:solidFill>
+                  <a:schemeClr val="tx1">
+                    <a:lumMod val="75000"/>
+                    <a:lumOff val="25000"/>
+                  </a:schemeClr>
+                </a:solidFill>
+              </a:rPr>
+              <a:t>Projet</a:t>
+            </a:r>
+            <a:r>
+              <a:rPr dirty="0" smtClean="0">
+                <a:solidFill>
+                  <a:schemeClr val="tx1">
+                    <a:lumMod val="75000"/>
+                    <a:lumOff val="25000"/>
+                  </a:schemeClr>
+                </a:solidFill>
+              </a:rPr>
+              <a:t> </a:t>
+            </a:r>
+            <a:r>
+              <a:rPr dirty="0" err="1" smtClean="0">
+                <a:solidFill>
+                  <a:schemeClr val="tx1">
+                    <a:lumMod val="75000"/>
+                    <a:lumOff val="25000"/>
+                  </a:schemeClr>
+                </a:solidFill>
+              </a:rPr>
+              <a:t>permettant</a:t>
+            </a:r>
+            <a:r>
+              <a:rPr dirty="0" smtClean="0">
+                <a:solidFill>
+                  <a:schemeClr val="tx1">
+                    <a:lumMod val="75000"/>
+                    <a:lumOff val="25000"/>
+                  </a:schemeClr>
+                </a:solidFill>
+              </a:rPr>
+              <a:t> de </a:t>
+            </a:r>
+            <a:r>
+              <a:rPr dirty="0" err="1" smtClean="0">
+                <a:solidFill>
+                  <a:schemeClr val="tx1">
+                    <a:lumMod val="75000"/>
+                    <a:lumOff val="25000"/>
+                  </a:schemeClr>
+                </a:solidFill>
+              </a:rPr>
+              <a:t>renforcer</a:t>
+            </a:r>
+            <a:r>
+              <a:rPr dirty="0" smtClean="0">
+                <a:solidFill>
+                  <a:schemeClr val="tx1">
+                    <a:lumMod val="75000"/>
+                    <a:lumOff val="25000"/>
+                  </a:schemeClr>
+                </a:solidFill>
+              </a:rPr>
+              <a:t> les </a:t>
+            </a:r>
+            <a:r>
+              <a:rPr dirty="0" err="1" smtClean="0">
+                <a:solidFill>
+                  <a:schemeClr val="tx1">
+                    <a:lumMod val="75000"/>
+                    <a:lumOff val="25000"/>
+                  </a:schemeClr>
+                </a:solidFill>
+              </a:rPr>
+              <a:t>compétences</a:t>
+            </a:r>
+            <a:r>
+              <a:rPr dirty="0" smtClean="0">
+                <a:solidFill>
+                  <a:schemeClr val="tx1">
+                    <a:lumMod val="75000"/>
+                    <a:lumOff val="25000"/>
+                  </a:schemeClr>
+                </a:solidFill>
+              </a:rPr>
+              <a:t> </a:t>
+            </a:r>
+            <a:r>
+              <a:rPr dirty="0">
+                <a:solidFill>
+                  <a:schemeClr val="tx1">
+                    <a:lumMod val="75000"/>
+                    <a:lumOff val="25000"/>
+                  </a:schemeClr>
+                </a:solidFill>
+              </a:rPr>
+              <a:t>en </a:t>
+            </a:r>
+            <a:r>
+              <a:rPr dirty="0" err="1">
+                <a:solidFill>
+                  <a:schemeClr val="tx1">
+                    <a:lumMod val="75000"/>
+                    <a:lumOff val="25000"/>
+                  </a:schemeClr>
+                </a:solidFill>
+              </a:rPr>
+              <a:t>développement</a:t>
+            </a:r>
+            <a:r>
+              <a:rPr dirty="0">
+                <a:solidFill>
+                  <a:schemeClr val="tx1">
+                    <a:lumMod val="75000"/>
+                    <a:lumOff val="25000"/>
+                  </a:schemeClr>
+                </a:solidFill>
+              </a:rPr>
+              <a:t> front-end.</a:t>
+            </a:r>
+          </a:p>
+          <a:p>
+            <a:pPr marL="0" indent="0">
+              <a:buNone/>
+            </a:pPr>
+            <a:r>
+              <a:rPr dirty="0" err="1">
+                <a:solidFill>
+                  <a:schemeClr val="tx1">
+                    <a:lumMod val="75000"/>
+                    <a:lumOff val="25000"/>
+                  </a:schemeClr>
+                </a:solidFill>
+              </a:rPr>
+              <a:t>Maîtrise</a:t>
+            </a:r>
+            <a:r>
+              <a:rPr dirty="0">
+                <a:solidFill>
+                  <a:schemeClr val="tx1">
+                    <a:lumMod val="75000"/>
+                    <a:lumOff val="25000"/>
+                  </a:schemeClr>
+                </a:solidFill>
+              </a:rPr>
+              <a:t> du responsive design, du JavaScript et de GitHub.</a:t>
+            </a:r>
+          </a:p>
+          <a:p>
+            <a:pPr marL="0" indent="0">
+              <a:buNone/>
+            </a:pPr>
+            <a:r>
+              <a:rPr dirty="0" err="1">
+                <a:solidFill>
+                  <a:schemeClr val="tx1">
+                    <a:lumMod val="75000"/>
+                    <a:lumOff val="25000"/>
+                  </a:schemeClr>
+                </a:solidFill>
+              </a:rPr>
+              <a:t>Expérience</a:t>
+            </a:r>
+            <a:r>
+              <a:rPr dirty="0">
+                <a:solidFill>
+                  <a:schemeClr val="tx1">
+                    <a:lumMod val="75000"/>
+                    <a:lumOff val="25000"/>
+                  </a:schemeClr>
+                </a:solidFill>
+              </a:rPr>
+              <a:t> </a:t>
+            </a:r>
+            <a:r>
+              <a:rPr dirty="0" err="1">
+                <a:solidFill>
+                  <a:schemeClr val="tx1">
+                    <a:lumMod val="75000"/>
+                    <a:lumOff val="25000"/>
+                  </a:schemeClr>
+                </a:solidFill>
+              </a:rPr>
+              <a:t>enrichissante</a:t>
+            </a:r>
+            <a:r>
+              <a:rPr dirty="0">
+                <a:solidFill>
+                  <a:schemeClr val="tx1">
+                    <a:lumMod val="75000"/>
+                    <a:lumOff val="25000"/>
+                  </a:schemeClr>
+                </a:solidFill>
+              </a:rPr>
+              <a:t> en conception UI/UX.</a:t>
             </a:r>
           </a:p>
         </p:txBody>
@@ -4452,6 +6087,9 @@
   <p:clrMapOvr>
     <a:masterClrMapping/>
   </p:clrMapOvr>
+  <p:transition spd="slow">
+    <p:wipe/>
+  </p:transition>
   <p:timing>
     <p:tnLst>
       <p:par>
@@ -4489,20 +6127,39 @@
             <p:ph type="title"/>
           </p:nvPr>
         </p:nvSpPr>
-        <p:spPr/>
+        <p:spPr>
+          <a:xfrm>
+            <a:off x="660400" y="241300"/>
+            <a:ext cx="6921500" cy="681038"/>
+          </a:xfrm>
+        </p:spPr>
         <p:txBody>
-          <a:bodyPr/>
+          <a:bodyPr>
+            <a:normAutofit fontScale="90000"/>
+          </a:bodyPr>
           <a:lstStyle/>
           <a:p>
             <a:r>
-              <a:rPr dirty="0"/>
+              <a:rPr b="1" dirty="0">
+                <a:solidFill>
+                  <a:srgbClr val="002060"/>
+                </a:solidFill>
+              </a:rPr>
               <a:t>Perspectives </a:t>
             </a:r>
             <a:r>
-              <a:rPr dirty="0" err="1"/>
+              <a:rPr b="1" dirty="0" err="1">
+                <a:solidFill>
+                  <a:srgbClr val="002060"/>
+                </a:solidFill>
+              </a:rPr>
               <a:t>d'amélioration</a:t>
             </a:r>
-            <a:endParaRPr dirty="0"/>
+            <a:endParaRPr b="1" dirty="0">
+              <a:solidFill>
+                <a:srgbClr val="002060"/>
+              </a:solidFill>
+            </a:endParaRPr>
           </a:p>
         </p:txBody>
       </p:sp>
@@ -4521,85 +6178,335 @@
           <a:bodyPr/>
           <a:lstStyle/>
           <a:p>
-            <a:r>
-              <a:rPr dirty="0" err="1"/>
-              <a:t>Ajout</a:t>
-            </a:r>
-            <a:r>
-              <a:rPr dirty="0"/>
-              <a:t> d’un backend</a:t>
-            </a:r>
-          </a:p>
-          <a:p>
-            <a:r>
-              <a:rPr dirty="0" err="1"/>
+            <a:pPr marL="514350" indent="-514350">
+              <a:buFont typeface="+mj-lt"/>
+              <a:buAutoNum type="arabicPeriod"/>
+            </a:pPr>
+            <a:r>
+              <a:rPr dirty="0">
+                <a:solidFill>
+                  <a:schemeClr val="accent1">
+                    <a:lumMod val="75000"/>
+                  </a:schemeClr>
+                </a:solidFill>
+              </a:rPr>
+              <a:t>Ajout d’un backend</a:t>
+            </a:r>
+          </a:p>
+          <a:p>
+            <a:pPr marL="514350" indent="-514350">
+              <a:buFont typeface="+mj-lt"/>
+              <a:buAutoNum type="arabicPeriod"/>
+            </a:pPr>
+            <a:r>
+              <a:rPr dirty="0" err="1">
+                <a:solidFill>
+                  <a:schemeClr val="accent1">
+                    <a:lumMod val="75000"/>
+                  </a:schemeClr>
+                </a:solidFill>
+              </a:rPr>
               <a:t>Authentification</a:t>
             </a:r>
             <a:r>
-              <a:rPr dirty="0"/>
+              <a:rPr dirty="0">
+                <a:solidFill>
+                  <a:schemeClr val="accent1">
+                    <a:lumMod val="75000"/>
+                  </a:schemeClr>
+                </a:solidFill>
+              </a:rPr>
               <a:t> </a:t>
             </a:r>
             <a:r>
-              <a:rPr dirty="0" err="1"/>
+              <a:rPr dirty="0" err="1">
+                <a:solidFill>
+                  <a:schemeClr val="accent1">
+                    <a:lumMod val="75000"/>
+                  </a:schemeClr>
+                </a:solidFill>
+              </a:rPr>
               <a:t>utilisateurs</a:t>
             </a:r>
-            <a:endParaRPr dirty="0"/>
-          </a:p>
-          <a:p>
-            <a:r>
-              <a:rPr dirty="0" err="1"/>
+            <a:endParaRPr dirty="0">
+              <a:solidFill>
+                <a:schemeClr val="accent1">
+                  <a:lumMod val="75000"/>
+                </a:schemeClr>
+              </a:solidFill>
+            </a:endParaRPr>
+          </a:p>
+          <a:p>
+            <a:pPr marL="514350" indent="-514350">
+              <a:buFont typeface="+mj-lt"/>
+              <a:buAutoNum type="arabicPeriod"/>
+            </a:pPr>
+            <a:r>
+              <a:rPr dirty="0" err="1">
+                <a:solidFill>
+                  <a:schemeClr val="accent1">
+                    <a:lumMod val="75000"/>
+                  </a:schemeClr>
+                </a:solidFill>
+              </a:rPr>
               <a:t>Système</a:t>
             </a:r>
             <a:r>
-              <a:rPr dirty="0"/>
+              <a:rPr dirty="0">
+                <a:solidFill>
+                  <a:schemeClr val="accent1">
+                    <a:lumMod val="75000"/>
+                  </a:schemeClr>
+                </a:solidFill>
+              </a:rPr>
               <a:t> de </a:t>
             </a:r>
             <a:r>
-              <a:rPr dirty="0" err="1"/>
+              <a:rPr dirty="0" err="1">
+                <a:solidFill>
+                  <a:schemeClr val="accent1">
+                    <a:lumMod val="75000"/>
+                  </a:schemeClr>
+                </a:solidFill>
+              </a:rPr>
               <a:t>messagerie</a:t>
             </a:r>
-            <a:endParaRPr dirty="0"/>
-          </a:p>
-          <a:p>
-            <a:r>
-              <a:rPr dirty="0"/>
-              <a:t>Base de </a:t>
-            </a:r>
-            <a:r>
-              <a:rPr dirty="0" err="1"/>
+            <a:endParaRPr dirty="0">
+              <a:solidFill>
+                <a:schemeClr val="accent1">
+                  <a:lumMod val="75000"/>
+                </a:schemeClr>
+              </a:solidFill>
+            </a:endParaRPr>
+          </a:p>
+          <a:p>
+            <a:pPr marL="514350" indent="-514350">
+              <a:buFont typeface="+mj-lt"/>
+              <a:buAutoNum type="arabicPeriod"/>
+            </a:pPr>
+            <a:r>
+              <a:rPr lang="en-US" dirty="0" smtClean="0">
+                <a:solidFill>
+                  <a:schemeClr val="accent1">
+                    <a:lumMod val="75000"/>
+                  </a:schemeClr>
+                </a:solidFill>
+              </a:rPr>
+              <a:t>Cr</a:t>
+            </a:r>
+            <a:r>
+              <a:rPr lang="fr-FR" dirty="0" smtClean="0">
+                <a:solidFill>
+                  <a:schemeClr val="accent1">
+                    <a:lumMod val="75000"/>
+                  </a:schemeClr>
+                </a:solidFill>
+              </a:rPr>
+              <a:t>é</a:t>
+            </a:r>
+            <a:r>
+              <a:rPr lang="en-US" dirty="0" err="1" smtClean="0">
+                <a:solidFill>
+                  <a:schemeClr val="accent1">
+                    <a:lumMod val="75000"/>
+                  </a:schemeClr>
+                </a:solidFill>
+              </a:rPr>
+              <a:t>ation</a:t>
+            </a:r>
+            <a:r>
+              <a:rPr lang="en-US" dirty="0" smtClean="0">
+                <a:solidFill>
+                  <a:schemeClr val="accent1">
+                    <a:lumMod val="75000"/>
+                  </a:schemeClr>
+                </a:solidFill>
+              </a:rPr>
+              <a:t> </a:t>
+            </a:r>
+            <a:r>
+              <a:rPr lang="en-US" dirty="0" err="1" smtClean="0">
+                <a:solidFill>
+                  <a:schemeClr val="accent1">
+                    <a:lumMod val="75000"/>
+                  </a:schemeClr>
+                </a:solidFill>
+              </a:rPr>
+              <a:t>d’une</a:t>
+            </a:r>
+            <a:r>
+              <a:rPr lang="en-US" dirty="0" smtClean="0">
+                <a:solidFill>
+                  <a:schemeClr val="accent1">
+                    <a:lumMod val="75000"/>
+                  </a:schemeClr>
+                </a:solidFill>
+              </a:rPr>
+              <a:t> </a:t>
+            </a:r>
+            <a:r>
+              <a:rPr lang="en-US" dirty="0">
+                <a:solidFill>
+                  <a:schemeClr val="accent1">
+                    <a:lumMod val="75000"/>
+                  </a:schemeClr>
+                </a:solidFill>
+              </a:rPr>
+              <a:t>b</a:t>
+            </a:r>
+            <a:r>
+              <a:rPr dirty="0" smtClean="0">
+                <a:solidFill>
+                  <a:schemeClr val="accent1">
+                    <a:lumMod val="75000"/>
+                  </a:schemeClr>
+                </a:solidFill>
+              </a:rPr>
+              <a:t>ase </a:t>
+            </a:r>
+            <a:r>
+              <a:rPr dirty="0">
+                <a:solidFill>
+                  <a:schemeClr val="accent1">
+                    <a:lumMod val="75000"/>
+                  </a:schemeClr>
+                </a:solidFill>
+              </a:rPr>
+              <a:t>de </a:t>
+            </a:r>
+            <a:r>
+              <a:rPr dirty="0" err="1">
+                <a:solidFill>
+                  <a:schemeClr val="accent1">
+                    <a:lumMod val="75000"/>
+                  </a:schemeClr>
+                </a:solidFill>
+              </a:rPr>
               <a:t>données</a:t>
             </a:r>
-            <a:endParaRPr dirty="0"/>
-          </a:p>
-          <a:p>
-            <a:r>
-              <a:rPr dirty="0" err="1"/>
+            <a:endParaRPr dirty="0">
+              <a:solidFill>
+                <a:schemeClr val="accent1">
+                  <a:lumMod val="75000"/>
+                </a:schemeClr>
+              </a:solidFill>
+            </a:endParaRPr>
+          </a:p>
+          <a:p>
+            <a:pPr marL="514350" indent="-514350">
+              <a:buFont typeface="+mj-lt"/>
+              <a:buAutoNum type="arabicPeriod"/>
+            </a:pPr>
+            <a:r>
+              <a:rPr dirty="0" err="1">
+                <a:solidFill>
+                  <a:schemeClr val="accent1">
+                    <a:lumMod val="75000"/>
+                  </a:schemeClr>
+                </a:solidFill>
+              </a:rPr>
               <a:t>Recherche</a:t>
             </a:r>
             <a:r>
-              <a:rPr dirty="0"/>
+              <a:rPr dirty="0">
+                <a:solidFill>
+                  <a:schemeClr val="accent1">
+                    <a:lumMod val="75000"/>
+                  </a:schemeClr>
+                </a:solidFill>
+              </a:rPr>
               <a:t> </a:t>
             </a:r>
             <a:r>
-              <a:rPr dirty="0" err="1"/>
+              <a:rPr dirty="0" err="1">
+                <a:solidFill>
+                  <a:schemeClr val="accent1">
+                    <a:lumMod val="75000"/>
+                  </a:schemeClr>
+                </a:solidFill>
+              </a:rPr>
               <a:t>avancée</a:t>
             </a:r>
-            <a:endParaRPr dirty="0"/>
-          </a:p>
-          <a:p>
-            <a:r>
-              <a:rPr dirty="0" err="1"/>
-              <a:t>Paiement</a:t>
-            </a:r>
-            <a:r>
-              <a:rPr dirty="0"/>
+            <a:endParaRPr dirty="0">
+              <a:solidFill>
+                <a:schemeClr val="accent1">
+                  <a:lumMod val="75000"/>
+                </a:schemeClr>
+              </a:solidFill>
+            </a:endParaRPr>
+          </a:p>
+          <a:p>
+            <a:pPr marL="514350" indent="-514350">
+              <a:buFont typeface="+mj-lt"/>
+              <a:buAutoNum type="arabicPeriod"/>
+            </a:pPr>
+            <a:r>
+              <a:rPr lang="en-US" dirty="0" err="1" smtClean="0">
+                <a:solidFill>
+                  <a:schemeClr val="accent1">
+                    <a:lumMod val="75000"/>
+                  </a:schemeClr>
+                </a:solidFill>
+              </a:rPr>
+              <a:t>Mise</a:t>
+            </a:r>
+            <a:r>
+              <a:rPr lang="en-US" dirty="0" smtClean="0">
+                <a:solidFill>
+                  <a:schemeClr val="accent1">
+                    <a:lumMod val="75000"/>
+                  </a:schemeClr>
+                </a:solidFill>
+              </a:rPr>
+              <a:t> en place de </a:t>
+            </a:r>
+            <a:r>
+              <a:rPr lang="en-US" dirty="0" err="1">
+                <a:solidFill>
+                  <a:schemeClr val="accent1">
+                    <a:lumMod val="75000"/>
+                  </a:schemeClr>
+                </a:solidFill>
+              </a:rPr>
+              <a:t>p</a:t>
+            </a:r>
+            <a:r>
+              <a:rPr dirty="0" err="1" smtClean="0">
+                <a:solidFill>
+                  <a:schemeClr val="accent1">
+                    <a:lumMod val="75000"/>
+                  </a:schemeClr>
+                </a:solidFill>
+              </a:rPr>
+              <a:t>aiement</a:t>
+            </a:r>
+            <a:r>
+              <a:rPr dirty="0" smtClean="0">
+                <a:solidFill>
+                  <a:schemeClr val="accent1">
+                    <a:lumMod val="75000"/>
+                  </a:schemeClr>
+                </a:solidFill>
+              </a:rPr>
               <a:t> </a:t>
             </a:r>
             <a:r>
-              <a:rPr dirty="0" err="1"/>
+              <a:rPr dirty="0" err="1">
+                <a:solidFill>
+                  <a:schemeClr val="accent1">
+                    <a:lumMod val="75000"/>
+                  </a:schemeClr>
+                </a:solidFill>
+              </a:rPr>
               <a:t>sécurisé</a:t>
             </a:r>
-            <a:endParaRPr dirty="0"/>
+            <a:endParaRPr dirty="0">
+              <a:solidFill>
+                <a:schemeClr val="accent1">
+                  <a:lumMod val="75000"/>
+                </a:schemeClr>
+              </a:solidFill>
+            </a:endParaRPr>
           </a:p>
         </p:txBody>
       </p:sp>
@@ -4608,6 +6515,9 @@
   <p:clrMapOvr>
     <a:masterClrMapping/>
   </p:clrMapOvr>
+  <p:transition spd="slow">
+    <p:wipe/>
+  </p:transition>
   <p:timing>
     <p:tnLst>
       <p:par>
@@ -4621,6 +6531,14 @@
 <file path=ppt/slides/slide2.xml><?xml version="1.0" encoding="utf-8"?>
 <p:sld xmlns:a="http://schemas.openxmlformats.org/drawingml/2006/main" xmlns:r="http://schemas.openxmlformats.org/officeDocument/2006/relationships" xmlns:p="http://schemas.openxmlformats.org/presentationml/2006/main">
   <p:cSld>
+    <p:bg>
+      <p:bgPr>
+        <a:solidFill>
+          <a:srgbClr val="EDF2F9"/>
+        </a:solidFill>
+        <a:effectLst/>
+      </p:bgPr>
+    </p:bg>
     <p:spTree>
       <p:nvGrpSpPr>
         <p:cNvPr id="1" name=""/>
@@ -4645,14 +6563,35 @@
             <p:ph type="title"/>
           </p:nvPr>
         </p:nvSpPr>
-        <p:spPr/>
+        <p:spPr>
+          <a:xfrm>
+            <a:off x="381000" y="825500"/>
+            <a:ext cx="2908300" cy="566738"/>
+          </a:xfrm>
+        </p:spPr>
         <p:txBody>
-          <a:bodyPr/>
+          <a:bodyPr>
+            <a:normAutofit fontScale="90000"/>
+          </a:bodyPr>
           <a:lstStyle/>
           <a:p>
             <a:r>
+              <a:rPr b="1" dirty="0" err="1">
+                <a:solidFill>
+                  <a:schemeClr val="tx2">
+                    <a:lumMod val="75000"/>
+                  </a:schemeClr>
+                </a:solidFill>
+              </a:rPr>
               <a:t>Sommaire</a:t>
             </a:r>
+            <a:endParaRPr b="1" dirty="0">
+              <a:solidFill>
+                <a:schemeClr val="tx2">
+                  <a:lumMod val="75000"/>
+                </a:schemeClr>
+              </a:solidFill>
+            </a:endParaRPr>
           </a:p>
         </p:txBody>
       </p:sp>
@@ -4666,86 +6605,382 @@
             <p:ph idx="1"/>
           </p:nvPr>
         </p:nvSpPr>
-        <p:spPr/>
+        <p:spPr>
+          <a:xfrm>
+            <a:off x="457200" y="1600200"/>
+            <a:ext cx="4457700" cy="4525963"/>
+          </a:xfrm>
+        </p:spPr>
         <p:txBody>
           <a:bodyPr>
             <a:normAutofit lnSpcReduction="10000"/>
           </a:bodyPr>
           <a:lstStyle/>
           <a:p>
-            <a:r>
-              <a:rPr dirty="0" err="1"/>
+            <a:pPr>
+              <a:buFont typeface="Wingdings" panose="05000000000000000000" pitchFamily="2" charset="2"/>
+              <a:buChar char="Ø"/>
+            </a:pPr>
+            <a:r>
+              <a:rPr lang="en-US" dirty="0" smtClean="0">
+                <a:solidFill>
+                  <a:schemeClr val="tx1">
+                    <a:lumMod val="65000"/>
+                    <a:lumOff val="35000"/>
+                  </a:schemeClr>
+                </a:solidFill>
+              </a:rPr>
+              <a:t> </a:t>
+            </a:r>
+            <a:r>
+              <a:rPr dirty="0" err="1" smtClean="0">
+                <a:solidFill>
+                  <a:schemeClr val="tx1">
+                    <a:lumMod val="65000"/>
+                    <a:lumOff val="35000"/>
+                  </a:schemeClr>
+                </a:solidFill>
+              </a:rPr>
               <a:t>Présentation</a:t>
             </a:r>
             <a:r>
-              <a:rPr dirty="0"/>
+              <a:rPr dirty="0" smtClean="0">
+                <a:solidFill>
+                  <a:schemeClr val="tx1">
+                    <a:lumMod val="65000"/>
+                    <a:lumOff val="35000"/>
+                  </a:schemeClr>
+                </a:solidFill>
+              </a:rPr>
               <a:t> du </a:t>
             </a:r>
             <a:r>
-              <a:rPr dirty="0" err="1"/>
+              <a:rPr dirty="0" err="1" smtClean="0">
+                <a:solidFill>
+                  <a:schemeClr val="tx1">
+                    <a:lumMod val="65000"/>
+                    <a:lumOff val="35000"/>
+                  </a:schemeClr>
+                </a:solidFill>
+              </a:rPr>
               <a:t>projet</a:t>
             </a:r>
-            <a:endParaRPr dirty="0"/>
-          </a:p>
-          <a:p>
-            <a:r>
-              <a:rPr dirty="0"/>
-              <a:t>Design &amp; inspirations</a:t>
-            </a:r>
-          </a:p>
-          <a:p>
-            <a:r>
-              <a:rPr dirty="0"/>
-              <a:t>Architecture du site</a:t>
-            </a:r>
-          </a:p>
-          <a:p>
-            <a:r>
-              <a:rPr dirty="0"/>
-              <a:t>Aspects techniques</a:t>
-            </a:r>
-          </a:p>
-          <a:p>
-            <a:r>
-              <a:rPr dirty="0"/>
-              <a:t>GitHub &amp; workflow</a:t>
-            </a:r>
-          </a:p>
-          <a:p>
-            <a:r>
-              <a:rPr dirty="0" err="1"/>
+            <a:endParaRPr dirty="0" smtClean="0">
+              <a:solidFill>
+                <a:schemeClr val="tx1">
+                  <a:lumMod val="65000"/>
+                  <a:lumOff val="35000"/>
+                </a:schemeClr>
+              </a:solidFill>
+            </a:endParaRPr>
+          </a:p>
+          <a:p>
+            <a:pPr>
+              <a:buFont typeface="Wingdings" panose="05000000000000000000" pitchFamily="2" charset="2"/>
+              <a:buChar char="Ø"/>
+            </a:pPr>
+            <a:r>
+              <a:rPr lang="en-US" dirty="0" smtClean="0">
+                <a:solidFill>
+                  <a:schemeClr val="tx1">
+                    <a:lumMod val="65000"/>
+                    <a:lumOff val="35000"/>
+                  </a:schemeClr>
+                </a:solidFill>
+              </a:rPr>
+              <a:t> </a:t>
+            </a:r>
+            <a:r>
+              <a:rPr dirty="0" smtClean="0">
+                <a:solidFill>
+                  <a:schemeClr val="tx1">
+                    <a:lumMod val="65000"/>
+                    <a:lumOff val="35000"/>
+                  </a:schemeClr>
+                </a:solidFill>
+              </a:rPr>
+              <a:t>Design </a:t>
+            </a:r>
+            <a:r>
+              <a:rPr dirty="0">
+                <a:solidFill>
+                  <a:schemeClr val="tx1">
+                    <a:lumMod val="65000"/>
+                    <a:lumOff val="35000"/>
+                  </a:schemeClr>
+                </a:solidFill>
+              </a:rPr>
+              <a:t>&amp; inspirations</a:t>
+            </a:r>
+          </a:p>
+          <a:p>
+            <a:pPr>
+              <a:buFont typeface="Wingdings" panose="05000000000000000000" pitchFamily="2" charset="2"/>
+              <a:buChar char="Ø"/>
+            </a:pPr>
+            <a:r>
+              <a:rPr lang="en-US" dirty="0">
+                <a:solidFill>
+                  <a:schemeClr val="tx1">
+                    <a:lumMod val="65000"/>
+                    <a:lumOff val="35000"/>
+                  </a:schemeClr>
+                </a:solidFill>
+              </a:rPr>
+              <a:t> </a:t>
+            </a:r>
+            <a:r>
+              <a:rPr dirty="0" smtClean="0">
+                <a:solidFill>
+                  <a:schemeClr val="tx1">
+                    <a:lumMod val="65000"/>
+                    <a:lumOff val="35000"/>
+                  </a:schemeClr>
+                </a:solidFill>
+              </a:rPr>
+              <a:t>Architecture </a:t>
+            </a:r>
+            <a:r>
+              <a:rPr dirty="0">
+                <a:solidFill>
+                  <a:schemeClr val="tx1">
+                    <a:lumMod val="65000"/>
+                    <a:lumOff val="35000"/>
+                  </a:schemeClr>
+                </a:solidFill>
+              </a:rPr>
+              <a:t>du site</a:t>
+            </a:r>
+          </a:p>
+          <a:p>
+            <a:pPr>
+              <a:buFont typeface="Wingdings" panose="05000000000000000000" pitchFamily="2" charset="2"/>
+              <a:buChar char="Ø"/>
+            </a:pPr>
+            <a:r>
+              <a:rPr lang="en-US" dirty="0" smtClean="0">
+                <a:solidFill>
+                  <a:schemeClr val="tx1">
+                    <a:lumMod val="65000"/>
+                    <a:lumOff val="35000"/>
+                  </a:schemeClr>
+                </a:solidFill>
+              </a:rPr>
+              <a:t> </a:t>
+            </a:r>
+            <a:r>
+              <a:rPr dirty="0" smtClean="0">
+                <a:solidFill>
+                  <a:schemeClr val="tx1">
+                    <a:lumMod val="65000"/>
+                    <a:lumOff val="35000"/>
+                  </a:schemeClr>
+                </a:solidFill>
+              </a:rPr>
+              <a:t>Aspects </a:t>
+            </a:r>
+            <a:r>
+              <a:rPr dirty="0">
+                <a:solidFill>
+                  <a:schemeClr val="tx1">
+                    <a:lumMod val="65000"/>
+                    <a:lumOff val="35000"/>
+                  </a:schemeClr>
+                </a:solidFill>
+              </a:rPr>
+              <a:t>techniques</a:t>
+            </a:r>
+          </a:p>
+          <a:p>
+            <a:pPr>
+              <a:buFont typeface="Wingdings" panose="05000000000000000000" pitchFamily="2" charset="2"/>
+              <a:buChar char="Ø"/>
+            </a:pPr>
+            <a:r>
+              <a:rPr lang="en-US" dirty="0" smtClean="0">
+                <a:solidFill>
+                  <a:schemeClr val="tx1">
+                    <a:lumMod val="65000"/>
+                    <a:lumOff val="35000"/>
+                  </a:schemeClr>
+                </a:solidFill>
+              </a:rPr>
+              <a:t> </a:t>
+            </a:r>
+            <a:r>
+              <a:rPr dirty="0" smtClean="0">
+                <a:solidFill>
+                  <a:schemeClr val="tx1">
+                    <a:lumMod val="65000"/>
+                    <a:lumOff val="35000"/>
+                  </a:schemeClr>
+                </a:solidFill>
+              </a:rPr>
+              <a:t>GitHub </a:t>
+            </a:r>
+            <a:r>
+              <a:rPr dirty="0">
+                <a:solidFill>
+                  <a:schemeClr val="tx1">
+                    <a:lumMod val="65000"/>
+                    <a:lumOff val="35000"/>
+                  </a:schemeClr>
+                </a:solidFill>
+              </a:rPr>
+              <a:t>&amp; workflow</a:t>
+            </a:r>
+          </a:p>
+          <a:p>
+            <a:pPr>
+              <a:buFont typeface="Wingdings" panose="05000000000000000000" pitchFamily="2" charset="2"/>
+              <a:buChar char="Ø"/>
+            </a:pPr>
+            <a:r>
+              <a:rPr lang="en-US" dirty="0" smtClean="0">
+                <a:solidFill>
+                  <a:schemeClr val="tx1">
+                    <a:lumMod val="65000"/>
+                    <a:lumOff val="35000"/>
+                  </a:schemeClr>
+                </a:solidFill>
+              </a:rPr>
+              <a:t> </a:t>
+            </a:r>
+            <a:r>
+              <a:rPr dirty="0" err="1" smtClean="0">
+                <a:solidFill>
+                  <a:schemeClr val="tx1">
+                    <a:lumMod val="65000"/>
+                    <a:lumOff val="35000"/>
+                  </a:schemeClr>
+                </a:solidFill>
+              </a:rPr>
               <a:t>Difficultés</a:t>
             </a:r>
             <a:r>
-              <a:rPr dirty="0"/>
+              <a:rPr dirty="0" smtClean="0">
+                <a:solidFill>
+                  <a:schemeClr val="tx1">
+                    <a:lumMod val="65000"/>
+                    <a:lumOff val="35000"/>
+                  </a:schemeClr>
+                </a:solidFill>
+              </a:rPr>
               <a:t> </a:t>
             </a:r>
             <a:r>
-              <a:rPr dirty="0" err="1"/>
+              <a:rPr dirty="0" err="1">
+                <a:solidFill>
+                  <a:schemeClr val="tx1">
+                    <a:lumMod val="65000"/>
+                    <a:lumOff val="35000"/>
+                  </a:schemeClr>
+                </a:solidFill>
+              </a:rPr>
               <a:t>rencontrées</a:t>
             </a:r>
-            <a:endParaRPr dirty="0"/>
-          </a:p>
-          <a:p>
-            <a:r>
-              <a:rPr dirty="0" err="1"/>
+            <a:endParaRPr dirty="0">
+              <a:solidFill>
+                <a:schemeClr val="tx1">
+                  <a:lumMod val="65000"/>
+                  <a:lumOff val="35000"/>
+                </a:schemeClr>
+              </a:solidFill>
+            </a:endParaRPr>
+          </a:p>
+          <a:p>
+            <a:pPr>
+              <a:buFont typeface="Wingdings" panose="05000000000000000000" pitchFamily="2" charset="2"/>
+              <a:buChar char="Ø"/>
+            </a:pPr>
+            <a:r>
+              <a:rPr lang="en-US" dirty="0" smtClean="0">
+                <a:solidFill>
+                  <a:schemeClr val="tx1">
+                    <a:lumMod val="65000"/>
+                    <a:lumOff val="35000"/>
+                  </a:schemeClr>
+                </a:solidFill>
+              </a:rPr>
+              <a:t> </a:t>
+            </a:r>
+            <a:r>
+              <a:rPr dirty="0" err="1" smtClean="0">
+                <a:solidFill>
+                  <a:schemeClr val="tx1">
+                    <a:lumMod val="65000"/>
+                    <a:lumOff val="35000"/>
+                  </a:schemeClr>
+                </a:solidFill>
+              </a:rPr>
               <a:t>Ressources</a:t>
             </a:r>
             <a:r>
-              <a:rPr dirty="0"/>
+              <a:rPr dirty="0" smtClean="0">
+                <a:solidFill>
+                  <a:schemeClr val="tx1">
+                    <a:lumMod val="65000"/>
+                    <a:lumOff val="35000"/>
+                  </a:schemeClr>
+                </a:solidFill>
+              </a:rPr>
               <a:t> </a:t>
             </a:r>
             <a:r>
-              <a:rPr dirty="0" err="1"/>
+              <a:rPr dirty="0" err="1">
+                <a:solidFill>
+                  <a:schemeClr val="tx1">
+                    <a:lumMod val="65000"/>
+                    <a:lumOff val="35000"/>
+                  </a:schemeClr>
+                </a:solidFill>
+              </a:rPr>
               <a:t>utilisées</a:t>
             </a:r>
-            <a:endParaRPr dirty="0"/>
-          </a:p>
-          <a:p>
-            <a:r>
-              <a:rPr dirty="0"/>
+            <a:endParaRPr dirty="0">
+              <a:solidFill>
+                <a:schemeClr val="tx1">
+                  <a:lumMod val="65000"/>
+                  <a:lumOff val="35000"/>
+                </a:schemeClr>
+              </a:solidFill>
+            </a:endParaRPr>
+          </a:p>
+          <a:p>
+            <a:pPr>
+              <a:buFont typeface="Wingdings" panose="05000000000000000000" pitchFamily="2" charset="2"/>
+              <a:buChar char="Ø"/>
+            </a:pPr>
+            <a:r>
+              <a:rPr lang="en-US" dirty="0" smtClean="0">
+                <a:solidFill>
+                  <a:schemeClr val="tx1">
+                    <a:lumMod val="65000"/>
+                    <a:lumOff val="35000"/>
+                  </a:schemeClr>
+                </a:solidFill>
+              </a:rPr>
+              <a:t> </a:t>
+            </a:r>
+            <a:r>
+              <a:rPr dirty="0" smtClean="0">
+                <a:solidFill>
+                  <a:schemeClr val="tx1">
+                    <a:lumMod val="65000"/>
+                    <a:lumOff val="35000"/>
+                  </a:schemeClr>
+                </a:solidFill>
+              </a:rPr>
               <a:t>Conclusion</a:t>
             </a:r>
+            <a:endParaRPr dirty="0">
+              <a:solidFill>
+                <a:schemeClr val="tx1">
+                  <a:lumMod val="65000"/>
+                  <a:lumOff val="35000"/>
+                </a:schemeClr>
+              </a:solidFill>
+            </a:endParaRPr>
           </a:p>
         </p:txBody>
       </p:sp>
@@ -4754,6 +6989,9 @@
   <p:clrMapOvr>
     <a:masterClrMapping/>
   </p:clrMapOvr>
+  <p:transition spd="slow">
+    <p:wipe/>
+  </p:transition>
   <p:timing>
     <p:tnLst>
       <p:par>
@@ -4791,14 +7029,55 @@
             <p:ph type="title"/>
           </p:nvPr>
         </p:nvSpPr>
-        <p:spPr/>
+        <p:spPr>
+          <a:xfrm>
+            <a:off x="88900" y="230981"/>
+            <a:ext cx="5143500" cy="681038"/>
+          </a:xfrm>
+        </p:spPr>
         <p:txBody>
-          <a:bodyPr/>
+          <a:bodyPr>
+            <a:normAutofit fontScale="90000"/>
+          </a:bodyPr>
           <a:lstStyle/>
           <a:p>
             <a:r>
-              <a:t>Présentation du projet</a:t>
-            </a:r>
+              <a:rPr b="1" dirty="0" err="1">
+                <a:solidFill>
+                  <a:schemeClr val="tx2">
+                    <a:lumMod val="75000"/>
+                  </a:schemeClr>
+                </a:solidFill>
+              </a:rPr>
+              <a:t>Présentation</a:t>
+            </a:r>
+            <a:r>
+              <a:rPr b="1" dirty="0">
+                <a:solidFill>
+                  <a:schemeClr val="tx2">
+                    <a:lumMod val="75000"/>
+                  </a:schemeClr>
+                </a:solidFill>
+              </a:rPr>
+              <a:t> du </a:t>
+            </a:r>
+            <a:r>
+              <a:rPr b="1" dirty="0" err="1">
+                <a:solidFill>
+                  <a:schemeClr val="tx2">
+                    <a:lumMod val="75000"/>
+                  </a:schemeClr>
+                </a:solidFill>
+              </a:rPr>
+              <a:t>projet</a:t>
+            </a:r>
+            <a:endParaRPr b="1" dirty="0">
+              <a:solidFill>
+                <a:schemeClr val="tx2">
+                  <a:lumMod val="75000"/>
+                </a:schemeClr>
+              </a:solidFill>
+            </a:endParaRPr>
           </a:p>
         </p:txBody>
       </p:sp>
@@ -4812,24 +7091,510 @@
             <p:ph idx="1"/>
           </p:nvPr>
         </p:nvSpPr>
-        <p:spPr/>
+        <p:spPr>
+          <a:xfrm>
+            <a:off x="4800600" y="3810001"/>
+            <a:ext cx="4191000" cy="2679699"/>
+          </a:xfrm>
+          <a:solidFill>
+            <a:srgbClr val="EDF2F9"/>
+          </a:solidFill>
+          <a:effectLst>
+            <a:softEdge rad="63500"/>
+          </a:effectLst>
+        </p:spPr>
         <p:txBody>
-          <a:bodyPr/>
+          <a:bodyPr>
+            <a:normAutofit/>
+          </a:bodyPr>
           <a:lstStyle/>
           <a:p>
-            <a:r>
-              <a:t>Projet académique visant à démontrer la maîtrise du HTML, CSS, JavaScript, Bootstrap et GitHub.</a:t>
-            </a:r>
-          </a:p>
-          <a:p>
-            <a:r>
-              <a:t>Objectif : créer une plateforme moderne reliant freelances africains et entreprises.</a:t>
-            </a:r>
-          </a:p>
-          <a:p>
-            <a:r>
-              <a:t>Public cible : freelances tech, startups et entreprises digitales.</a:t>
-            </a:r>
+            <a:pPr marL="0" indent="0">
+              <a:buNone/>
+            </a:pPr>
+            <a:r>
+              <a:rPr lang="fr-FR" b="1" dirty="0">
+                <a:solidFill>
+                  <a:schemeClr val="tx2">
+                    <a:lumMod val="75000"/>
+                  </a:schemeClr>
+                </a:solidFill>
+              </a:rPr>
+              <a:t>Public cible</a:t>
+            </a:r>
+          </a:p>
+          <a:p>
+            <a:pPr marL="0" indent="0">
+              <a:buNone/>
+            </a:pPr>
+            <a:r>
+              <a:rPr lang="fr-FR" dirty="0">
+                <a:solidFill>
+                  <a:schemeClr val="tx1">
+                    <a:lumMod val="75000"/>
+                    <a:lumOff val="25000"/>
+                  </a:schemeClr>
+                </a:solidFill>
+              </a:rPr>
+              <a:t>Freelances </a:t>
+            </a:r>
+            <a:r>
+              <a:rPr lang="fr-FR" dirty="0" err="1">
+                <a:solidFill>
+                  <a:schemeClr val="tx1">
+                    <a:lumMod val="75000"/>
+                    <a:lumOff val="25000"/>
+                  </a:schemeClr>
+                </a:solidFill>
+              </a:rPr>
+              <a:t>tech</a:t>
+            </a:r>
+            <a:r>
+              <a:rPr lang="fr-FR" dirty="0">
+                <a:solidFill>
+                  <a:schemeClr val="tx1">
+                    <a:lumMod val="75000"/>
+                    <a:lumOff val="25000"/>
+                  </a:schemeClr>
+                </a:solidFill>
+              </a:rPr>
+              <a:t>, startups et entreprises digitales.</a:t>
+            </a:r>
+          </a:p>
+        </p:txBody>
+      </p:sp>
+      <p:sp>
+        <p:nvSpPr>
+          <p:cNvPr id="4" name="Content Placeholder 2"/>
+          <p:cNvSpPr txBox="1">
+            <a:spLocks/>
+          </p:cNvSpPr>
+          <p:nvPr/>
+        </p:nvSpPr>
+        <p:spPr>
+          <a:xfrm>
+            <a:off x="190500" y="3810002"/>
+            <a:ext cx="4381500" cy="2679700"/>
+          </a:xfrm>
+          <a:prstGeom prst="rect">
+            <a:avLst/>
+          </a:prstGeom>
+          <a:solidFill>
+            <a:srgbClr val="EDF2F9"/>
+          </a:solidFill>
+          <a:effectLst>
+            <a:softEdge rad="63500"/>
+          </a:effectLst>
+        </p:spPr>
+        <p:txBody>
+          <a:bodyPr vert="horz" lIns="91440" tIns="45720" rIns="91440" bIns="45720" rtlCol="0">
+            <a:normAutofit/>
+          </a:bodyPr>
+          <a:lstStyle>
+            <a:lvl1pPr marL="342900" indent="-342900" algn="l" defTabSz="457200" rtl="0" eaLnBrk="1" latinLnBrk="0" hangingPunct="1">
+              <a:spcBef>
+                <a:spcPct val="20000"/>
+              </a:spcBef>
+              <a:buFont typeface="Arial"/>
+              <a:buChar char="•"/>
+              <a:defRPr sz="3200" kern="1200">
+                <a:solidFill>
+                  <a:schemeClr val="tx1"/>
+                </a:solidFill>
+                <a:latin typeface="+mn-lt"/>
+                <a:ea typeface="+mn-ea"/>
+                <a:cs typeface="+mn-cs"/>
+              </a:defRPr>
+            </a:lvl1pPr>
+            <a:lvl2pPr marL="742950" indent="-285750" algn="l" defTabSz="457200" rtl="0" eaLnBrk="1" latinLnBrk="0" hangingPunct="1">
+              <a:spcBef>
+                <a:spcPct val="20000"/>
+              </a:spcBef>
+              <a:buFont typeface="Arial"/>
+              <a:buChar char="–"/>
+              <a:defRPr sz="2800" kern="1200">
+                <a:solidFill>
+                  <a:schemeClr val="tx1"/>
+                </a:solidFill>
+                <a:latin typeface="+mn-lt"/>
+                <a:ea typeface="+mn-ea"/>
+                <a:cs typeface="+mn-cs"/>
+              </a:defRPr>
+            </a:lvl2pPr>
+            <a:lvl3pPr marL="1143000" indent="-228600" algn="l" defTabSz="457200" rtl="0" eaLnBrk="1" latinLnBrk="0" hangingPunct="1">
+              <a:spcBef>
+                <a:spcPct val="20000"/>
+              </a:spcBef>
+              <a:buFont typeface="Arial"/>
+              <a:buChar char="•"/>
+              <a:defRPr sz="2400" kern="1200">
+                <a:solidFill>
+                  <a:schemeClr val="tx1"/>
+                </a:solidFill>
+                <a:latin typeface="+mn-lt"/>
+                <a:ea typeface="+mn-ea"/>
+                <a:cs typeface="+mn-cs"/>
+              </a:defRPr>
+            </a:lvl3pPr>
+            <a:lvl4pPr marL="1600200" indent="-228600" algn="l" defTabSz="457200" rtl="0" eaLnBrk="1" latinLnBrk="0" hangingPunct="1">
+              <a:spcBef>
+                <a:spcPct val="20000"/>
+              </a:spcBef>
+              <a:buFont typeface="Arial"/>
+              <a:buChar char="–"/>
+              <a:defRPr sz="2000" kern="1200">
+                <a:solidFill>
+                  <a:schemeClr val="tx1"/>
+                </a:solidFill>
+                <a:latin typeface="+mn-lt"/>
+                <a:ea typeface="+mn-ea"/>
+                <a:cs typeface="+mn-cs"/>
+              </a:defRPr>
+            </a:lvl4pPr>
+            <a:lvl5pPr marL="2057400" indent="-228600" algn="l" defTabSz="457200" rtl="0" eaLnBrk="1" latinLnBrk="0" hangingPunct="1">
+              <a:spcBef>
+                <a:spcPct val="20000"/>
+              </a:spcBef>
+              <a:buFont typeface="Arial"/>
+              <a:buChar char="»"/>
+              <a:defRPr sz="2000" kern="1200">
+                <a:solidFill>
+                  <a:schemeClr val="tx1"/>
+                </a:solidFill>
+                <a:latin typeface="+mn-lt"/>
+                <a:ea typeface="+mn-ea"/>
+                <a:cs typeface="+mn-cs"/>
+              </a:defRPr>
+            </a:lvl5pPr>
+            <a:lvl6pPr marL="2514600" indent="-228600" algn="l" defTabSz="457200" rtl="0" eaLnBrk="1" latinLnBrk="0" hangingPunct="1">
+              <a:spcBef>
+                <a:spcPct val="20000"/>
+              </a:spcBef>
+              <a:buFont typeface="Arial"/>
+              <a:buChar char="•"/>
+              <a:defRPr sz="2000" kern="1200">
+                <a:solidFill>
+                  <a:schemeClr val="tx1"/>
+                </a:solidFill>
+                <a:latin typeface="+mn-lt"/>
+                <a:ea typeface="+mn-ea"/>
+                <a:cs typeface="+mn-cs"/>
+              </a:defRPr>
+            </a:lvl6pPr>
+            <a:lvl7pPr marL="2971800" indent="-228600" algn="l" defTabSz="457200" rtl="0" eaLnBrk="1" latinLnBrk="0" hangingPunct="1">
+              <a:spcBef>
+                <a:spcPct val="20000"/>
+              </a:spcBef>
+              <a:buFont typeface="Arial"/>
+              <a:buChar char="•"/>
+              <a:defRPr sz="2000" kern="1200">
+                <a:solidFill>
+                  <a:schemeClr val="tx1"/>
+                </a:solidFill>
+                <a:latin typeface="+mn-lt"/>
+                <a:ea typeface="+mn-ea"/>
+                <a:cs typeface="+mn-cs"/>
+              </a:defRPr>
+            </a:lvl7pPr>
+            <a:lvl8pPr marL="3429000" indent="-228600" algn="l" defTabSz="457200" rtl="0" eaLnBrk="1" latinLnBrk="0" hangingPunct="1">
+              <a:spcBef>
+                <a:spcPct val="20000"/>
+              </a:spcBef>
+              <a:buFont typeface="Arial"/>
+              <a:buChar char="•"/>
+              <a:defRPr sz="2000" kern="1200">
+                <a:solidFill>
+                  <a:schemeClr val="tx1"/>
+                </a:solidFill>
+                <a:latin typeface="+mn-lt"/>
+                <a:ea typeface="+mn-ea"/>
+                <a:cs typeface="+mn-cs"/>
+              </a:defRPr>
+            </a:lvl8pPr>
+            <a:lvl9pPr marL="3886200" indent="-228600" algn="l" defTabSz="457200" rtl="0" eaLnBrk="1" latinLnBrk="0" hangingPunct="1">
+              <a:spcBef>
+                <a:spcPct val="20000"/>
+              </a:spcBef>
+              <a:buFont typeface="Arial"/>
+              <a:buChar char="•"/>
+              <a:defRPr sz="2000" kern="1200">
+                <a:solidFill>
+                  <a:schemeClr val="tx1"/>
+                </a:solidFill>
+                <a:latin typeface="+mn-lt"/>
+                <a:ea typeface="+mn-ea"/>
+                <a:cs typeface="+mn-cs"/>
+              </a:defRPr>
+            </a:lvl9pPr>
+          </a:lstStyle>
+          <a:p>
+            <a:pPr marL="0" indent="0">
+              <a:buNone/>
+            </a:pPr>
+            <a:r>
+              <a:rPr lang="fr-FR" b="1" dirty="0">
+                <a:solidFill>
+                  <a:schemeClr val="tx2">
+                    <a:lumMod val="75000"/>
+                  </a:schemeClr>
+                </a:solidFill>
+              </a:rPr>
+              <a:t>Objectif</a:t>
+            </a:r>
+          </a:p>
+          <a:p>
+            <a:pPr marL="0" indent="0">
+              <a:buNone/>
+            </a:pPr>
+            <a:r>
+              <a:rPr lang="fr-FR" dirty="0" smtClean="0">
+                <a:solidFill>
+                  <a:schemeClr val="tx1">
+                    <a:lumMod val="75000"/>
+                    <a:lumOff val="25000"/>
+                  </a:schemeClr>
+                </a:solidFill>
+              </a:rPr>
+              <a:t>Création </a:t>
+            </a:r>
+            <a:r>
+              <a:rPr lang="fr-FR" dirty="0">
+                <a:solidFill>
+                  <a:schemeClr val="tx1">
+                    <a:lumMod val="75000"/>
+                    <a:lumOff val="25000"/>
+                  </a:schemeClr>
+                </a:solidFill>
+              </a:rPr>
+              <a:t>d'une plateforme moderne reliant freelances africains et entreprises.</a:t>
+            </a:r>
+          </a:p>
+        </p:txBody>
+      </p:sp>
+      <p:sp>
+        <p:nvSpPr>
+          <p:cNvPr id="5" name="Content Placeholder 2"/>
+          <p:cNvSpPr txBox="1">
+            <a:spLocks/>
+          </p:cNvSpPr>
+          <p:nvPr/>
+        </p:nvSpPr>
+        <p:spPr>
+          <a:xfrm>
+            <a:off x="2514600" y="1104903"/>
+            <a:ext cx="4381500" cy="2679700"/>
+          </a:xfrm>
+          <a:prstGeom prst="rect">
+            <a:avLst/>
+          </a:prstGeom>
+          <a:solidFill>
+            <a:srgbClr val="EDF2F9"/>
+          </a:solidFill>
+          <a:effectLst>
+            <a:softEdge rad="63500"/>
+          </a:effectLst>
+        </p:spPr>
+        <p:txBody>
+          <a:bodyPr vert="horz" lIns="91440" tIns="45720" rIns="91440" bIns="45720" rtlCol="0">
+            <a:normAutofit fontScale="92500"/>
+          </a:bodyPr>
+          <a:lstStyle>
+            <a:lvl1pPr marL="342900" indent="-342900" algn="l" defTabSz="457200" rtl="0" eaLnBrk="1" latinLnBrk="0" hangingPunct="1">
+              <a:spcBef>
+                <a:spcPct val="20000"/>
+              </a:spcBef>
+              <a:buFont typeface="Arial"/>
+              <a:buChar char="•"/>
+              <a:defRPr sz="3200" kern="1200">
+                <a:solidFill>
+                  <a:schemeClr val="tx1"/>
+                </a:solidFill>
+                <a:latin typeface="+mn-lt"/>
+                <a:ea typeface="+mn-ea"/>
+                <a:cs typeface="+mn-cs"/>
+              </a:defRPr>
+            </a:lvl1pPr>
+            <a:lvl2pPr marL="742950" indent="-285750" algn="l" defTabSz="457200" rtl="0" eaLnBrk="1" latinLnBrk="0" hangingPunct="1">
+              <a:spcBef>
+                <a:spcPct val="20000"/>
+              </a:spcBef>
+              <a:buFont typeface="Arial"/>
+              <a:buChar char="–"/>
+              <a:defRPr sz="2800" kern="1200">
+                <a:solidFill>
+                  <a:schemeClr val="tx1"/>
+                </a:solidFill>
+                <a:latin typeface="+mn-lt"/>
+                <a:ea typeface="+mn-ea"/>
+                <a:cs typeface="+mn-cs"/>
+              </a:defRPr>
+            </a:lvl2pPr>
+            <a:lvl3pPr marL="1143000" indent="-228600" algn="l" defTabSz="457200" rtl="0" eaLnBrk="1" latinLnBrk="0" hangingPunct="1">
+              <a:spcBef>
+                <a:spcPct val="20000"/>
+              </a:spcBef>
+              <a:buFont typeface="Arial"/>
+              <a:buChar char="•"/>
+              <a:defRPr sz="2400" kern="1200">
+                <a:solidFill>
+                  <a:schemeClr val="tx1"/>
+                </a:solidFill>
+                <a:latin typeface="+mn-lt"/>
+                <a:ea typeface="+mn-ea"/>
+                <a:cs typeface="+mn-cs"/>
+              </a:defRPr>
+            </a:lvl3pPr>
+            <a:lvl4pPr marL="1600200" indent="-228600" algn="l" defTabSz="457200" rtl="0" eaLnBrk="1" latinLnBrk="0" hangingPunct="1">
+              <a:spcBef>
+                <a:spcPct val="20000"/>
+              </a:spcBef>
+              <a:buFont typeface="Arial"/>
+              <a:buChar char="–"/>
+              <a:defRPr sz="2000" kern="1200">
+                <a:solidFill>
+                  <a:schemeClr val="tx1"/>
+                </a:solidFill>
+                <a:latin typeface="+mn-lt"/>
+                <a:ea typeface="+mn-ea"/>
+                <a:cs typeface="+mn-cs"/>
+              </a:defRPr>
+            </a:lvl4pPr>
+            <a:lvl5pPr marL="2057400" indent="-228600" algn="l" defTabSz="457200" rtl="0" eaLnBrk="1" latinLnBrk="0" hangingPunct="1">
+              <a:spcBef>
+                <a:spcPct val="20000"/>
+              </a:spcBef>
+              <a:buFont typeface="Arial"/>
+              <a:buChar char="»"/>
+              <a:defRPr sz="2000" kern="1200">
+                <a:solidFill>
+                  <a:schemeClr val="tx1"/>
+                </a:solidFill>
+                <a:latin typeface="+mn-lt"/>
+                <a:ea typeface="+mn-ea"/>
+                <a:cs typeface="+mn-cs"/>
+              </a:defRPr>
+            </a:lvl5pPr>
+            <a:lvl6pPr marL="2514600" indent="-228600" algn="l" defTabSz="457200" rtl="0" eaLnBrk="1" latinLnBrk="0" hangingPunct="1">
+              <a:spcBef>
+                <a:spcPct val="20000"/>
+              </a:spcBef>
+              <a:buFont typeface="Arial"/>
+              <a:buChar char="•"/>
+              <a:defRPr sz="2000" kern="1200">
+                <a:solidFill>
+                  <a:schemeClr val="tx1"/>
+                </a:solidFill>
+                <a:latin typeface="+mn-lt"/>
+                <a:ea typeface="+mn-ea"/>
+                <a:cs typeface="+mn-cs"/>
+              </a:defRPr>
+            </a:lvl6pPr>
+            <a:lvl7pPr marL="2971800" indent="-228600" algn="l" defTabSz="457200" rtl="0" eaLnBrk="1" latinLnBrk="0" hangingPunct="1">
+              <a:spcBef>
+                <a:spcPct val="20000"/>
+              </a:spcBef>
+              <a:buFont typeface="Arial"/>
+              <a:buChar char="•"/>
+              <a:defRPr sz="2000" kern="1200">
+                <a:solidFill>
+                  <a:schemeClr val="tx1"/>
+                </a:solidFill>
+                <a:latin typeface="+mn-lt"/>
+                <a:ea typeface="+mn-ea"/>
+                <a:cs typeface="+mn-cs"/>
+              </a:defRPr>
+            </a:lvl7pPr>
+            <a:lvl8pPr marL="3429000" indent="-228600" algn="l" defTabSz="457200" rtl="0" eaLnBrk="1" latinLnBrk="0" hangingPunct="1">
+              <a:spcBef>
+                <a:spcPct val="20000"/>
+              </a:spcBef>
+              <a:buFont typeface="Arial"/>
+              <a:buChar char="•"/>
+              <a:defRPr sz="2000" kern="1200">
+                <a:solidFill>
+                  <a:schemeClr val="tx1"/>
+                </a:solidFill>
+                <a:latin typeface="+mn-lt"/>
+                <a:ea typeface="+mn-ea"/>
+                <a:cs typeface="+mn-cs"/>
+              </a:defRPr>
+            </a:lvl8pPr>
+            <a:lvl9pPr marL="3886200" indent="-228600" algn="l" defTabSz="457200" rtl="0" eaLnBrk="1" latinLnBrk="0" hangingPunct="1">
+              <a:spcBef>
+                <a:spcPct val="20000"/>
+              </a:spcBef>
+              <a:buFont typeface="Arial"/>
+              <a:buChar char="•"/>
+              <a:defRPr sz="2000" kern="1200">
+                <a:solidFill>
+                  <a:schemeClr val="tx1"/>
+                </a:solidFill>
+                <a:latin typeface="+mn-lt"/>
+                <a:ea typeface="+mn-ea"/>
+                <a:cs typeface="+mn-cs"/>
+              </a:defRPr>
+            </a:lvl9pPr>
+          </a:lstStyle>
+          <a:p>
+            <a:pPr marL="0" indent="0">
+              <a:buNone/>
+            </a:pPr>
+            <a:r>
+              <a:rPr lang="fr-FR" sz="3500" b="1" dirty="0" smtClean="0">
+                <a:solidFill>
+                  <a:schemeClr val="tx2">
+                    <a:lumMod val="75000"/>
+                  </a:schemeClr>
+                </a:solidFill>
+              </a:rPr>
+              <a:t>Contexte</a:t>
+            </a:r>
+          </a:p>
+          <a:p>
+            <a:pPr marL="0" indent="0">
+              <a:buNone/>
+            </a:pPr>
+            <a:r>
+              <a:rPr lang="fr-FR" dirty="0" smtClean="0">
+                <a:solidFill>
+                  <a:schemeClr val="tx1">
+                    <a:lumMod val="75000"/>
+                    <a:lumOff val="25000"/>
+                  </a:schemeClr>
+                </a:solidFill>
+              </a:rPr>
+              <a:t>Projet </a:t>
+            </a:r>
+            <a:r>
+              <a:rPr lang="fr-FR" dirty="0">
+                <a:solidFill>
+                  <a:schemeClr val="tx1">
+                    <a:lumMod val="75000"/>
+                    <a:lumOff val="25000"/>
+                  </a:schemeClr>
+                </a:solidFill>
+              </a:rPr>
+              <a:t>académique visant à démontrer la maîtrise du HTML, CSS, JavaScript, Bootstrap et </a:t>
+            </a:r>
+            <a:r>
+              <a:rPr lang="fr-FR" dirty="0" smtClean="0">
+                <a:solidFill>
+                  <a:schemeClr val="tx1">
+                    <a:lumMod val="75000"/>
+                    <a:lumOff val="25000"/>
+                  </a:schemeClr>
+                </a:solidFill>
+              </a:rPr>
+              <a:t>GitHub.</a:t>
+            </a:r>
+            <a:endParaRPr lang="fr-FR" dirty="0">
+              <a:solidFill>
+                <a:schemeClr val="tx1">
+                  <a:lumMod val="75000"/>
+                  <a:lumOff val="25000"/>
+                </a:schemeClr>
+              </a:solidFill>
+            </a:endParaRPr>
           </a:p>
         </p:txBody>
       </p:sp>
@@ -4838,6 +7603,9 @@
   <p:clrMapOvr>
     <a:masterClrMapping/>
   </p:clrMapOvr>
+  <p:transition spd="slow">
+    <p:wipe/>
+  </p:transition>
   <p:timing>
     <p:tnLst>
       <p:par>
@@ -4875,14 +7643,65 @@
             <p:ph type="title"/>
           </p:nvPr>
         </p:nvSpPr>
-        <p:spPr/>
+        <p:spPr>
+          <a:xfrm>
+            <a:off x="1143000" y="615954"/>
+            <a:ext cx="5829300" cy="615954"/>
+          </a:xfrm>
+        </p:spPr>
         <p:txBody>
-          <a:bodyPr/>
+          <a:bodyPr>
+            <a:normAutofit fontScale="90000"/>
+          </a:bodyPr>
           <a:lstStyle/>
           <a:p>
             <a:r>
-              <a:t>Palette &amp; identité visuelle</a:t>
-            </a:r>
+              <a:rPr b="1" dirty="0">
+                <a:solidFill>
+                  <a:schemeClr val="tx2">
+                    <a:lumMod val="75000"/>
+                  </a:schemeClr>
+                </a:solidFill>
+              </a:rPr>
+              <a:t>Palette &amp; </a:t>
+            </a:r>
+            <a:r>
+              <a:rPr b="1" dirty="0" err="1">
+                <a:solidFill>
+                  <a:schemeClr val="tx2">
+                    <a:lumMod val="75000"/>
+                  </a:schemeClr>
+                </a:solidFill>
+              </a:rPr>
+              <a:t>identité</a:t>
+            </a:r>
+            <a:r>
+              <a:rPr b="1" dirty="0">
+                <a:solidFill>
+                  <a:schemeClr val="tx2">
+                    <a:lumMod val="75000"/>
+                  </a:schemeClr>
+                </a:solidFill>
+              </a:rPr>
+              <a:t> </a:t>
+            </a:r>
+            <a:r>
+              <a:rPr b="1" dirty="0" err="1">
+                <a:solidFill>
+                  <a:schemeClr val="tx2">
+                    <a:lumMod val="75000"/>
+                  </a:schemeClr>
+                </a:solidFill>
+              </a:rPr>
+              <a:t>visuelle</a:t>
+            </a:r>
+            <a:endParaRPr b="1" dirty="0">
+              <a:solidFill>
+                <a:schemeClr val="tx2">
+                  <a:lumMod val="75000"/>
+                </a:schemeClr>
+              </a:solidFill>
+            </a:endParaRPr>
           </a:p>
         </p:txBody>
       </p:sp>
@@ -4896,92 +7715,374 @@
             <p:ph idx="1"/>
           </p:nvPr>
         </p:nvSpPr>
-        <p:spPr/>
+        <p:spPr>
+          <a:xfrm>
+            <a:off x="4673600" y="1608139"/>
+            <a:ext cx="4343400" cy="2895600"/>
+          </a:xfrm>
+          <a:solidFill>
+            <a:srgbClr val="EDF2F9"/>
+          </a:solidFill>
+          <a:effectLst>
+            <a:softEdge rad="63500"/>
+          </a:effectLst>
+        </p:spPr>
         <p:txBody>
           <a:bodyPr>
-            <a:normAutofit fontScale="85000" lnSpcReduction="20000"/>
+            <a:normAutofit fontScale="70000" lnSpcReduction="20000"/>
           </a:bodyPr>
           <a:lstStyle/>
           <a:p>
-            <a:r>
-              <a:rPr dirty="0"/>
-              <a:t>Bleu </a:t>
-            </a:r>
-            <a:r>
-              <a:rPr dirty="0" err="1"/>
-              <a:t>nuit</a:t>
-            </a:r>
-            <a:r>
-              <a:rPr dirty="0"/>
-              <a:t> : #002244</a:t>
-            </a:r>
-          </a:p>
-          <a:p>
-            <a:r>
-              <a:rPr dirty="0"/>
-              <a:t>Bleu </a:t>
-            </a:r>
-            <a:r>
-              <a:rPr dirty="0" err="1"/>
-              <a:t>clair</a:t>
-            </a:r>
-            <a:r>
-              <a:rPr dirty="0"/>
-              <a:t> : #06b6d4</a:t>
-            </a:r>
-          </a:p>
-          <a:p>
-            <a:r>
-              <a:rPr dirty="0"/>
-              <a:t>Fond </a:t>
-            </a:r>
-            <a:r>
-              <a:rPr dirty="0" err="1"/>
-              <a:t>clair</a:t>
-            </a:r>
-            <a:r>
-              <a:rPr dirty="0"/>
-              <a:t> : #f8fafc</a:t>
-            </a:r>
-          </a:p>
-          <a:p>
-            <a:r>
-              <a:rPr dirty="0"/>
-              <a:t>Fond </a:t>
-            </a:r>
-            <a:r>
-              <a:rPr dirty="0" err="1"/>
-              <a:t>sombre</a:t>
-            </a:r>
-            <a:r>
-              <a:rPr dirty="0"/>
-              <a:t> : #020617</a:t>
-            </a:r>
-          </a:p>
-          <a:p>
-            <a:r>
-              <a:rPr lang="fr-FR" dirty="0"/>
+            <a:pPr marL="0" indent="0">
+              <a:buNone/>
+            </a:pPr>
+            <a:r>
+              <a:rPr lang="fr-FR" dirty="0">
+                <a:solidFill>
+                  <a:schemeClr val="tx1">
+                    <a:lumMod val="75000"/>
+                    <a:lumOff val="25000"/>
+                  </a:schemeClr>
+                </a:solidFill>
+              </a:rPr>
               <a:t>J’ai choisi une palette basée sur des tons de bleu afin de transmettre une image professionnelle, moderne et technologique.</a:t>
             </a:r>
             <a:br>
-              <a:rPr lang="fr-FR" dirty="0"/>
+              <a:rPr lang="fr-FR" dirty="0">
+                <a:solidFill>
+                  <a:schemeClr val="tx1">
+                    <a:lumMod val="75000"/>
+                    <a:lumOff val="25000"/>
+                  </a:schemeClr>
+                </a:solidFill>
+              </a:rPr>
             </a:br>
             <a:r>
-              <a:rPr lang="fr-FR" dirty="0"/>
-              <a:t>Le bleu nuit apporte du sérieux et de l’élégance tandis que le bleu clair permet de dynamiser l’interface sans utiliser de couleurs trop agressives.</a:t>
+              <a:rPr lang="fr-FR" dirty="0">
+                <a:solidFill>
+                  <a:schemeClr val="tx1">
+                    <a:lumMod val="75000"/>
+                    <a:lumOff val="25000"/>
+                  </a:schemeClr>
+                </a:solidFill>
+              </a:rPr>
+              <a:t>Le bleu nuit apporte du sérieux et de l’élégance tandis que le bleu clair permet de dynamiser </a:t>
+            </a:r>
+            <a:r>
+              <a:rPr lang="fr-FR" dirty="0" smtClean="0">
+                <a:solidFill>
+                  <a:schemeClr val="tx1">
+                    <a:lumMod val="75000"/>
+                    <a:lumOff val="25000"/>
+                  </a:schemeClr>
+                </a:solidFill>
+              </a:rPr>
+              <a:t>l’interface.</a:t>
+            </a:r>
+            <a:r>
+              <a:rPr lang="fr-FR" dirty="0">
+                <a:solidFill>
+                  <a:schemeClr val="tx1">
+                    <a:lumMod val="75000"/>
+                    <a:lumOff val="25000"/>
+                  </a:schemeClr>
+                </a:solidFill>
+              </a:rPr>
+              <a:t/>
             </a:r>
             <a:br>
-              <a:rPr lang="fr-FR" dirty="0"/>
+              <a:rPr lang="fr-FR" dirty="0">
+                <a:solidFill>
+                  <a:schemeClr val="tx1">
+                    <a:lumMod val="75000"/>
+                    <a:lumOff val="25000"/>
+                  </a:schemeClr>
+                </a:solidFill>
+              </a:rPr>
             </a:br>
             <a:r>
-              <a:rPr lang="fr-FR" dirty="0"/>
-              <a:t>L’objectif était de créer une plateforme sobre, lisible et agréable aussi bien en mode clair qu’en mode </a:t>
-            </a:r>
-            <a:r>
-              <a:rPr lang="fr-FR" dirty="0" smtClean="0"/>
-              <a:t>sombre</a:t>
-            </a:r>
-            <a:endParaRPr dirty="0"/>
+              <a:rPr lang="fr-FR" dirty="0">
+                <a:solidFill>
+                  <a:schemeClr val="tx1">
+                    <a:lumMod val="75000"/>
+                    <a:lumOff val="25000"/>
+                  </a:schemeClr>
+                </a:solidFill>
+              </a:rPr>
+              <a:t>L’objectif était de créer une plateforme sobre, lisible et agréable </a:t>
+            </a:r>
+            <a:r>
+              <a:rPr lang="fr-FR" dirty="0" smtClean="0">
+                <a:solidFill>
+                  <a:schemeClr val="tx1">
+                    <a:lumMod val="75000"/>
+                    <a:lumOff val="25000"/>
+                  </a:schemeClr>
+                </a:solidFill>
+              </a:rPr>
+              <a:t>lors de la visite</a:t>
+            </a:r>
+            <a:endParaRPr lang="fr-FR" dirty="0">
+              <a:solidFill>
+                <a:schemeClr val="tx1">
+                  <a:lumMod val="75000"/>
+                  <a:lumOff val="25000"/>
+                </a:schemeClr>
+              </a:solidFill>
+            </a:endParaRPr>
+          </a:p>
+        </p:txBody>
+      </p:sp>
+      <p:sp>
+        <p:nvSpPr>
+          <p:cNvPr id="4" name="Content Placeholder 2"/>
+          <p:cNvSpPr txBox="1">
+            <a:spLocks/>
+          </p:cNvSpPr>
+          <p:nvPr/>
+        </p:nvSpPr>
+        <p:spPr>
+          <a:xfrm>
+            <a:off x="0" y="1608139"/>
+            <a:ext cx="4343400" cy="2895600"/>
+          </a:xfrm>
+          <a:prstGeom prst="rect">
+            <a:avLst/>
+          </a:prstGeom>
+          <a:solidFill>
+            <a:srgbClr val="EDF2F9"/>
+          </a:solidFill>
+          <a:effectLst>
+            <a:softEdge rad="63500"/>
+          </a:effectLst>
+        </p:spPr>
+        <p:txBody>
+          <a:bodyPr vert="horz" lIns="91440" tIns="45720" rIns="91440" bIns="45720" rtlCol="0">
+            <a:normAutofit lnSpcReduction="10000"/>
+          </a:bodyPr>
+          <a:lstStyle>
+            <a:lvl1pPr marL="342900" indent="-342900" algn="l" defTabSz="457200" rtl="0" eaLnBrk="1" latinLnBrk="0" hangingPunct="1">
+              <a:spcBef>
+                <a:spcPct val="20000"/>
+              </a:spcBef>
+              <a:buFont typeface="Arial"/>
+              <a:buChar char="•"/>
+              <a:defRPr sz="3200" kern="1200">
+                <a:solidFill>
+                  <a:schemeClr val="tx1"/>
+                </a:solidFill>
+                <a:latin typeface="+mn-lt"/>
+                <a:ea typeface="+mn-ea"/>
+                <a:cs typeface="+mn-cs"/>
+              </a:defRPr>
+            </a:lvl1pPr>
+            <a:lvl2pPr marL="742950" indent="-285750" algn="l" defTabSz="457200" rtl="0" eaLnBrk="1" latinLnBrk="0" hangingPunct="1">
+              <a:spcBef>
+                <a:spcPct val="20000"/>
+              </a:spcBef>
+              <a:buFont typeface="Arial"/>
+              <a:buChar char="–"/>
+              <a:defRPr sz="2800" kern="1200">
+                <a:solidFill>
+                  <a:schemeClr val="tx1"/>
+                </a:solidFill>
+                <a:latin typeface="+mn-lt"/>
+                <a:ea typeface="+mn-ea"/>
+                <a:cs typeface="+mn-cs"/>
+              </a:defRPr>
+            </a:lvl2pPr>
+            <a:lvl3pPr marL="1143000" indent="-228600" algn="l" defTabSz="457200" rtl="0" eaLnBrk="1" latinLnBrk="0" hangingPunct="1">
+              <a:spcBef>
+                <a:spcPct val="20000"/>
+              </a:spcBef>
+              <a:buFont typeface="Arial"/>
+              <a:buChar char="•"/>
+              <a:defRPr sz="2400" kern="1200">
+                <a:solidFill>
+                  <a:schemeClr val="tx1"/>
+                </a:solidFill>
+                <a:latin typeface="+mn-lt"/>
+                <a:ea typeface="+mn-ea"/>
+                <a:cs typeface="+mn-cs"/>
+              </a:defRPr>
+            </a:lvl3pPr>
+            <a:lvl4pPr marL="1600200" indent="-228600" algn="l" defTabSz="457200" rtl="0" eaLnBrk="1" latinLnBrk="0" hangingPunct="1">
+              <a:spcBef>
+                <a:spcPct val="20000"/>
+              </a:spcBef>
+              <a:buFont typeface="Arial"/>
+              <a:buChar char="–"/>
+              <a:defRPr sz="2000" kern="1200">
+                <a:solidFill>
+                  <a:schemeClr val="tx1"/>
+                </a:solidFill>
+                <a:latin typeface="+mn-lt"/>
+                <a:ea typeface="+mn-ea"/>
+                <a:cs typeface="+mn-cs"/>
+              </a:defRPr>
+            </a:lvl4pPr>
+            <a:lvl5pPr marL="2057400" indent="-228600" algn="l" defTabSz="457200" rtl="0" eaLnBrk="1" latinLnBrk="0" hangingPunct="1">
+              <a:spcBef>
+                <a:spcPct val="20000"/>
+              </a:spcBef>
+              <a:buFont typeface="Arial"/>
+              <a:buChar char="»"/>
+              <a:defRPr sz="2000" kern="1200">
+                <a:solidFill>
+                  <a:schemeClr val="tx1"/>
+                </a:solidFill>
+                <a:latin typeface="+mn-lt"/>
+                <a:ea typeface="+mn-ea"/>
+                <a:cs typeface="+mn-cs"/>
+              </a:defRPr>
+            </a:lvl5pPr>
+            <a:lvl6pPr marL="2514600" indent="-228600" algn="l" defTabSz="457200" rtl="0" eaLnBrk="1" latinLnBrk="0" hangingPunct="1">
+              <a:spcBef>
+                <a:spcPct val="20000"/>
+              </a:spcBef>
+              <a:buFont typeface="Arial"/>
+              <a:buChar char="•"/>
+              <a:defRPr sz="2000" kern="1200">
+                <a:solidFill>
+                  <a:schemeClr val="tx1"/>
+                </a:solidFill>
+                <a:latin typeface="+mn-lt"/>
+                <a:ea typeface="+mn-ea"/>
+                <a:cs typeface="+mn-cs"/>
+              </a:defRPr>
+            </a:lvl6pPr>
+            <a:lvl7pPr marL="2971800" indent="-228600" algn="l" defTabSz="457200" rtl="0" eaLnBrk="1" latinLnBrk="0" hangingPunct="1">
+              <a:spcBef>
+                <a:spcPct val="20000"/>
+              </a:spcBef>
+              <a:buFont typeface="Arial"/>
+              <a:buChar char="•"/>
+              <a:defRPr sz="2000" kern="1200">
+                <a:solidFill>
+                  <a:schemeClr val="tx1"/>
+                </a:solidFill>
+                <a:latin typeface="+mn-lt"/>
+                <a:ea typeface="+mn-ea"/>
+                <a:cs typeface="+mn-cs"/>
+              </a:defRPr>
+            </a:lvl7pPr>
+            <a:lvl8pPr marL="3429000" indent="-228600" algn="l" defTabSz="457200" rtl="0" eaLnBrk="1" latinLnBrk="0" hangingPunct="1">
+              <a:spcBef>
+                <a:spcPct val="20000"/>
+              </a:spcBef>
+              <a:buFont typeface="Arial"/>
+              <a:buChar char="•"/>
+              <a:defRPr sz="2000" kern="1200">
+                <a:solidFill>
+                  <a:schemeClr val="tx1"/>
+                </a:solidFill>
+                <a:latin typeface="+mn-lt"/>
+                <a:ea typeface="+mn-ea"/>
+                <a:cs typeface="+mn-cs"/>
+              </a:defRPr>
+            </a:lvl8pPr>
+            <a:lvl9pPr marL="3886200" indent="-228600" algn="l" defTabSz="457200" rtl="0" eaLnBrk="1" latinLnBrk="0" hangingPunct="1">
+              <a:spcBef>
+                <a:spcPct val="20000"/>
+              </a:spcBef>
+              <a:buFont typeface="Arial"/>
+              <a:buChar char="•"/>
+              <a:defRPr sz="2000" kern="1200">
+                <a:solidFill>
+                  <a:schemeClr val="tx1"/>
+                </a:solidFill>
+                <a:latin typeface="+mn-lt"/>
+                <a:ea typeface="+mn-ea"/>
+                <a:cs typeface="+mn-cs"/>
+              </a:defRPr>
+            </a:lvl9pPr>
+          </a:lstStyle>
+          <a:p>
+            <a:pPr marL="0" indent="0">
+              <a:buNone/>
+            </a:pPr>
+            <a:r>
+              <a:rPr lang="fr-FR" dirty="0" smtClean="0">
+                <a:solidFill>
+                  <a:schemeClr val="tx2">
+                    <a:lumMod val="75000"/>
+                  </a:schemeClr>
+                </a:solidFill>
+              </a:rPr>
+              <a:t>Palette</a:t>
+            </a:r>
+          </a:p>
+          <a:p>
+            <a:pPr marL="0" indent="0">
+              <a:buNone/>
+            </a:pPr>
+            <a:r>
+              <a:rPr lang="fr-FR" dirty="0" smtClean="0">
+                <a:solidFill>
+                  <a:schemeClr val="tx1">
+                    <a:lumMod val="75000"/>
+                    <a:lumOff val="25000"/>
+                  </a:schemeClr>
+                </a:solidFill>
+              </a:rPr>
+              <a:t>Bleu nuit : #002244</a:t>
+            </a:r>
+          </a:p>
+          <a:p>
+            <a:pPr marL="0" indent="0">
+              <a:buNone/>
+            </a:pPr>
+            <a:r>
+              <a:rPr lang="fr-FR" dirty="0" smtClean="0">
+                <a:solidFill>
+                  <a:schemeClr val="tx1">
+                    <a:lumMod val="75000"/>
+                    <a:lumOff val="25000"/>
+                  </a:schemeClr>
+                </a:solidFill>
+              </a:rPr>
+              <a:t>Bleu clair : #06b6d4</a:t>
+            </a:r>
+          </a:p>
+          <a:p>
+            <a:pPr marL="0" indent="0">
+              <a:buNone/>
+            </a:pPr>
+            <a:r>
+              <a:rPr lang="fr-FR" dirty="0" smtClean="0">
+                <a:solidFill>
+                  <a:schemeClr val="tx1">
+                    <a:lumMod val="75000"/>
+                    <a:lumOff val="25000"/>
+                  </a:schemeClr>
+                </a:solidFill>
+              </a:rPr>
+              <a:t>Fond clair : #f8fafc</a:t>
+            </a:r>
+          </a:p>
+          <a:p>
+            <a:pPr marL="0" indent="0">
+              <a:buNone/>
+            </a:pPr>
+            <a:r>
+              <a:rPr lang="fr-FR" dirty="0" smtClean="0">
+                <a:solidFill>
+                  <a:schemeClr val="tx1">
+                    <a:lumMod val="75000"/>
+                    <a:lumOff val="25000"/>
+                  </a:schemeClr>
+                </a:solidFill>
+              </a:rPr>
+              <a:t>Fond sombre : #020617</a:t>
+            </a:r>
+            <a:endParaRPr lang="fr-FR" dirty="0">
+              <a:solidFill>
+                <a:schemeClr val="tx1">
+                  <a:lumMod val="75000"/>
+                  <a:lumOff val="25000"/>
+                </a:schemeClr>
+              </a:solidFill>
+            </a:endParaRPr>
           </a:p>
         </p:txBody>
       </p:sp>
@@ -4990,6 +8091,9 @@
   <p:clrMapOvr>
     <a:masterClrMapping/>
   </p:clrMapOvr>
+  <p:transition spd="slow">
+    <p:wipe/>
+  </p:transition>
   <p:timing>
     <p:tnLst>
       <p:par>
@@ -5027,13 +8131,31 @@
             <p:ph type="title"/>
           </p:nvPr>
         </p:nvSpPr>
-        <p:spPr/>
+        <p:spPr>
+          <a:xfrm>
+            <a:off x="-673100" y="452438"/>
+            <a:ext cx="8229600" cy="1143000"/>
+          </a:xfrm>
+        </p:spPr>
         <p:txBody>
           <a:bodyPr/>
           <a:lstStyle/>
           <a:p>
             <a:r>
-              <a:t>Typographie &amp; inspirations</a:t>
+              <a:rPr b="1" dirty="0" err="1">
+                <a:solidFill>
+                  <a:srgbClr val="002060"/>
+                </a:solidFill>
+              </a:rPr>
+              <a:t>Typographie</a:t>
+            </a:r>
+            <a:r>
+              <a:rPr b="1" dirty="0">
+                <a:solidFill>
+                  <a:srgbClr val="002060"/>
+                </a:solidFill>
+              </a:rPr>
+              <a:t> &amp; inspirations</a:t>
             </a:r>
           </a:p>
         </p:txBody>
@@ -5048,68 +8170,59 @@
             <p:ph idx="1"/>
           </p:nvPr>
         </p:nvSpPr>
-        <p:spPr/>
+        <p:spPr>
+          <a:xfrm>
+            <a:off x="4838700" y="2197100"/>
+            <a:ext cx="4216400" cy="2544766"/>
+          </a:xfrm>
+          <a:solidFill>
+            <a:srgbClr val="EDF2F9"/>
+          </a:solidFill>
+          <a:effectLst>
+            <a:softEdge rad="63500"/>
+          </a:effectLst>
+        </p:spPr>
         <p:txBody>
           <a:bodyPr>
-            <a:normAutofit fontScale="92500" lnSpcReduction="20000"/>
+            <a:normAutofit/>
           </a:bodyPr>
           <a:lstStyle/>
           <a:p>
-            <a:r>
-              <a:rPr dirty="0"/>
-              <a:t>Police </a:t>
-            </a:r>
-            <a:r>
-              <a:rPr dirty="0" err="1"/>
-              <a:t>titres</a:t>
-            </a:r>
-            <a:r>
-              <a:rPr dirty="0"/>
-              <a:t> : Poppins</a:t>
-            </a:r>
-          </a:p>
-          <a:p>
-            <a:r>
-              <a:rPr dirty="0"/>
-              <a:t>Police </a:t>
-            </a:r>
-            <a:r>
-              <a:rPr dirty="0" err="1"/>
-              <a:t>texte</a:t>
-            </a:r>
-            <a:r>
-              <a:rPr dirty="0"/>
-              <a:t> : </a:t>
-            </a:r>
-            <a:r>
-              <a:rPr dirty="0" smtClean="0"/>
-              <a:t>Inter</a:t>
-            </a:r>
-            <a:endParaRPr lang="en-US" dirty="0" smtClean="0"/>
-          </a:p>
-          <a:p>
-            <a:r>
-              <a:rPr lang="fr-FR" dirty="0"/>
-              <a:t>Inspirations : </a:t>
-            </a:r>
-            <a:r>
-              <a:rPr lang="fr-FR" dirty="0" err="1"/>
-              <a:t>CyberWarGame</a:t>
-            </a:r>
-            <a:r>
-              <a:rPr lang="fr-FR" dirty="0"/>
-              <a:t> et plateformes freelances modernes tells que </a:t>
-            </a:r>
-            <a:r>
-              <a:rPr lang="fr-FR" dirty="0" smtClean="0"/>
-              <a:t>IWORKS</a:t>
-            </a:r>
-            <a:endParaRPr dirty="0"/>
-          </a:p>
-          <a:p>
+            <a:pPr marL="0" indent="0">
+              <a:buNone/>
+            </a:pPr>
+            <a:r>
+              <a:rPr b="1" dirty="0" smtClean="0">
+                <a:solidFill>
+                  <a:schemeClr val="tx2">
+                    <a:lumMod val="75000"/>
+                  </a:schemeClr>
+                </a:solidFill>
+              </a:rPr>
+              <a:t>Police</a:t>
+            </a:r>
+            <a:r>
+              <a:rPr lang="en-US" b="1" dirty="0" smtClean="0">
+                <a:solidFill>
+                  <a:schemeClr val="tx2">
+                    <a:lumMod val="75000"/>
+                  </a:schemeClr>
+                </a:solidFill>
+              </a:rPr>
+              <a:t>s</a:t>
+            </a:r>
+          </a:p>
+          <a:p>
+            <a:pPr marL="0" indent="0">
+              <a:buNone/>
+            </a:pPr>
+            <a:r>
+              <a:rPr lang="en-US" dirty="0" err="1" smtClean="0"/>
+              <a:t>T</a:t>
+            </a:r>
             <a:r>
               <a:rPr dirty="0" err="1" smtClean="0"/>
-              <a:t>Objectif</a:t>
+              <a:t>itres</a:t>
             </a:r>
             <a:r>
               <a:rPr dirty="0" smtClean="0"/>
@@ -5120,57 +8233,337 @@
               <a:t>: </a:t>
             </a:r>
             <a:r>
-              <a:rPr dirty="0" err="1"/>
-              <a:t>lisibilité</a:t>
+              <a:rPr b="1" dirty="0">
+                <a:solidFill>
+                  <a:srgbClr val="002060"/>
+                </a:solidFill>
+              </a:rPr>
+              <a:t>Poppins</a:t>
+            </a:r>
+          </a:p>
+          <a:p>
+            <a:pPr marL="0" indent="0">
+              <a:buNone/>
+            </a:pPr>
+            <a:r>
+              <a:rPr lang="en-US" dirty="0" err="1"/>
+              <a:t>T</a:t>
+            </a:r>
+            <a:r>
+              <a:rPr dirty="0" err="1" smtClean="0"/>
+              <a:t>exte</a:t>
+            </a:r>
+            <a:r>
+              <a:rPr dirty="0" smtClean="0"/>
+              <a:t> </a:t>
             </a:r>
             <a:r>
               <a:rPr dirty="0"/>
-              <a:t> et </a:t>
-            </a:r>
-            <a:r>
-              <a:rPr dirty="0" err="1"/>
-              <a:t>hiérarchie</a:t>
-            </a:r>
-            <a:r>
-              <a:rPr dirty="0"/>
-              <a:t> </a:t>
-            </a:r>
-            <a:r>
-              <a:rPr dirty="0" err="1"/>
-              <a:t>visuelle</a:t>
-            </a:r>
-            <a:r>
-              <a:rPr dirty="0"/>
-              <a:t> </a:t>
-            </a:r>
-            <a:r>
-              <a:rPr dirty="0" err="1"/>
-              <a:t>claire</a:t>
-            </a:r>
-            <a:r>
-              <a:rPr dirty="0" smtClean="0"/>
-              <a:t>.</a:t>
+              <a:t>: </a:t>
+            </a:r>
+            <a:r>
+              <a:rPr b="1" dirty="0" smtClean="0">
+                <a:solidFill>
+                  <a:srgbClr val="002060"/>
+                </a:solidFill>
+              </a:rPr>
+              <a:t>Inter</a:t>
+            </a:r>
+            <a:endParaRPr lang="en-US" b="1" dirty="0" smtClean="0">
+              <a:solidFill>
+                <a:srgbClr val="002060"/>
+              </a:solidFill>
+            </a:endParaRPr>
+          </a:p>
+        </p:txBody>
+      </p:sp>
+      <p:sp>
+        <p:nvSpPr>
+          <p:cNvPr id="4" name="Content Placeholder 2"/>
+          <p:cNvSpPr txBox="1">
+            <a:spLocks/>
+          </p:cNvSpPr>
+          <p:nvPr/>
+        </p:nvSpPr>
+        <p:spPr>
+          <a:xfrm>
+            <a:off x="177800" y="2197100"/>
+            <a:ext cx="4394200" cy="3746500"/>
+          </a:xfrm>
+          <a:prstGeom prst="rect">
+            <a:avLst/>
+          </a:prstGeom>
+          <a:solidFill>
+            <a:srgbClr val="EDF2F9"/>
+          </a:solidFill>
+          <a:ln>
+            <a:noFill/>
+          </a:ln>
+        </p:spPr>
+        <p:txBody>
+          <a:bodyPr vert="horz" lIns="91440" tIns="45720" rIns="91440" bIns="45720" rtlCol="0">
+            <a:normAutofit fontScale="55000" lnSpcReduction="20000"/>
+          </a:bodyPr>
+          <a:lstStyle>
+            <a:lvl1pPr marL="342900" indent="-342900" algn="l" defTabSz="457200" rtl="0" eaLnBrk="1" latinLnBrk="0" hangingPunct="1">
+              <a:spcBef>
+                <a:spcPct val="20000"/>
+              </a:spcBef>
+              <a:buFont typeface="Arial"/>
+              <a:buChar char="•"/>
+              <a:defRPr sz="3200" kern="1200">
+                <a:solidFill>
+                  <a:schemeClr val="tx1"/>
+                </a:solidFill>
+                <a:latin typeface="+mn-lt"/>
+                <a:ea typeface="+mn-ea"/>
+                <a:cs typeface="+mn-cs"/>
+              </a:defRPr>
+            </a:lvl1pPr>
+            <a:lvl2pPr marL="742950" indent="-285750" algn="l" defTabSz="457200" rtl="0" eaLnBrk="1" latinLnBrk="0" hangingPunct="1">
+              <a:spcBef>
+                <a:spcPct val="20000"/>
+              </a:spcBef>
+              <a:buFont typeface="Arial"/>
+              <a:buChar char="–"/>
+              <a:defRPr sz="2800" kern="1200">
+                <a:solidFill>
+                  <a:schemeClr val="tx1"/>
+                </a:solidFill>
+                <a:latin typeface="+mn-lt"/>
+                <a:ea typeface="+mn-ea"/>
+                <a:cs typeface="+mn-cs"/>
+              </a:defRPr>
+            </a:lvl2pPr>
+            <a:lvl3pPr marL="1143000" indent="-228600" algn="l" defTabSz="457200" rtl="0" eaLnBrk="1" latinLnBrk="0" hangingPunct="1">
+              <a:spcBef>
+                <a:spcPct val="20000"/>
+              </a:spcBef>
+              <a:buFont typeface="Arial"/>
+              <a:buChar char="•"/>
+              <a:defRPr sz="2400" kern="1200">
+                <a:solidFill>
+                  <a:schemeClr val="tx1"/>
+                </a:solidFill>
+                <a:latin typeface="+mn-lt"/>
+                <a:ea typeface="+mn-ea"/>
+                <a:cs typeface="+mn-cs"/>
+              </a:defRPr>
+            </a:lvl3pPr>
+            <a:lvl4pPr marL="1600200" indent="-228600" algn="l" defTabSz="457200" rtl="0" eaLnBrk="1" latinLnBrk="0" hangingPunct="1">
+              <a:spcBef>
+                <a:spcPct val="20000"/>
+              </a:spcBef>
+              <a:buFont typeface="Arial"/>
+              <a:buChar char="–"/>
+              <a:defRPr sz="2000" kern="1200">
+                <a:solidFill>
+                  <a:schemeClr val="tx1"/>
+                </a:solidFill>
+                <a:latin typeface="+mn-lt"/>
+                <a:ea typeface="+mn-ea"/>
+                <a:cs typeface="+mn-cs"/>
+              </a:defRPr>
+            </a:lvl4pPr>
+            <a:lvl5pPr marL="2057400" indent="-228600" algn="l" defTabSz="457200" rtl="0" eaLnBrk="1" latinLnBrk="0" hangingPunct="1">
+              <a:spcBef>
+                <a:spcPct val="20000"/>
+              </a:spcBef>
+              <a:buFont typeface="Arial"/>
+              <a:buChar char="»"/>
+              <a:defRPr sz="2000" kern="1200">
+                <a:solidFill>
+                  <a:schemeClr val="tx1"/>
+                </a:solidFill>
+                <a:latin typeface="+mn-lt"/>
+                <a:ea typeface="+mn-ea"/>
+                <a:cs typeface="+mn-cs"/>
+              </a:defRPr>
+            </a:lvl5pPr>
+            <a:lvl6pPr marL="2514600" indent="-228600" algn="l" defTabSz="457200" rtl="0" eaLnBrk="1" latinLnBrk="0" hangingPunct="1">
+              <a:spcBef>
+                <a:spcPct val="20000"/>
+              </a:spcBef>
+              <a:buFont typeface="Arial"/>
+              <a:buChar char="•"/>
+              <a:defRPr sz="2000" kern="1200">
+                <a:solidFill>
+                  <a:schemeClr val="tx1"/>
+                </a:solidFill>
+                <a:latin typeface="+mn-lt"/>
+                <a:ea typeface="+mn-ea"/>
+                <a:cs typeface="+mn-cs"/>
+              </a:defRPr>
+            </a:lvl6pPr>
+            <a:lvl7pPr marL="2971800" indent="-228600" algn="l" defTabSz="457200" rtl="0" eaLnBrk="1" latinLnBrk="0" hangingPunct="1">
+              <a:spcBef>
+                <a:spcPct val="20000"/>
+              </a:spcBef>
+              <a:buFont typeface="Arial"/>
+              <a:buChar char="•"/>
+              <a:defRPr sz="2000" kern="1200">
+                <a:solidFill>
+                  <a:schemeClr val="tx1"/>
+                </a:solidFill>
+                <a:latin typeface="+mn-lt"/>
+                <a:ea typeface="+mn-ea"/>
+                <a:cs typeface="+mn-cs"/>
+              </a:defRPr>
+            </a:lvl7pPr>
+            <a:lvl8pPr marL="3429000" indent="-228600" algn="l" defTabSz="457200" rtl="0" eaLnBrk="1" latinLnBrk="0" hangingPunct="1">
+              <a:spcBef>
+                <a:spcPct val="20000"/>
+              </a:spcBef>
+              <a:buFont typeface="Arial"/>
+              <a:buChar char="•"/>
+              <a:defRPr sz="2000" kern="1200">
+                <a:solidFill>
+                  <a:schemeClr val="tx1"/>
+                </a:solidFill>
+                <a:latin typeface="+mn-lt"/>
+                <a:ea typeface="+mn-ea"/>
+                <a:cs typeface="+mn-cs"/>
+              </a:defRPr>
+            </a:lvl8pPr>
+            <a:lvl9pPr marL="3886200" indent="-228600" algn="l" defTabSz="457200" rtl="0" eaLnBrk="1" latinLnBrk="0" hangingPunct="1">
+              <a:spcBef>
+                <a:spcPct val="20000"/>
+              </a:spcBef>
+              <a:buFont typeface="Arial"/>
+              <a:buChar char="•"/>
+              <a:defRPr sz="2000" kern="1200">
+                <a:solidFill>
+                  <a:schemeClr val="tx1"/>
+                </a:solidFill>
+                <a:latin typeface="+mn-lt"/>
+                <a:ea typeface="+mn-ea"/>
+                <a:cs typeface="+mn-cs"/>
+              </a:defRPr>
+            </a:lvl9pPr>
+          </a:lstStyle>
+          <a:p>
+            <a:pPr marL="0" indent="0">
+              <a:buNone/>
+            </a:pPr>
+            <a:r>
+              <a:rPr lang="fr-FR" sz="4400" b="1" dirty="0"/>
+              <a:t>Inspirations </a:t>
             </a:r>
             <a:r>
               <a:rPr lang="fr-FR" dirty="0"/>
-              <a:t> La police </a:t>
-            </a:r>
-            <a:r>
-              <a:rPr lang="fr-FR" dirty="0" err="1"/>
+              <a:t>: </a:t>
+            </a:r>
+            <a:r>
+              <a:rPr lang="fr-FR" sz="3800" dirty="0" err="1">
+                <a:solidFill>
+                  <a:schemeClr val="tx1">
+                    <a:lumMod val="75000"/>
+                    <a:lumOff val="25000"/>
+                  </a:schemeClr>
+                </a:solidFill>
+              </a:rPr>
+              <a:t>CyberWarGame</a:t>
+            </a:r>
+            <a:r>
+              <a:rPr lang="fr-FR" sz="3800" dirty="0">
+                <a:solidFill>
+                  <a:schemeClr val="tx1">
+                    <a:lumMod val="75000"/>
+                    <a:lumOff val="25000"/>
+                  </a:schemeClr>
+                </a:solidFill>
+              </a:rPr>
+              <a:t> et plateformes freelances modernes </a:t>
+            </a:r>
+            <a:r>
+              <a:rPr lang="fr-FR" sz="3800" dirty="0" smtClean="0">
+                <a:solidFill>
+                  <a:schemeClr val="tx1">
+                    <a:lumMod val="75000"/>
+                    <a:lumOff val="25000"/>
+                  </a:schemeClr>
+                </a:solidFill>
+              </a:rPr>
+              <a:t>telles </a:t>
+            </a:r>
+            <a:r>
+              <a:rPr lang="fr-FR" sz="3800" dirty="0">
+                <a:solidFill>
+                  <a:schemeClr val="tx1">
+                    <a:lumMod val="75000"/>
+                    <a:lumOff val="25000"/>
+                  </a:schemeClr>
+                </a:solidFill>
+              </a:rPr>
+              <a:t>que IWORKS</a:t>
+            </a:r>
+          </a:p>
+          <a:p>
+            <a:pPr marL="0" indent="0">
+              <a:buNone/>
+            </a:pPr>
+            <a:r>
+              <a:rPr lang="fr-FR" sz="4400" b="1" dirty="0" smtClean="0"/>
+              <a:t>Objectif </a:t>
+            </a:r>
+            <a:r>
+              <a:rPr lang="fr-FR" dirty="0"/>
+              <a:t>: </a:t>
+            </a:r>
+            <a:r>
+              <a:rPr lang="fr-FR" sz="3800" dirty="0">
+                <a:solidFill>
+                  <a:schemeClr val="tx1">
+                    <a:lumMod val="75000"/>
+                    <a:lumOff val="25000"/>
+                  </a:schemeClr>
+                </a:solidFill>
+              </a:rPr>
+              <a:t>lisibilité et hiérarchie visuelle claire. La police </a:t>
+            </a:r>
+            <a:r>
+              <a:rPr lang="fr-FR" sz="3800" dirty="0" err="1">
+                <a:solidFill>
+                  <a:schemeClr val="tx1">
+                    <a:lumMod val="75000"/>
+                    <a:lumOff val="25000"/>
+                  </a:schemeClr>
+                </a:solidFill>
+              </a:rPr>
               <a:t>Poppins</a:t>
             </a:r>
             <a:r>
-              <a:rPr lang="fr-FR" dirty="0"/>
+              <a:rPr lang="fr-FR" sz="3800" dirty="0">
+                <a:solidFill>
+                  <a:schemeClr val="tx1">
+                    <a:lumMod val="75000"/>
+                    <a:lumOff val="25000"/>
+                  </a:schemeClr>
+                </a:solidFill>
+              </a:rPr>
               <a:t> a été choisie pour son style moderne et impactant, idéal pour mettre les titres en valeur.</a:t>
             </a:r>
             <a:br>
-              <a:rPr lang="fr-FR" dirty="0"/>
+              <a:rPr lang="fr-FR" sz="3800" dirty="0">
+                <a:solidFill>
+                  <a:schemeClr val="tx1">
+                    <a:lumMod val="75000"/>
+                    <a:lumOff val="25000"/>
+                  </a:schemeClr>
+                </a:solidFill>
+              </a:rPr>
             </a:br>
             <a:r>
-              <a:rPr lang="fr-FR" dirty="0"/>
+              <a:rPr lang="fr-FR" sz="3800" dirty="0">
+                <a:solidFill>
+                  <a:schemeClr val="tx1">
+                    <a:lumMod val="75000"/>
+                    <a:lumOff val="25000"/>
+                  </a:schemeClr>
+                </a:solidFill>
+              </a:rPr>
               <a:t>La police Inter offre une excellente lisibilité pour les paragraphes et améliore le confort de lecture sur tous les écrans</a:t>
             </a:r>
-            <a:endParaRPr dirty="0"/>
           </a:p>
         </p:txBody>
       </p:sp>
@@ -5179,6 +8572,9 @@
   <p:clrMapOvr>
     <a:masterClrMapping/>
   </p:clrMapOvr>
+  <p:transition spd="slow">
+    <p:wipe/>
+  </p:transition>
   <p:timing>
     <p:tnLst>
       <p:par>
@@ -5216,219 +8612,260 @@
             <p:ph type="title"/>
           </p:nvPr>
         </p:nvSpPr>
-        <p:spPr/>
+        <p:spPr>
+          <a:xfrm>
+            <a:off x="165100" y="258762"/>
+            <a:ext cx="5346700" cy="579438"/>
+          </a:xfrm>
+        </p:spPr>
         <p:txBody>
-          <a:bodyPr/>
+          <a:bodyPr>
+            <a:normAutofit fontScale="90000"/>
+          </a:bodyPr>
           <a:lstStyle/>
           <a:p>
             <a:r>
-              <a:t>Architecture du projet</a:t>
-            </a:r>
+              <a:rPr b="1" dirty="0">
+                <a:solidFill>
+                  <a:srgbClr val="002060"/>
+                </a:solidFill>
+              </a:rPr>
+              <a:t>Architecture du </a:t>
+            </a:r>
+            <a:r>
+              <a:rPr b="1" dirty="0" err="1">
+                <a:solidFill>
+                  <a:srgbClr val="002060"/>
+                </a:solidFill>
+              </a:rPr>
+              <a:t>projet</a:t>
+            </a:r>
+            <a:endParaRPr b="1" dirty="0">
+              <a:solidFill>
+                <a:srgbClr val="002060"/>
+              </a:solidFill>
+            </a:endParaRPr>
           </a:p>
         </p:txBody>
       </p:sp>
-      <p:sp>
-        <p:nvSpPr>
-          <p:cNvPr id="3" name="Content Placeholder 2"/>
-          <p:cNvSpPr>
-            <a:spLocks noGrp="1"/>
-          </p:cNvSpPr>
+      <p:pic>
+        <p:nvPicPr>
+          <p:cNvPr id="5" name="Espace réservé du contenu 4"/>
+          <p:cNvPicPr>
+            <a:picLocks noGrp="1" noChangeAspect="1"/>
+          </p:cNvPicPr>
           <p:nvPr>
             <p:ph idx="1"/>
           </p:nvPr>
+        </p:nvPicPr>
+        <p:blipFill>
+          <a:blip r:embed="rId2">
+            <a:extLst>
+              <a:ext uri="{28A0092B-C50C-407E-A947-70E740481C1C}">
+                <a14:useLocalDpi xmlns:a14="http://schemas.microsoft.com/office/drawing/2010/main" val="0"/>
+              </a:ext>
+            </a:extLst>
+          </a:blip>
+          <a:stretch>
+            <a:fillRect/>
+          </a:stretch>
+        </p:blipFill>
+        <p:spPr>
+          <a:xfrm>
+            <a:off x="5271436" y="1356518"/>
+            <a:ext cx="3770964" cy="3556000"/>
+          </a:xfrm>
+        </p:spPr>
+      </p:pic>
+      <p:sp>
+        <p:nvSpPr>
+          <p:cNvPr id="4" name="Content Placeholder 2"/>
+          <p:cNvSpPr txBox="1">
+            <a:spLocks/>
+          </p:cNvSpPr>
+          <p:nvPr/>
         </p:nvSpPr>
-        <p:spPr/>
+        <p:spPr>
+          <a:xfrm>
+            <a:off x="89836" y="1564878"/>
+            <a:ext cx="4876800" cy="3139281"/>
+          </a:xfrm>
+          <a:prstGeom prst="rect">
+            <a:avLst/>
+          </a:prstGeom>
+          <a:solidFill>
+            <a:schemeClr val="bg1">
+              <a:lumMod val="95000"/>
+            </a:schemeClr>
+          </a:solidFill>
+        </p:spPr>
         <p:txBody>
-          <a:bodyPr>
-            <a:normAutofit fontScale="62500" lnSpcReduction="20000"/>
+          <a:bodyPr vert="horz" lIns="91440" tIns="45720" rIns="91440" bIns="45720" rtlCol="0">
+            <a:normAutofit lnSpcReduction="10000"/>
           </a:bodyPr>
-          <a:lstStyle/>
-          <a:p>
-            <a:r>
-              <a:rPr dirty="0"/>
-              <a:t>Structure </a:t>
-            </a:r>
-            <a:r>
-              <a:rPr dirty="0" err="1"/>
-              <a:t>organisée</a:t>
-            </a:r>
-            <a:r>
-              <a:rPr dirty="0"/>
-              <a:t> </a:t>
-            </a:r>
-            <a:r>
-              <a:rPr dirty="0" err="1"/>
-              <a:t>en</a:t>
-            </a:r>
-            <a:r>
-              <a:rPr dirty="0"/>
-              <a:t> HTML / CSS / JS.</a:t>
-            </a:r>
-          </a:p>
-          <a:p>
-            <a:r>
-              <a:rPr dirty="0" err="1"/>
-              <a:t>Séparation</a:t>
-            </a:r>
-            <a:r>
-              <a:rPr dirty="0"/>
-              <a:t> des </a:t>
-            </a:r>
-            <a:r>
-              <a:rPr dirty="0" err="1"/>
-              <a:t>ressources</a:t>
-            </a:r>
-            <a:r>
-              <a:rPr dirty="0"/>
-              <a:t> et </a:t>
-            </a:r>
-            <a:r>
-              <a:rPr dirty="0" err="1"/>
-              <a:t>logique</a:t>
-            </a:r>
-            <a:r>
-              <a:rPr dirty="0"/>
-              <a:t> </a:t>
-            </a:r>
-            <a:r>
-              <a:rPr dirty="0" err="1"/>
-              <a:t>modulaire</a:t>
-            </a:r>
-            <a:r>
-              <a:rPr dirty="0"/>
-              <a:t>.</a:t>
-            </a:r>
-          </a:p>
-          <a:p>
-            <a:r>
-              <a:rPr dirty="0"/>
-              <a:t>Pages </a:t>
-            </a:r>
-            <a:r>
-              <a:rPr dirty="0" err="1"/>
-              <a:t>principales</a:t>
-            </a:r>
-            <a:r>
-              <a:rPr dirty="0"/>
-              <a:t> : </a:t>
-            </a:r>
-            <a:r>
-              <a:rPr dirty="0" err="1"/>
-              <a:t>accueil</a:t>
-            </a:r>
-            <a:r>
-              <a:rPr dirty="0"/>
-              <a:t>, freelances, </a:t>
-            </a:r>
-            <a:r>
-              <a:rPr dirty="0" err="1"/>
-              <a:t>tarifs</a:t>
-            </a:r>
-            <a:r>
-              <a:rPr dirty="0"/>
-              <a:t>, contact, about</a:t>
-            </a:r>
-            <a:r>
-              <a:rPr dirty="0" smtClean="0"/>
-              <a:t>.</a:t>
-            </a:r>
-            <a:endParaRPr lang="en-US" dirty="0" smtClean="0"/>
-          </a:p>
-          <a:p>
-            <a:r>
-              <a:rPr lang="en-US" dirty="0" err="1"/>
-              <a:t>Arborescense</a:t>
-            </a:r>
-            <a:r>
-              <a:rPr lang="en-US" dirty="0" smtClean="0"/>
-              <a:t>:</a:t>
-            </a:r>
-          </a:p>
-          <a:p>
-            <a:r>
-              <a:rPr lang="en-US" dirty="0"/>
-              <a:t> </a:t>
-            </a:r>
-            <a:r>
-              <a:rPr lang="en-US" dirty="0" err="1" smtClean="0"/>
-              <a:t>AfriTalent</a:t>
-            </a:r>
-            <a:r>
-              <a:rPr lang="en-US" dirty="0" smtClean="0"/>
-              <a:t>/</a:t>
-            </a:r>
-            <a:endParaRPr lang="en-US" dirty="0"/>
-          </a:p>
-          <a:p>
-            <a:r>
-              <a:rPr lang="en-US" dirty="0"/>
-              <a:t>├── index.html</a:t>
-            </a:r>
-          </a:p>
-          <a:p>
-            <a:r>
-              <a:rPr lang="en-US" dirty="0"/>
-              <a:t>├── freelances.html</a:t>
-            </a:r>
-          </a:p>
-          <a:p>
-            <a:r>
-              <a:rPr lang="en-US" dirty="0"/>
-              <a:t>├── tarifs.html</a:t>
-            </a:r>
-          </a:p>
-          <a:p>
-            <a:r>
-              <a:rPr lang="en-US" dirty="0"/>
-              <a:t>├── about.html</a:t>
-            </a:r>
-          </a:p>
-          <a:p>
-            <a:r>
-              <a:rPr lang="en-US" dirty="0"/>
-              <a:t>├── contact.html</a:t>
-            </a:r>
-          </a:p>
-          <a:p>
-            <a:r>
-              <a:rPr lang="en-US" dirty="0"/>
-              <a:t>│</a:t>
-            </a:r>
-          </a:p>
-          <a:p>
-            <a:r>
-              <a:rPr lang="en-US" dirty="0"/>
-              <a:t>├── </a:t>
-            </a:r>
-            <a:r>
-              <a:rPr lang="en-US" dirty="0" err="1"/>
-              <a:t>css</a:t>
-            </a:r>
-            <a:r>
-              <a:rPr lang="en-US" dirty="0"/>
-              <a:t>/style.css</a:t>
-            </a:r>
-          </a:p>
-          <a:p>
-            <a:r>
-              <a:rPr lang="en-US" dirty="0"/>
-              <a:t>├── </a:t>
-            </a:r>
-            <a:r>
-              <a:rPr lang="en-US" dirty="0" err="1"/>
-              <a:t>js</a:t>
-            </a:r>
-            <a:r>
-              <a:rPr lang="en-US" dirty="0"/>
-              <a:t>/main.js</a:t>
-            </a:r>
-          </a:p>
-          <a:p>
-            <a:r>
-              <a:rPr lang="en-US" dirty="0"/>
-              <a:t>└── images/</a:t>
-            </a:r>
-            <a:endParaRPr dirty="0"/>
+          <a:lstStyle>
+            <a:lvl1pPr marL="342900" indent="-342900" algn="l" defTabSz="457200" rtl="0" eaLnBrk="1" latinLnBrk="0" hangingPunct="1">
+              <a:spcBef>
+                <a:spcPct val="20000"/>
+              </a:spcBef>
+              <a:buFont typeface="Arial"/>
+              <a:buChar char="•"/>
+              <a:defRPr sz="3200" kern="1200">
+                <a:solidFill>
+                  <a:schemeClr val="tx1"/>
+                </a:solidFill>
+                <a:latin typeface="+mn-lt"/>
+                <a:ea typeface="+mn-ea"/>
+                <a:cs typeface="+mn-cs"/>
+              </a:defRPr>
+            </a:lvl1pPr>
+            <a:lvl2pPr marL="742950" indent="-285750" algn="l" defTabSz="457200" rtl="0" eaLnBrk="1" latinLnBrk="0" hangingPunct="1">
+              <a:spcBef>
+                <a:spcPct val="20000"/>
+              </a:spcBef>
+              <a:buFont typeface="Arial"/>
+              <a:buChar char="–"/>
+              <a:defRPr sz="2800" kern="1200">
+                <a:solidFill>
+                  <a:schemeClr val="tx1"/>
+                </a:solidFill>
+                <a:latin typeface="+mn-lt"/>
+                <a:ea typeface="+mn-ea"/>
+                <a:cs typeface="+mn-cs"/>
+              </a:defRPr>
+            </a:lvl2pPr>
+            <a:lvl3pPr marL="1143000" indent="-228600" algn="l" defTabSz="457200" rtl="0" eaLnBrk="1" latinLnBrk="0" hangingPunct="1">
+              <a:spcBef>
+                <a:spcPct val="20000"/>
+              </a:spcBef>
+              <a:buFont typeface="Arial"/>
+              <a:buChar char="•"/>
+              <a:defRPr sz="2400" kern="1200">
+                <a:solidFill>
+                  <a:schemeClr val="tx1"/>
+                </a:solidFill>
+                <a:latin typeface="+mn-lt"/>
+                <a:ea typeface="+mn-ea"/>
+                <a:cs typeface="+mn-cs"/>
+              </a:defRPr>
+            </a:lvl3pPr>
+            <a:lvl4pPr marL="1600200" indent="-228600" algn="l" defTabSz="457200" rtl="0" eaLnBrk="1" latinLnBrk="0" hangingPunct="1">
+              <a:spcBef>
+                <a:spcPct val="20000"/>
+              </a:spcBef>
+              <a:buFont typeface="Arial"/>
+              <a:buChar char="–"/>
+              <a:defRPr sz="2000" kern="1200">
+                <a:solidFill>
+                  <a:schemeClr val="tx1"/>
+                </a:solidFill>
+                <a:latin typeface="+mn-lt"/>
+                <a:ea typeface="+mn-ea"/>
+                <a:cs typeface="+mn-cs"/>
+              </a:defRPr>
+            </a:lvl4pPr>
+            <a:lvl5pPr marL="2057400" indent="-228600" algn="l" defTabSz="457200" rtl="0" eaLnBrk="1" latinLnBrk="0" hangingPunct="1">
+              <a:spcBef>
+                <a:spcPct val="20000"/>
+              </a:spcBef>
+              <a:buFont typeface="Arial"/>
+              <a:buChar char="»"/>
+              <a:defRPr sz="2000" kern="1200">
+                <a:solidFill>
+                  <a:schemeClr val="tx1"/>
+                </a:solidFill>
+                <a:latin typeface="+mn-lt"/>
+                <a:ea typeface="+mn-ea"/>
+                <a:cs typeface="+mn-cs"/>
+              </a:defRPr>
+            </a:lvl5pPr>
+            <a:lvl6pPr marL="2514600" indent="-228600" algn="l" defTabSz="457200" rtl="0" eaLnBrk="1" latinLnBrk="0" hangingPunct="1">
+              <a:spcBef>
+                <a:spcPct val="20000"/>
+              </a:spcBef>
+              <a:buFont typeface="Arial"/>
+              <a:buChar char="•"/>
+              <a:defRPr sz="2000" kern="1200">
+                <a:solidFill>
+                  <a:schemeClr val="tx1"/>
+                </a:solidFill>
+                <a:latin typeface="+mn-lt"/>
+                <a:ea typeface="+mn-ea"/>
+                <a:cs typeface="+mn-cs"/>
+              </a:defRPr>
+            </a:lvl6pPr>
+            <a:lvl7pPr marL="2971800" indent="-228600" algn="l" defTabSz="457200" rtl="0" eaLnBrk="1" latinLnBrk="0" hangingPunct="1">
+              <a:spcBef>
+                <a:spcPct val="20000"/>
+              </a:spcBef>
+              <a:buFont typeface="Arial"/>
+              <a:buChar char="•"/>
+              <a:defRPr sz="2000" kern="1200">
+                <a:solidFill>
+                  <a:schemeClr val="tx1"/>
+                </a:solidFill>
+                <a:latin typeface="+mn-lt"/>
+                <a:ea typeface="+mn-ea"/>
+                <a:cs typeface="+mn-cs"/>
+              </a:defRPr>
+            </a:lvl7pPr>
+            <a:lvl8pPr marL="3429000" indent="-228600" algn="l" defTabSz="457200" rtl="0" eaLnBrk="1" latinLnBrk="0" hangingPunct="1">
+              <a:spcBef>
+                <a:spcPct val="20000"/>
+              </a:spcBef>
+              <a:buFont typeface="Arial"/>
+              <a:buChar char="•"/>
+              <a:defRPr sz="2000" kern="1200">
+                <a:solidFill>
+                  <a:schemeClr val="tx1"/>
+                </a:solidFill>
+                <a:latin typeface="+mn-lt"/>
+                <a:ea typeface="+mn-ea"/>
+                <a:cs typeface="+mn-cs"/>
+              </a:defRPr>
+            </a:lvl8pPr>
+            <a:lvl9pPr marL="3886200" indent="-228600" algn="l" defTabSz="457200" rtl="0" eaLnBrk="1" latinLnBrk="0" hangingPunct="1">
+              <a:spcBef>
+                <a:spcPct val="20000"/>
+              </a:spcBef>
+              <a:buFont typeface="Arial"/>
+              <a:buChar char="•"/>
+              <a:defRPr sz="2000" kern="1200">
+                <a:solidFill>
+                  <a:schemeClr val="tx1"/>
+                </a:solidFill>
+                <a:latin typeface="+mn-lt"/>
+                <a:ea typeface="+mn-ea"/>
+                <a:cs typeface="+mn-cs"/>
+              </a:defRPr>
+            </a:lvl9pPr>
+          </a:lstStyle>
+          <a:p>
+            <a:pPr marL="0" indent="0">
+              <a:buNone/>
+            </a:pPr>
+            <a:r>
+              <a:rPr lang="fr-FR" sz="2800" dirty="0"/>
+              <a:t>Structure organisée en HTML / CSS / JS.</a:t>
+            </a:r>
+          </a:p>
+          <a:p>
+            <a:pPr marL="0" indent="0">
+              <a:buNone/>
+            </a:pPr>
+            <a:r>
+              <a:rPr lang="fr-FR" sz="2800" dirty="0"/>
+              <a:t>Séparation des ressources et logique modulaire.</a:t>
+            </a:r>
+          </a:p>
+          <a:p>
+            <a:pPr marL="0" indent="0">
+              <a:buNone/>
+            </a:pPr>
+            <a:r>
+              <a:rPr lang="fr-FR" sz="2800" dirty="0"/>
+              <a:t>Pages principales : accueil, freelances, tarifs, contact, about.</a:t>
+            </a:r>
           </a:p>
         </p:txBody>
       </p:sp>
@@ -5437,6 +8874,9 @@
   <p:clrMapOvr>
     <a:masterClrMapping/>
   </p:clrMapOvr>
+  <p:transition spd="slow">
+    <p:wipe/>
+  </p:transition>
   <p:timing>
     <p:tnLst>
       <p:par>
@@ -5476,8 +8916,8 @@
         </p:nvSpPr>
         <p:spPr>
           <a:xfrm>
-            <a:off x="457200" y="-46830"/>
-            <a:ext cx="8229600" cy="1143000"/>
+            <a:off x="2120901" y="-8730"/>
+            <a:ext cx="3695700" cy="804009"/>
           </a:xfrm>
         </p:spPr>
         <p:txBody>
@@ -5485,7 +8925,13 @@
           <a:lstStyle/>
           <a:p>
             <a:r>
-              <a:rPr dirty="0"/>
+              <a:rPr b="1" dirty="0">
+                <a:solidFill>
+                  <a:schemeClr val="tx2">
+                    <a:lumMod val="75000"/>
+                  </a:schemeClr>
+                </a:solidFill>
+              </a:rPr>
               <a:t>Pages du site</a:t>
             </a:r>
           </a:p>
@@ -5501,43 +8947,33 @@
             <p:ph idx="1"/>
           </p:nvPr>
         </p:nvSpPr>
-        <p:spPr/>
+        <p:spPr>
+          <a:xfrm>
+            <a:off x="228600" y="1568053"/>
+            <a:ext cx="1543050" cy="694532"/>
+          </a:xfrm>
+        </p:spPr>
         <p:txBody>
           <a:bodyPr>
             <a:normAutofit/>
           </a:bodyPr>
           <a:lstStyle/>
           <a:p>
-            <a:r>
-              <a:rPr dirty="0" err="1" smtClean="0"/>
+            <a:pPr marL="0" indent="0">
+              <a:buNone/>
+            </a:pPr>
+            <a:r>
+              <a:rPr b="1" dirty="0" err="1" smtClean="0">
+                <a:solidFill>
+                  <a:srgbClr val="002060"/>
+                </a:solidFill>
+              </a:rPr>
               <a:t>Accueil</a:t>
             </a:r>
             <a:r>
               <a:rPr lang="en-US" dirty="0" smtClean="0"/>
               <a:t> </a:t>
             </a:r>
-          </a:p>
-          <a:p>
-            <a:endParaRPr dirty="0"/>
-          </a:p>
-          <a:p>
-            <a:endParaRPr dirty="0"/>
-          </a:p>
-          <a:p>
-            <a:r>
-              <a:rPr lang="en-US" dirty="0" smtClean="0"/>
-              <a:t>Freelances</a:t>
-            </a:r>
-          </a:p>
-          <a:p>
-            <a:endParaRPr lang="en-US" dirty="0" smtClean="0"/>
-          </a:p>
-          <a:p>
-            <a:r>
-              <a:rPr lang="en-US" dirty="0" err="1" smtClean="0"/>
-              <a:t>Tarifs</a:t>
-            </a:r>
-            <a:endParaRPr dirty="0"/>
           </a:p>
         </p:txBody>
       </p:sp>
@@ -5563,8 +8999,8 @@
         </p:blipFill>
         <p:spPr>
           <a:xfrm>
-            <a:off x="2692400" y="939740"/>
-            <a:ext cx="2794000" cy="1511360"/>
+            <a:off x="2247900" y="939740"/>
+            <a:ext cx="3132184" cy="1511360"/>
           </a:xfrm>
           <a:prstGeom prst="rect">
             <a:avLst/>
@@ -5593,8 +9029,8 @@
         </p:blipFill>
         <p:spPr>
           <a:xfrm>
-            <a:off x="5613400" y="1104840"/>
-            <a:ext cx="3073399" cy="1511360"/>
+            <a:off x="5676901" y="939740"/>
+            <a:ext cx="3225799" cy="1511360"/>
           </a:xfrm>
           <a:prstGeom prst="rect">
             <a:avLst/>
@@ -5623,8 +9059,8 @@
         </p:blipFill>
         <p:spPr>
           <a:xfrm>
-            <a:off x="2941684" y="2819400"/>
-            <a:ext cx="2438400" cy="1600200"/>
+            <a:off x="2247900" y="2690811"/>
+            <a:ext cx="3132184" cy="1728789"/>
           </a:xfrm>
           <a:prstGeom prst="rect">
             <a:avLst/>
@@ -5653,8 +9089,8 @@
         </p:blipFill>
         <p:spPr>
           <a:xfrm>
-            <a:off x="5613401" y="2819400"/>
-            <a:ext cx="3073400" cy="1600200"/>
+            <a:off x="5676901" y="2819400"/>
+            <a:ext cx="3225799" cy="1600200"/>
           </a:xfrm>
           <a:prstGeom prst="rect">
             <a:avLst/>
@@ -5683,8 +9119,8 @@
         </p:blipFill>
         <p:spPr>
           <a:xfrm>
-            <a:off x="2767544" y="4602161"/>
-            <a:ext cx="2786680" cy="1706563"/>
+            <a:off x="2247901" y="4602161"/>
+            <a:ext cx="3132183" cy="1706563"/>
           </a:xfrm>
           <a:prstGeom prst="rect">
             <a:avLst/>
@@ -5713,7 +9149,7 @@
         </p:blipFill>
         <p:spPr>
           <a:xfrm>
-            <a:off x="5787541" y="4602161"/>
+            <a:off x="5676901" y="4602161"/>
             <a:ext cx="3224742" cy="1727202"/>
           </a:xfrm>
           <a:prstGeom prst="rect">
@@ -5723,7 +9159,7 @@
       </p:pic>
       <p:sp>
         <p:nvSpPr>
-          <p:cNvPr id="17" name="Title 1"/>
+          <p:cNvPr id="13" name="Content Placeholder 2"/>
           <p:cNvSpPr txBox="1">
             <a:spLocks/>
           </p:cNvSpPr>
@@ -5731,39 +9167,349 @@
         </p:nvSpPr>
         <p:spPr>
           <a:xfrm>
-            <a:off x="0" y="6365874"/>
-            <a:ext cx="5380084" cy="528637"/>
+            <a:off x="228600" y="3429000"/>
+            <a:ext cx="1892301" cy="694532"/>
           </a:xfrm>
           <a:prstGeom prst="rect">
             <a:avLst/>
           </a:prstGeom>
         </p:spPr>
         <p:txBody>
-          <a:bodyPr vert="horz" lIns="91440" tIns="45720" rIns="91440" bIns="45720" rtlCol="0" anchor="ctr">
-            <a:noAutofit/>
+          <a:bodyPr vert="horz" lIns="91440" tIns="45720" rIns="91440" bIns="45720" rtlCol="0">
+            <a:normAutofit fontScale="92500"/>
           </a:bodyPr>
           <a:lstStyle>
-            <a:lvl1pPr algn="ctr" defTabSz="457200" rtl="0" eaLnBrk="1" latinLnBrk="0" hangingPunct="1">
-              <a:spcBef>
-                <a:spcPct val="0"/>
-              </a:spcBef>
-              <a:buNone/>
-              <a:defRPr sz="4400" kern="1200">
-                <a:solidFill>
-                  <a:schemeClr val="tx1"/>
-                </a:solidFill>
-                <a:latin typeface="+mj-lt"/>
-                <a:ea typeface="+mj-ea"/>
-                <a:cs typeface="+mj-cs"/>
+            <a:lvl1pPr marL="342900" indent="-342900" algn="l" defTabSz="457200" rtl="0" eaLnBrk="1" latinLnBrk="0" hangingPunct="1">
+              <a:spcBef>
+                <a:spcPct val="20000"/>
+              </a:spcBef>
+              <a:buFont typeface="Arial"/>
+              <a:buChar char="•"/>
+              <a:defRPr sz="3200" kern="1200">
+                <a:solidFill>
+                  <a:schemeClr val="tx1"/>
+                </a:solidFill>
+                <a:latin typeface="+mn-lt"/>
+                <a:ea typeface="+mn-ea"/>
+                <a:cs typeface="+mn-cs"/>
               </a:defRPr>
             </a:lvl1pPr>
+            <a:lvl2pPr marL="742950" indent="-285750" algn="l" defTabSz="457200" rtl="0" eaLnBrk="1" latinLnBrk="0" hangingPunct="1">
+              <a:spcBef>
+                <a:spcPct val="20000"/>
+              </a:spcBef>
+              <a:buFont typeface="Arial"/>
+              <a:buChar char="–"/>
+              <a:defRPr sz="2800" kern="1200">
+                <a:solidFill>
+                  <a:schemeClr val="tx1"/>
+                </a:solidFill>
+                <a:latin typeface="+mn-lt"/>
+                <a:ea typeface="+mn-ea"/>
+                <a:cs typeface="+mn-cs"/>
+              </a:defRPr>
+            </a:lvl2pPr>
+            <a:lvl3pPr marL="1143000" indent="-228600" algn="l" defTabSz="457200" rtl="0" eaLnBrk="1" latinLnBrk="0" hangingPunct="1">
+              <a:spcBef>
+                <a:spcPct val="20000"/>
+              </a:spcBef>
+              <a:buFont typeface="Arial"/>
+              <a:buChar char="•"/>
+              <a:defRPr sz="2400" kern="1200">
+                <a:solidFill>
+                  <a:schemeClr val="tx1"/>
+                </a:solidFill>
+                <a:latin typeface="+mn-lt"/>
+                <a:ea typeface="+mn-ea"/>
+                <a:cs typeface="+mn-cs"/>
+              </a:defRPr>
+            </a:lvl3pPr>
+            <a:lvl4pPr marL="1600200" indent="-228600" algn="l" defTabSz="457200" rtl="0" eaLnBrk="1" latinLnBrk="0" hangingPunct="1">
+              <a:spcBef>
+                <a:spcPct val="20000"/>
+              </a:spcBef>
+              <a:buFont typeface="Arial"/>
+              <a:buChar char="–"/>
+              <a:defRPr sz="2000" kern="1200">
+                <a:solidFill>
+                  <a:schemeClr val="tx1"/>
+                </a:solidFill>
+                <a:latin typeface="+mn-lt"/>
+                <a:ea typeface="+mn-ea"/>
+                <a:cs typeface="+mn-cs"/>
+              </a:defRPr>
+            </a:lvl4pPr>
+            <a:lvl5pPr marL="2057400" indent="-228600" algn="l" defTabSz="457200" rtl="0" eaLnBrk="1" latinLnBrk="0" hangingPunct="1">
+              <a:spcBef>
+                <a:spcPct val="20000"/>
+              </a:spcBef>
+              <a:buFont typeface="Arial"/>
+              <a:buChar char="»"/>
+              <a:defRPr sz="2000" kern="1200">
+                <a:solidFill>
+                  <a:schemeClr val="tx1"/>
+                </a:solidFill>
+                <a:latin typeface="+mn-lt"/>
+                <a:ea typeface="+mn-ea"/>
+                <a:cs typeface="+mn-cs"/>
+              </a:defRPr>
+            </a:lvl5pPr>
+            <a:lvl6pPr marL="2514600" indent="-228600" algn="l" defTabSz="457200" rtl="0" eaLnBrk="1" latinLnBrk="0" hangingPunct="1">
+              <a:spcBef>
+                <a:spcPct val="20000"/>
+              </a:spcBef>
+              <a:buFont typeface="Arial"/>
+              <a:buChar char="•"/>
+              <a:defRPr sz="2000" kern="1200">
+                <a:solidFill>
+                  <a:schemeClr val="tx1"/>
+                </a:solidFill>
+                <a:latin typeface="+mn-lt"/>
+                <a:ea typeface="+mn-ea"/>
+                <a:cs typeface="+mn-cs"/>
+              </a:defRPr>
+            </a:lvl6pPr>
+            <a:lvl7pPr marL="2971800" indent="-228600" algn="l" defTabSz="457200" rtl="0" eaLnBrk="1" latinLnBrk="0" hangingPunct="1">
+              <a:spcBef>
+                <a:spcPct val="20000"/>
+              </a:spcBef>
+              <a:buFont typeface="Arial"/>
+              <a:buChar char="•"/>
+              <a:defRPr sz="2000" kern="1200">
+                <a:solidFill>
+                  <a:schemeClr val="tx1"/>
+                </a:solidFill>
+                <a:latin typeface="+mn-lt"/>
+                <a:ea typeface="+mn-ea"/>
+                <a:cs typeface="+mn-cs"/>
+              </a:defRPr>
+            </a:lvl7pPr>
+            <a:lvl8pPr marL="3429000" indent="-228600" algn="l" defTabSz="457200" rtl="0" eaLnBrk="1" latinLnBrk="0" hangingPunct="1">
+              <a:spcBef>
+                <a:spcPct val="20000"/>
+              </a:spcBef>
+              <a:buFont typeface="Arial"/>
+              <a:buChar char="•"/>
+              <a:defRPr sz="2000" kern="1200">
+                <a:solidFill>
+                  <a:schemeClr val="tx1"/>
+                </a:solidFill>
+                <a:latin typeface="+mn-lt"/>
+                <a:ea typeface="+mn-ea"/>
+                <a:cs typeface="+mn-cs"/>
+              </a:defRPr>
+            </a:lvl8pPr>
+            <a:lvl9pPr marL="3886200" indent="-228600" algn="l" defTabSz="457200" rtl="0" eaLnBrk="1" latinLnBrk="0" hangingPunct="1">
+              <a:spcBef>
+                <a:spcPct val="20000"/>
+              </a:spcBef>
+              <a:buFont typeface="Arial"/>
+              <a:buChar char="•"/>
+              <a:defRPr sz="2000" kern="1200">
+                <a:solidFill>
+                  <a:schemeClr val="tx1"/>
+                </a:solidFill>
+                <a:latin typeface="+mn-lt"/>
+                <a:ea typeface="+mn-ea"/>
+                <a:cs typeface="+mn-cs"/>
+              </a:defRPr>
+            </a:lvl9pPr>
           </a:lstStyle>
           <a:p>
-            <a:r>
-              <a:rPr lang="fr-FR" sz="1800" dirty="0" smtClean="0"/>
-              <a:t>Les pages about et Contact suivent la même logique</a:t>
-            </a:r>
-            <a:endParaRPr lang="fr-FR" sz="1800" dirty="0"/>
+            <a:pPr marL="0" indent="0">
+              <a:buFont typeface="Arial"/>
+              <a:buNone/>
+            </a:pPr>
+            <a:r>
+              <a:rPr lang="fr-FR" b="1" dirty="0" smtClean="0">
+                <a:solidFill>
+                  <a:srgbClr val="002060"/>
+                </a:solidFill>
+              </a:rPr>
+              <a:t>Freelances</a:t>
+            </a:r>
+            <a:r>
+              <a:rPr lang="fr-FR" dirty="0" smtClean="0"/>
+              <a:t> </a:t>
+            </a:r>
+          </a:p>
+        </p:txBody>
+      </p:sp>
+      <p:sp>
+        <p:nvSpPr>
+          <p:cNvPr id="14" name="Content Placeholder 2"/>
+          <p:cNvSpPr txBox="1">
+            <a:spLocks/>
+          </p:cNvSpPr>
+          <p:nvPr/>
+        </p:nvSpPr>
+        <p:spPr>
+          <a:xfrm>
+            <a:off x="425449" y="4953000"/>
+            <a:ext cx="1346200" cy="694532"/>
+          </a:xfrm>
+          <a:prstGeom prst="rect">
+            <a:avLst/>
+          </a:prstGeom>
+        </p:spPr>
+        <p:txBody>
+          <a:bodyPr vert="horz" lIns="91440" tIns="45720" rIns="91440" bIns="45720" rtlCol="0">
+            <a:normAutofit/>
+          </a:bodyPr>
+          <a:lstStyle>
+            <a:lvl1pPr marL="342900" indent="-342900" algn="l" defTabSz="457200" rtl="0" eaLnBrk="1" latinLnBrk="0" hangingPunct="1">
+              <a:spcBef>
+                <a:spcPct val="20000"/>
+              </a:spcBef>
+              <a:buFont typeface="Arial"/>
+              <a:buChar char="•"/>
+              <a:defRPr sz="3200" kern="1200">
+                <a:solidFill>
+                  <a:schemeClr val="tx1"/>
+                </a:solidFill>
+                <a:latin typeface="+mn-lt"/>
+                <a:ea typeface="+mn-ea"/>
+                <a:cs typeface="+mn-cs"/>
+              </a:defRPr>
+            </a:lvl1pPr>
+            <a:lvl2pPr marL="742950" indent="-285750" algn="l" defTabSz="457200" rtl="0" eaLnBrk="1" latinLnBrk="0" hangingPunct="1">
+              <a:spcBef>
+                <a:spcPct val="20000"/>
+              </a:spcBef>
+              <a:buFont typeface="Arial"/>
+              <a:buChar char="–"/>
+              <a:defRPr sz="2800" kern="1200">
+                <a:solidFill>
+                  <a:schemeClr val="tx1"/>
+                </a:solidFill>
+                <a:latin typeface="+mn-lt"/>
+                <a:ea typeface="+mn-ea"/>
+                <a:cs typeface="+mn-cs"/>
+              </a:defRPr>
+            </a:lvl2pPr>
+            <a:lvl3pPr marL="1143000" indent="-228600" algn="l" defTabSz="457200" rtl="0" eaLnBrk="1" latinLnBrk="0" hangingPunct="1">
+              <a:spcBef>
+                <a:spcPct val="20000"/>
+              </a:spcBef>
+              <a:buFont typeface="Arial"/>
+              <a:buChar char="•"/>
+              <a:defRPr sz="2400" kern="1200">
+                <a:solidFill>
+                  <a:schemeClr val="tx1"/>
+                </a:solidFill>
+                <a:latin typeface="+mn-lt"/>
+                <a:ea typeface="+mn-ea"/>
+                <a:cs typeface="+mn-cs"/>
+              </a:defRPr>
+            </a:lvl3pPr>
+            <a:lvl4pPr marL="1600200" indent="-228600" algn="l" defTabSz="457200" rtl="0" eaLnBrk="1" latinLnBrk="0" hangingPunct="1">
+              <a:spcBef>
+                <a:spcPct val="20000"/>
+              </a:spcBef>
+              <a:buFont typeface="Arial"/>
+              <a:buChar char="–"/>
+              <a:defRPr sz="2000" kern="1200">
+                <a:solidFill>
+                  <a:schemeClr val="tx1"/>
+                </a:solidFill>
+                <a:latin typeface="+mn-lt"/>
+                <a:ea typeface="+mn-ea"/>
+                <a:cs typeface="+mn-cs"/>
+              </a:defRPr>
+            </a:lvl4pPr>
+            <a:lvl5pPr marL="2057400" indent="-228600" algn="l" defTabSz="457200" rtl="0" eaLnBrk="1" latinLnBrk="0" hangingPunct="1">
+              <a:spcBef>
+                <a:spcPct val="20000"/>
+              </a:spcBef>
+              <a:buFont typeface="Arial"/>
+              <a:buChar char="»"/>
+              <a:defRPr sz="2000" kern="1200">
+                <a:solidFill>
+                  <a:schemeClr val="tx1"/>
+                </a:solidFill>
+                <a:latin typeface="+mn-lt"/>
+                <a:ea typeface="+mn-ea"/>
+                <a:cs typeface="+mn-cs"/>
+              </a:defRPr>
+            </a:lvl5pPr>
+            <a:lvl6pPr marL="2514600" indent="-228600" algn="l" defTabSz="457200" rtl="0" eaLnBrk="1" latinLnBrk="0" hangingPunct="1">
+              <a:spcBef>
+                <a:spcPct val="20000"/>
+              </a:spcBef>
+              <a:buFont typeface="Arial"/>
+              <a:buChar char="•"/>
+              <a:defRPr sz="2000" kern="1200">
+                <a:solidFill>
+                  <a:schemeClr val="tx1"/>
+                </a:solidFill>
+                <a:latin typeface="+mn-lt"/>
+                <a:ea typeface="+mn-ea"/>
+                <a:cs typeface="+mn-cs"/>
+              </a:defRPr>
+            </a:lvl6pPr>
+            <a:lvl7pPr marL="2971800" indent="-228600" algn="l" defTabSz="457200" rtl="0" eaLnBrk="1" latinLnBrk="0" hangingPunct="1">
+              <a:spcBef>
+                <a:spcPct val="20000"/>
+              </a:spcBef>
+              <a:buFont typeface="Arial"/>
+              <a:buChar char="•"/>
+              <a:defRPr sz="2000" kern="1200">
+                <a:solidFill>
+                  <a:schemeClr val="tx1"/>
+                </a:solidFill>
+                <a:latin typeface="+mn-lt"/>
+                <a:ea typeface="+mn-ea"/>
+                <a:cs typeface="+mn-cs"/>
+              </a:defRPr>
+            </a:lvl7pPr>
+            <a:lvl8pPr marL="3429000" indent="-228600" algn="l" defTabSz="457200" rtl="0" eaLnBrk="1" latinLnBrk="0" hangingPunct="1">
+              <a:spcBef>
+                <a:spcPct val="20000"/>
+              </a:spcBef>
+              <a:buFont typeface="Arial"/>
+              <a:buChar char="•"/>
+              <a:defRPr sz="2000" kern="1200">
+                <a:solidFill>
+                  <a:schemeClr val="tx1"/>
+                </a:solidFill>
+                <a:latin typeface="+mn-lt"/>
+                <a:ea typeface="+mn-ea"/>
+                <a:cs typeface="+mn-cs"/>
+              </a:defRPr>
+            </a:lvl8pPr>
+            <a:lvl9pPr marL="3886200" indent="-228600" algn="l" defTabSz="457200" rtl="0" eaLnBrk="1" latinLnBrk="0" hangingPunct="1">
+              <a:spcBef>
+                <a:spcPct val="20000"/>
+              </a:spcBef>
+              <a:buFont typeface="Arial"/>
+              <a:buChar char="•"/>
+              <a:defRPr sz="2000" kern="1200">
+                <a:solidFill>
+                  <a:schemeClr val="tx1"/>
+                </a:solidFill>
+                <a:latin typeface="+mn-lt"/>
+                <a:ea typeface="+mn-ea"/>
+                <a:cs typeface="+mn-cs"/>
+              </a:defRPr>
+            </a:lvl9pPr>
+          </a:lstStyle>
+          <a:p>
+            <a:pPr marL="0" indent="0">
+              <a:buFont typeface="Arial"/>
+              <a:buNone/>
+            </a:pPr>
+            <a:r>
+              <a:rPr lang="fr-FR" b="1" dirty="0" smtClean="0">
+                <a:solidFill>
+                  <a:srgbClr val="002060"/>
+                </a:solidFill>
+              </a:rPr>
+              <a:t>Tarifs</a:t>
+            </a:r>
+            <a:r>
+              <a:rPr lang="fr-FR" dirty="0" smtClean="0"/>
+              <a:t> </a:t>
+            </a:r>
           </a:p>
         </p:txBody>
       </p:sp>
@@ -5772,6 +9518,9 @@
   <p:clrMapOvr>
     <a:masterClrMapping/>
   </p:clrMapOvr>
+  <p:transition spd="slow">
+    <p:wipe/>
+  </p:transition>
   <p:timing>
     <p:tnLst>
       <p:par>
@@ -5809,19 +9558,41 @@
             <p:ph type="title"/>
           </p:nvPr>
         </p:nvSpPr>
-        <p:spPr/>
+        <p:spPr>
+          <a:xfrm>
+            <a:off x="825500" y="157162"/>
+            <a:ext cx="6286500" cy="630238"/>
+          </a:xfrm>
+        </p:spPr>
         <p:txBody>
-          <a:bodyPr/>
+          <a:bodyPr>
+            <a:normAutofit fontScale="90000"/>
+          </a:bodyPr>
           <a:lstStyle/>
           <a:p>
             <a:r>
-              <a:rPr dirty="0" err="1"/>
+              <a:rPr b="1" dirty="0" err="1">
+                <a:solidFill>
+                  <a:srgbClr val="002060"/>
+                </a:solidFill>
+              </a:rPr>
               <a:t>Fonctionnalités</a:t>
             </a:r>
             <a:r>
-              <a:rPr dirty="0"/>
+              <a:rPr b="1" dirty="0">
+                <a:solidFill>
+                  <a:srgbClr val="002060"/>
+                </a:solidFill>
+              </a:rPr>
               <a:t> JavaScript</a:t>
             </a:r>
+            <a:endParaRPr dirty="0">
+              <a:solidFill>
+                <a:schemeClr val="tx2">
+                  <a:lumMod val="75000"/>
+                </a:schemeClr>
+              </a:solidFill>
+            </a:endParaRPr>
           </a:p>
         </p:txBody>
       </p:sp>
@@ -5835,525 +9606,810 @@
             <p:ph idx="1"/>
           </p:nvPr>
         </p:nvSpPr>
-        <p:spPr/>
+        <p:spPr>
+          <a:xfrm>
+            <a:off x="114300" y="2489200"/>
+            <a:ext cx="8013700" cy="4089400"/>
+          </a:xfrm>
+          <a:solidFill>
+            <a:srgbClr val="EDF2F9"/>
+          </a:solidFill>
+          <a:effectLst>
+            <a:softEdge rad="63500"/>
+          </a:effectLst>
+        </p:spPr>
         <p:txBody>
           <a:bodyPr>
-            <a:normAutofit fontScale="40000" lnSpcReduction="20000"/>
+            <a:normAutofit fontScale="25000" lnSpcReduction="20000"/>
           </a:bodyPr>
           <a:lstStyle/>
           <a:p>
-            <a:r>
-              <a:rPr sz="4200" b="1" dirty="0"/>
-              <a:t>Dark mode avec </a:t>
-            </a:r>
-            <a:r>
-              <a:rPr sz="4200" b="1" dirty="0" err="1" smtClean="0"/>
-              <a:t>localStorage</a:t>
-            </a:r>
-            <a:endParaRPr lang="en-US" sz="4200" b="1" dirty="0" smtClean="0"/>
-          </a:p>
-          <a:p>
-            <a:r>
-              <a:rPr lang="fr-FR" sz="4000" dirty="0" err="1">
-                <a:solidFill>
-                  <a:schemeClr val="accent4"/>
-                </a:solidFill>
-              </a:rPr>
-              <a:t>document</a:t>
-            </a:r>
-            <a:r>
-              <a:rPr lang="fr-FR" sz="4000" dirty="0" err="1">
-                <a:solidFill>
-                  <a:srgbClr val="FF0000"/>
+            <a:pPr marL="0" indent="0">
+              <a:buNone/>
+            </a:pPr>
+            <a:endParaRPr sz="4000" b="1" dirty="0">
+              <a:solidFill>
+                <a:srgbClr val="002060"/>
+              </a:solidFill>
+            </a:endParaRPr>
+          </a:p>
+          <a:p>
+            <a:pPr marL="0" indent="0">
+              <a:buNone/>
+            </a:pPr>
+            <a:r>
+              <a:rPr sz="7200" b="1" dirty="0" err="1">
+                <a:solidFill>
+                  <a:srgbClr val="002060"/>
+                </a:solidFill>
+              </a:rPr>
+              <a:t>Filtrage</a:t>
+            </a:r>
+            <a:r>
+              <a:rPr sz="7200" b="1" dirty="0">
+                <a:solidFill>
+                  <a:srgbClr val="002060"/>
+                </a:solidFill>
+              </a:rPr>
+              <a:t> </a:t>
+            </a:r>
+            <a:r>
+              <a:rPr sz="7200" b="1" dirty="0" err="1">
+                <a:solidFill>
+                  <a:srgbClr val="002060"/>
+                </a:solidFill>
+              </a:rPr>
+              <a:t>dynamique</a:t>
+            </a:r>
+            <a:r>
+              <a:rPr sz="7200" b="1" dirty="0">
+                <a:solidFill>
+                  <a:srgbClr val="002060"/>
+                </a:solidFill>
+              </a:rPr>
+              <a:t> des </a:t>
+            </a:r>
+            <a:r>
+              <a:rPr sz="7200" b="1" dirty="0" smtClean="0">
+                <a:solidFill>
+                  <a:srgbClr val="002060"/>
+                </a:solidFill>
+              </a:rPr>
+              <a:t>freelances</a:t>
+            </a:r>
+            <a:endParaRPr lang="en-US" sz="7200" b="1" dirty="0" smtClean="0">
+              <a:solidFill>
+                <a:srgbClr val="002060"/>
+              </a:solidFill>
+            </a:endParaRPr>
+          </a:p>
+          <a:p>
+            <a:pPr marL="0" indent="0">
+              <a:buNone/>
+            </a:pPr>
+            <a:r>
+              <a:rPr lang="en-US" sz="7200" dirty="0" err="1">
+                <a:solidFill>
+                  <a:srgbClr val="0070C0"/>
+                </a:solidFill>
+              </a:rPr>
+              <a:t>const</a:t>
+            </a:r>
+            <a:r>
+              <a:rPr lang="en-US" sz="7200" dirty="0">
+                <a:solidFill>
+                  <a:srgbClr val="0070C0"/>
+                </a:solidFill>
+              </a:rPr>
+              <a:t> cards = </a:t>
+            </a:r>
+            <a:r>
+              <a:rPr lang="en-US" sz="7200" dirty="0" err="1">
+                <a:solidFill>
+                  <a:srgbClr val="0070C0"/>
+                </a:solidFill>
+              </a:rPr>
+              <a:t>document.querySelectorAll</a:t>
+            </a:r>
+            <a:r>
+              <a:rPr lang="en-US" sz="7200" dirty="0">
+                <a:solidFill>
+                  <a:srgbClr val="0070C0"/>
+                </a:solidFill>
+              </a:rPr>
+              <a:t>(".freelance-card</a:t>
+            </a:r>
+            <a:r>
+              <a:rPr lang="en-US" sz="7200" dirty="0" smtClean="0">
+                <a:solidFill>
+                  <a:srgbClr val="0070C0"/>
+                </a:solidFill>
+              </a:rPr>
+              <a:t>");</a:t>
+            </a:r>
+            <a:r>
+              <a:rPr lang="en-US" sz="7200" dirty="0">
+                <a:solidFill>
+                  <a:srgbClr val="0070C0"/>
+                </a:solidFill>
+              </a:rPr>
+              <a:t/>
+            </a:r>
+            <a:br>
+              <a:rPr lang="en-US" sz="7200" dirty="0">
+                <a:solidFill>
+                  <a:srgbClr val="0070C0"/>
+                </a:solidFill>
+              </a:rPr>
+            </a:br>
+            <a:r>
+              <a:rPr lang="en-US" sz="7200" dirty="0">
+                <a:solidFill>
+                  <a:srgbClr val="0070C0"/>
+                </a:solidFill>
+              </a:rPr>
+              <a:t>function </a:t>
+            </a:r>
+            <a:r>
+              <a:rPr lang="en-US" sz="7200" dirty="0" err="1">
+                <a:solidFill>
+                  <a:srgbClr val="0070C0"/>
+                </a:solidFill>
+              </a:rPr>
+              <a:t>filterFreelancers</a:t>
+            </a:r>
+            <a:r>
+              <a:rPr lang="en-US" sz="7200" dirty="0">
+                <a:solidFill>
+                  <a:srgbClr val="0070C0"/>
+                </a:solidFill>
+              </a:rPr>
+              <a:t>(category) {</a:t>
+            </a:r>
+            <a:br>
+              <a:rPr lang="en-US" sz="7200" dirty="0">
+                <a:solidFill>
+                  <a:srgbClr val="0070C0"/>
+                </a:solidFill>
+              </a:rPr>
+            </a:br>
+            <a:r>
+              <a:rPr lang="en-US" sz="7200" dirty="0" err="1">
+                <a:solidFill>
+                  <a:srgbClr val="0070C0"/>
+                </a:solidFill>
+              </a:rPr>
+              <a:t>cards.forEach</a:t>
+            </a:r>
+            <a:r>
+              <a:rPr lang="en-US" sz="7200" dirty="0">
+                <a:solidFill>
+                  <a:srgbClr val="0070C0"/>
+                </a:solidFill>
+              </a:rPr>
+              <a:t>(card =&gt; {</a:t>
+            </a:r>
+            <a:endParaRPr lang="en-US" sz="7200" b="1" dirty="0" smtClean="0">
+              <a:solidFill>
+                <a:srgbClr val="0070C0"/>
+              </a:solidFill>
+            </a:endParaRPr>
+          </a:p>
+          <a:p>
+            <a:pPr marL="0" indent="0">
+              <a:buNone/>
+            </a:pPr>
+            <a:r>
+              <a:rPr lang="fr-FR" sz="7200" dirty="0">
+                <a:solidFill>
+                  <a:srgbClr val="0070C0"/>
+                </a:solidFill>
+              </a:rPr>
+              <a:t>if (</a:t>
+            </a:r>
+            <a:r>
+              <a:rPr lang="fr-FR" sz="7200" dirty="0" err="1">
+                <a:solidFill>
+                  <a:srgbClr val="0070C0"/>
+                </a:solidFill>
+              </a:rPr>
+              <a:t>filter</a:t>
+            </a:r>
+            <a:r>
+              <a:rPr lang="fr-FR" sz="7200" dirty="0">
+                <a:solidFill>
+                  <a:srgbClr val="0070C0"/>
+                </a:solidFill>
+              </a:rPr>
+              <a:t> === 'all' || </a:t>
+            </a:r>
+            <a:r>
+              <a:rPr lang="fr-FR" sz="7200" dirty="0" err="1">
+                <a:solidFill>
+                  <a:srgbClr val="0070C0"/>
+                </a:solidFill>
+              </a:rPr>
+              <a:t>filter</a:t>
+            </a:r>
+            <a:r>
+              <a:rPr lang="fr-FR" sz="7200" dirty="0">
+                <a:solidFill>
+                  <a:srgbClr val="0070C0"/>
+                </a:solidFill>
+              </a:rPr>
+              <a:t> === </a:t>
+            </a:r>
+            <a:r>
+              <a:rPr lang="fr-FR" sz="7200" dirty="0" err="1">
+                <a:solidFill>
+                  <a:srgbClr val="0070C0"/>
+                </a:solidFill>
+              </a:rPr>
+              <a:t>category</a:t>
+            </a:r>
+            <a:r>
+              <a:rPr lang="fr-FR" sz="7200" dirty="0">
+                <a:solidFill>
+                  <a:srgbClr val="0070C0"/>
+                </a:solidFill>
+              </a:rPr>
+              <a:t>) {</a:t>
+            </a:r>
+          </a:p>
+          <a:p>
+            <a:pPr marL="0" indent="0">
+              <a:buNone/>
+            </a:pPr>
+            <a:r>
+              <a:rPr lang="fr-FR" sz="7200" dirty="0">
+                <a:solidFill>
+                  <a:srgbClr val="0070C0"/>
+                </a:solidFill>
+              </a:rPr>
+              <a:t>    </a:t>
+            </a:r>
+            <a:r>
+              <a:rPr lang="fr-FR" sz="7200" dirty="0" err="1">
+                <a:solidFill>
+                  <a:srgbClr val="0070C0"/>
+                </a:solidFill>
+              </a:rPr>
+              <a:t>item.style.display</a:t>
+            </a:r>
+            <a:r>
+              <a:rPr lang="fr-FR" sz="7200" dirty="0">
+                <a:solidFill>
+                  <a:srgbClr val="0070C0"/>
+                </a:solidFill>
+              </a:rPr>
+              <a:t> = 'block';</a:t>
+            </a:r>
+          </a:p>
+          <a:p>
+            <a:pPr marL="0" indent="0">
+              <a:buNone/>
+            </a:pPr>
+            <a:r>
+              <a:rPr lang="fr-FR" sz="7200" dirty="0">
+                <a:solidFill>
+                  <a:srgbClr val="0070C0"/>
+                </a:solidFill>
+              </a:rPr>
+              <a:t>} </a:t>
+            </a:r>
+            <a:r>
+              <a:rPr lang="fr-FR" sz="7200" dirty="0" err="1">
+                <a:solidFill>
+                  <a:srgbClr val="0070C0"/>
+                </a:solidFill>
+              </a:rPr>
+              <a:t>else</a:t>
+            </a:r>
+            <a:r>
+              <a:rPr lang="fr-FR" sz="7200" dirty="0">
+                <a:solidFill>
+                  <a:srgbClr val="0070C0"/>
+                </a:solidFill>
+              </a:rPr>
+              <a:t> {</a:t>
+            </a:r>
+          </a:p>
+          <a:p>
+            <a:pPr marL="0" indent="0">
+              <a:buNone/>
+            </a:pPr>
+            <a:r>
+              <a:rPr lang="fr-FR" sz="7200" dirty="0">
+                <a:solidFill>
+                  <a:srgbClr val="0070C0"/>
+                </a:solidFill>
+              </a:rPr>
+              <a:t>    </a:t>
+            </a:r>
+            <a:r>
+              <a:rPr lang="fr-FR" sz="7200" dirty="0" err="1">
+                <a:solidFill>
+                  <a:srgbClr val="0070C0"/>
+                </a:solidFill>
+              </a:rPr>
+              <a:t>item.style.display</a:t>
+            </a:r>
+            <a:r>
+              <a:rPr lang="fr-FR" sz="7200" dirty="0">
+                <a:solidFill>
+                  <a:srgbClr val="0070C0"/>
+                </a:solidFill>
+              </a:rPr>
+              <a:t> = </a:t>
+            </a:r>
+            <a:r>
+              <a:rPr lang="fr-FR" sz="7200" dirty="0" smtClean="0">
+                <a:solidFill>
+                  <a:srgbClr val="0070C0"/>
+                </a:solidFill>
+              </a:rPr>
+              <a:t>'none';</a:t>
+            </a:r>
+            <a:endParaRPr lang="fr-FR" sz="7200" dirty="0">
+              <a:solidFill>
+                <a:srgbClr val="0070C0"/>
+              </a:solidFill>
+            </a:endParaRPr>
+          </a:p>
+          <a:p>
+            <a:pPr marL="0" indent="0">
+              <a:buNone/>
+            </a:pPr>
+            <a:r>
+              <a:rPr lang="fr-FR" sz="7200" dirty="0" smtClean="0">
+                <a:solidFill>
+                  <a:srgbClr val="0070C0"/>
+                </a:solidFill>
+              </a:rPr>
+              <a:t>}</a:t>
+            </a:r>
+          </a:p>
+          <a:p>
+            <a:pPr marL="0" indent="0">
+              <a:buNone/>
+            </a:pPr>
+            <a:r>
+              <a:rPr lang="en-US" sz="7200" dirty="0" smtClean="0">
+                <a:solidFill>
+                  <a:srgbClr val="0070C0"/>
+                </a:solidFill>
+              </a:rPr>
+              <a:t>});</a:t>
+            </a:r>
+          </a:p>
+          <a:p>
+            <a:pPr marL="0" indent="0">
+              <a:buNone/>
+            </a:pPr>
+            <a:r>
+              <a:rPr lang="en-US" sz="7200" dirty="0">
+                <a:solidFill>
+                  <a:srgbClr val="0070C0"/>
+                </a:solidFill>
+              </a:rPr>
+              <a:t>}</a:t>
+            </a:r>
+            <a:endParaRPr lang="fr-FR" sz="7200" dirty="0" smtClean="0">
+              <a:solidFill>
+                <a:srgbClr val="0070C0"/>
+              </a:solidFill>
+            </a:endParaRPr>
+          </a:p>
+          <a:p>
+            <a:pPr marL="0" indent="0">
+              <a:buNone/>
+            </a:pPr>
+            <a:r>
+              <a:rPr lang="en-US" sz="7200" b="1" dirty="0" err="1" smtClean="0">
+                <a:solidFill>
+                  <a:srgbClr val="002060"/>
+                </a:solidFill>
+              </a:rPr>
+              <a:t>Logique</a:t>
+            </a:r>
+            <a:r>
+              <a:rPr lang="en-US" sz="7200" b="1" dirty="0" smtClean="0">
+                <a:solidFill>
+                  <a:srgbClr val="002060"/>
+                </a:solidFill>
+              </a:rPr>
+              <a:t>: </a:t>
+            </a:r>
+            <a:r>
+              <a:rPr lang="fr-FR" sz="7200" dirty="0" smtClean="0">
+                <a:solidFill>
+                  <a:schemeClr val="tx1">
+                    <a:lumMod val="85000"/>
+                    <a:lumOff val="15000"/>
+                  </a:schemeClr>
+                </a:solidFill>
+              </a:rPr>
+              <a:t>Cette </a:t>
+            </a:r>
+            <a:r>
+              <a:rPr lang="fr-FR" sz="7200" dirty="0">
+                <a:solidFill>
+                  <a:schemeClr val="tx1">
+                    <a:lumMod val="85000"/>
+                    <a:lumOff val="15000"/>
+                  </a:schemeClr>
+                </a:solidFill>
+              </a:rPr>
+              <a:t>fonctionnalité permet d’afficher dynamiquement les freelances selon la catégorie choisie par l’utilisateur.</a:t>
+            </a:r>
+            <a:br>
+              <a:rPr lang="fr-FR" sz="7200" dirty="0">
+                <a:solidFill>
+                  <a:schemeClr val="tx1">
+                    <a:lumMod val="85000"/>
+                    <a:lumOff val="15000"/>
+                  </a:schemeClr>
+                </a:solidFill>
+              </a:rPr>
+            </a:br>
+            <a:r>
+              <a:rPr lang="fr-FR" sz="7200" dirty="0">
+                <a:solidFill>
+                  <a:schemeClr val="tx1">
+                    <a:lumMod val="85000"/>
+                    <a:lumOff val="15000"/>
+                  </a:schemeClr>
+                </a:solidFill>
+              </a:rPr>
+              <a:t>Lorsqu’un filtre est sélectionné, JavaScript compare la catégorie du bouton avec celle des cartes freelances afin d’afficher uniquement les profils correspondants</a:t>
+            </a:r>
+            <a:r>
+              <a:rPr lang="fr-FR" sz="7200" dirty="0" smtClean="0">
+                <a:solidFill>
+                  <a:schemeClr val="tx1">
+                    <a:lumMod val="85000"/>
+                    <a:lumOff val="15000"/>
+                  </a:schemeClr>
                 </a:solidFill>
               </a:rPr>
               <a:t>.</a:t>
             </a:r>
-            <a:r>
-              <a:rPr lang="fr-FR" sz="4000" dirty="0" err="1"/>
-              <a:t>body.classList.toggle</a:t>
-            </a:r>
-            <a:r>
-              <a:rPr lang="fr-FR" sz="4000" dirty="0"/>
-              <a:t>(</a:t>
-            </a:r>
-            <a:r>
-              <a:rPr lang="fr-FR" sz="4000" dirty="0">
-                <a:solidFill>
-                  <a:srgbClr val="00B050"/>
-                </a:solidFill>
-              </a:rPr>
-              <a:t>"</a:t>
-            </a:r>
-            <a:r>
-              <a:rPr lang="fr-FR" sz="4000" dirty="0" err="1">
-                <a:solidFill>
-                  <a:srgbClr val="00B050"/>
-                </a:solidFill>
+            <a:endParaRPr lang="en-US" sz="7200" b="1" dirty="0" smtClean="0">
+              <a:solidFill>
+                <a:schemeClr val="tx1">
+                  <a:lumMod val="85000"/>
+                  <a:lumOff val="15000"/>
+                </a:schemeClr>
+              </a:solidFill>
+            </a:endParaRPr>
+          </a:p>
+        </p:txBody>
+      </p:sp>
+      <p:sp>
+        <p:nvSpPr>
+          <p:cNvPr id="7" name="Rectangle 3"/>
+          <p:cNvSpPr>
+            <a:spLocks noChangeArrowheads="1"/>
+          </p:cNvSpPr>
+          <p:nvPr/>
+        </p:nvSpPr>
+        <p:spPr bwMode="auto">
+          <a:xfrm>
+            <a:off x="114300" y="1081774"/>
+            <a:ext cx="8013700" cy="1231106"/>
+          </a:xfrm>
+          <a:prstGeom prst="rect">
+            <a:avLst/>
+          </a:prstGeom>
+          <a:solidFill>
+            <a:srgbClr val="EDF2F9"/>
+          </a:solidFill>
+          <a:ln>
+            <a:noFill/>
+          </a:ln>
+          <a:effectLst>
+            <a:softEdge rad="63500"/>
+          </a:effectLst>
+        </p:spPr>
+        <p:txBody>
+          <a:bodyPr vert="horz" wrap="square" lIns="0" tIns="0" rIns="0" bIns="0" numCol="1" anchor="ctr" anchorCtr="0" compatLnSpc="1">
+            <a:prstTxWarp prst="textNoShape">
+              <a:avLst/>
+            </a:prstTxWarp>
+            <a:spAutoFit/>
+          </a:bodyPr>
+          <a:lstStyle>
+            <a:lvl1pPr eaLnBrk="0" fontAlgn="base" hangingPunct="0">
+              <a:spcBef>
+                <a:spcPct val="0"/>
+              </a:spcBef>
+              <a:spcAft>
+                <a:spcPct val="0"/>
+              </a:spcAft>
+              <a:defRPr>
+                <a:solidFill>
+                  <a:schemeClr val="tx1"/>
+                </a:solidFill>
+                <a:latin typeface="Arial" panose="020B0604020202020204" pitchFamily="34" charset="0"/>
+              </a:defRPr>
+            </a:lvl1pPr>
+            <a:lvl2pPr eaLnBrk="0" fontAlgn="base" hangingPunct="0">
+              <a:spcBef>
+                <a:spcPct val="0"/>
+              </a:spcBef>
+              <a:spcAft>
+                <a:spcPct val="0"/>
+              </a:spcAft>
+              <a:defRPr>
+                <a:solidFill>
+                  <a:schemeClr val="tx1"/>
+                </a:solidFill>
+                <a:latin typeface="Arial" panose="020B0604020202020204" pitchFamily="34" charset="0"/>
+              </a:defRPr>
+            </a:lvl2pPr>
+            <a:lvl3pPr eaLnBrk="0" fontAlgn="base" hangingPunct="0">
+              <a:spcBef>
+                <a:spcPct val="0"/>
+              </a:spcBef>
+              <a:spcAft>
+                <a:spcPct val="0"/>
+              </a:spcAft>
+              <a:defRPr>
+                <a:solidFill>
+                  <a:schemeClr val="tx1"/>
+                </a:solidFill>
+                <a:latin typeface="Arial" panose="020B0604020202020204" pitchFamily="34" charset="0"/>
+              </a:defRPr>
+            </a:lvl3pPr>
+            <a:lvl4pPr eaLnBrk="0" fontAlgn="base" hangingPunct="0">
+              <a:spcBef>
+                <a:spcPct val="0"/>
+              </a:spcBef>
+              <a:spcAft>
+                <a:spcPct val="0"/>
+              </a:spcAft>
+              <a:defRPr>
+                <a:solidFill>
+                  <a:schemeClr val="tx1"/>
+                </a:solidFill>
+                <a:latin typeface="Arial" panose="020B0604020202020204" pitchFamily="34" charset="0"/>
+              </a:defRPr>
+            </a:lvl4pPr>
+            <a:lvl5pPr eaLnBrk="0" fontAlgn="base" hangingPunct="0">
+              <a:spcBef>
+                <a:spcPct val="0"/>
+              </a:spcBef>
+              <a:spcAft>
+                <a:spcPct val="0"/>
+              </a:spcAft>
+              <a:defRPr>
+                <a:solidFill>
+                  <a:schemeClr val="tx1"/>
+                </a:solidFill>
+                <a:latin typeface="Arial" panose="020B0604020202020204" pitchFamily="34" charset="0"/>
+              </a:defRPr>
+            </a:lvl5pPr>
+            <a:lvl6pPr eaLnBrk="0" fontAlgn="base" hangingPunct="0">
+              <a:spcBef>
+                <a:spcPct val="0"/>
+              </a:spcBef>
+              <a:spcAft>
+                <a:spcPct val="0"/>
+              </a:spcAft>
+              <a:defRPr>
+                <a:solidFill>
+                  <a:schemeClr val="tx1"/>
+                </a:solidFill>
+                <a:latin typeface="Arial" panose="020B0604020202020204" pitchFamily="34" charset="0"/>
+              </a:defRPr>
+            </a:lvl6pPr>
+            <a:lvl7pPr eaLnBrk="0" fontAlgn="base" hangingPunct="0">
+              <a:spcBef>
+                <a:spcPct val="0"/>
+              </a:spcBef>
+              <a:spcAft>
+                <a:spcPct val="0"/>
+              </a:spcAft>
+              <a:defRPr>
+                <a:solidFill>
+                  <a:schemeClr val="tx1"/>
+                </a:solidFill>
+                <a:latin typeface="Arial" panose="020B0604020202020204" pitchFamily="34" charset="0"/>
+              </a:defRPr>
+            </a:lvl7pPr>
+            <a:lvl8pPr eaLnBrk="0" fontAlgn="base" hangingPunct="0">
+              <a:spcBef>
+                <a:spcPct val="0"/>
+              </a:spcBef>
+              <a:spcAft>
+                <a:spcPct val="0"/>
+              </a:spcAft>
+              <a:defRPr>
+                <a:solidFill>
+                  <a:schemeClr val="tx1"/>
+                </a:solidFill>
+                <a:latin typeface="Arial" panose="020B0604020202020204" pitchFamily="34" charset="0"/>
+              </a:defRPr>
+            </a:lvl8pPr>
+            <a:lvl9pPr eaLnBrk="0" fontAlgn="base" hangingPunct="0">
+              <a:spcBef>
+                <a:spcPct val="0"/>
+              </a:spcBef>
+              <a:spcAft>
+                <a:spcPct val="0"/>
+              </a:spcAft>
+              <a:defRPr>
+                <a:solidFill>
+                  <a:schemeClr val="tx1"/>
+                </a:solidFill>
+                <a:latin typeface="Arial" panose="020B0604020202020204" pitchFamily="34" charset="0"/>
+              </a:defRPr>
+            </a:lvl9pPr>
+          </a:lstStyle>
+          <a:p>
+            <a:pPr marL="0" marR="0" lvl="0" indent="0" algn="l" defTabSz="914400" rtl="0" eaLnBrk="0" fontAlgn="base" latinLnBrk="0" hangingPunct="0">
+              <a:lnSpc>
+                <a:spcPct val="100000"/>
+              </a:lnSpc>
+              <a:spcBef>
+                <a:spcPct val="0"/>
+              </a:spcBef>
+              <a:spcAft>
+                <a:spcPct val="0"/>
+              </a:spcAft>
+              <a:buClrTx/>
+              <a:buSzTx/>
+              <a:buFontTx/>
+              <a:buNone/>
+              <a:tabLst/>
+            </a:pPr>
+            <a:r>
+              <a:rPr kumimoji="0" lang="fr-FR" altLang="fr-FR" sz="2000" b="1" i="0" u="none" strike="noStrike" cap="none" normalizeH="0" baseline="0" dirty="0" smtClean="0">
+                <a:ln>
+                  <a:noFill/>
+                </a:ln>
+                <a:solidFill>
+                  <a:srgbClr val="002244"/>
+                </a:solidFill>
+                <a:effectLst/>
+                <a:latin typeface="+mn-lt"/>
+              </a:rPr>
+              <a:t>Dark mode</a:t>
+            </a:r>
+          </a:p>
+          <a:p>
+            <a:pPr marL="0" marR="0" lvl="0" indent="0" algn="l" defTabSz="914400" rtl="0" eaLnBrk="0" fontAlgn="base" latinLnBrk="0" hangingPunct="0">
+              <a:lnSpc>
+                <a:spcPct val="100000"/>
+              </a:lnSpc>
+              <a:spcBef>
+                <a:spcPct val="0"/>
+              </a:spcBef>
+              <a:spcAft>
+                <a:spcPct val="0"/>
+              </a:spcAft>
+              <a:buClrTx/>
+              <a:buSzTx/>
+              <a:buFontTx/>
+              <a:buNone/>
+              <a:tabLst/>
+            </a:pPr>
+            <a:r>
+              <a:rPr kumimoji="0" lang="fr-FR" altLang="fr-FR" sz="2000" b="0" i="0" u="none" strike="noStrike" cap="none" normalizeH="0" baseline="0" dirty="0" err="1" smtClean="0">
+                <a:ln>
+                  <a:noFill/>
+                </a:ln>
+                <a:solidFill>
+                  <a:srgbClr val="475569"/>
+                </a:solidFill>
+                <a:effectLst/>
+                <a:latin typeface="+mn-lt"/>
+              </a:rPr>
+              <a:t>document.body.classList.toggle</a:t>
+            </a:r>
+            <a:r>
+              <a:rPr kumimoji="0" lang="fr-FR" altLang="fr-FR" sz="2000" b="0" i="0" u="none" strike="noStrike" cap="none" normalizeH="0" baseline="0" dirty="0" smtClean="0">
+                <a:ln>
+                  <a:noFill/>
+                </a:ln>
+                <a:solidFill>
+                  <a:srgbClr val="475569"/>
+                </a:solidFill>
+                <a:effectLst/>
+                <a:latin typeface="+mn-lt"/>
+              </a:rPr>
+              <a:t>("</a:t>
+            </a:r>
+            <a:r>
+              <a:rPr kumimoji="0" lang="fr-FR" altLang="fr-FR" sz="2000" b="0" i="0" u="none" strike="noStrike" cap="none" normalizeH="0" baseline="0" dirty="0" err="1" smtClean="0">
+                <a:ln>
+                  <a:noFill/>
+                </a:ln>
+                <a:solidFill>
+                  <a:srgbClr val="475569"/>
+                </a:solidFill>
+                <a:effectLst/>
+                <a:latin typeface="+mn-lt"/>
               </a:rPr>
               <a:t>dark</a:t>
             </a:r>
             <a:r>
-              <a:rPr lang="fr-FR" sz="4000" dirty="0">
-                <a:solidFill>
-                  <a:srgbClr val="00B050"/>
-                </a:solidFill>
-              </a:rPr>
-              <a:t>-mode</a:t>
-            </a:r>
-            <a:r>
-              <a:rPr lang="fr-FR" sz="4000" dirty="0" smtClean="0">
-                <a:solidFill>
-                  <a:srgbClr val="00B050"/>
-                </a:solidFill>
-              </a:rPr>
-              <a:t>"</a:t>
-            </a:r>
-            <a:r>
-              <a:rPr lang="fr-FR" sz="4000" dirty="0" smtClean="0"/>
-              <a:t>); </a:t>
-            </a:r>
-          </a:p>
-          <a:p>
-            <a:r>
-              <a:rPr lang="fr-FR" sz="4000" b="1" u="sng" dirty="0" smtClean="0"/>
+              <a:rPr kumimoji="0" lang="fr-FR" altLang="fr-FR" sz="2000" b="0" i="0" u="none" strike="noStrike" cap="none" normalizeH="0" baseline="0" dirty="0" smtClean="0">
+                <a:ln>
+                  <a:noFill/>
+                </a:ln>
+                <a:solidFill>
+                  <a:srgbClr val="475569"/>
+                </a:solidFill>
+                <a:effectLst/>
+                <a:latin typeface="+mn-lt"/>
+              </a:rPr>
+              <a:t>-mode");</a:t>
+            </a:r>
+            <a:endParaRPr kumimoji="0" lang="fr-FR" altLang="fr-FR" sz="2000" b="0" i="0" u="none" strike="noStrike" cap="none" normalizeH="0" baseline="0" dirty="0" smtClean="0">
+              <a:ln>
+                <a:noFill/>
+              </a:ln>
+              <a:solidFill>
+                <a:schemeClr val="tx1"/>
+              </a:solidFill>
+              <a:effectLst/>
+              <a:latin typeface="+mn-lt"/>
+            </a:endParaRPr>
+          </a:p>
+          <a:p>
+            <a:pPr marL="0" marR="0" lvl="0" indent="0" algn="l" defTabSz="914400" rtl="0" eaLnBrk="0" fontAlgn="base" latinLnBrk="0" hangingPunct="0">
+              <a:lnSpc>
+                <a:spcPct val="100000"/>
+              </a:lnSpc>
+              <a:spcBef>
+                <a:spcPct val="0"/>
+              </a:spcBef>
+              <a:spcAft>
+                <a:spcPct val="0"/>
+              </a:spcAft>
+              <a:buClrTx/>
+              <a:buSzTx/>
+              <a:buFontTx/>
+              <a:buNone/>
+              <a:tabLst/>
+            </a:pPr>
+            <a:r>
+              <a:rPr kumimoji="0" lang="fr-FR" altLang="fr-FR" sz="2000" b="1" i="0" u="none" strike="noStrike" cap="none" normalizeH="0" baseline="0" dirty="0" smtClean="0">
+                <a:ln>
+                  <a:noFill/>
+                </a:ln>
+                <a:solidFill>
+                  <a:srgbClr val="475569"/>
+                </a:solidFill>
+                <a:effectLst/>
+                <a:latin typeface="+mn-lt"/>
+              </a:rPr>
               <a:t>Logique: </a:t>
             </a:r>
             <a:r>
-              <a:rPr lang="fr-FR" sz="4000" dirty="0" smtClean="0"/>
-              <a:t>Cette fonction permet d’activer ou dé</a:t>
-            </a:r>
-            <a:r>
-              <a:rPr lang="en-US" sz="4000" dirty="0" err="1" smtClean="0"/>
-              <a:t>sactiver</a:t>
-            </a:r>
-            <a:r>
-              <a:rPr lang="en-US" sz="4000" dirty="0" smtClean="0"/>
-              <a:t> le mode somber </a:t>
-            </a:r>
-            <a:r>
-              <a:rPr lang="en-US" sz="4000" dirty="0" err="1" smtClean="0"/>
-              <a:t>dynamiquement</a:t>
-            </a:r>
-            <a:r>
-              <a:rPr lang="en-US" sz="4000" dirty="0" smtClean="0"/>
-              <a:t> </a:t>
-            </a:r>
-            <a:r>
-              <a:rPr lang="en-US" sz="4000" dirty="0" err="1" smtClean="0"/>
-              <a:t>en</a:t>
-            </a:r>
-            <a:r>
-              <a:rPr lang="en-US" sz="4000" dirty="0" smtClean="0"/>
-              <a:t> </a:t>
-            </a:r>
-            <a:r>
-              <a:rPr lang="en-US" sz="4000" dirty="0" err="1" smtClean="0"/>
-              <a:t>ajoutant</a:t>
-            </a:r>
-            <a:r>
-              <a:rPr lang="en-US" sz="4000" dirty="0" smtClean="0"/>
-              <a:t> </a:t>
-            </a:r>
-            <a:r>
-              <a:rPr lang="en-US" sz="4000" dirty="0" err="1" smtClean="0"/>
-              <a:t>une</a:t>
-            </a:r>
-            <a:r>
-              <a:rPr lang="en-US" sz="4000" dirty="0" smtClean="0"/>
-              <a:t> </a:t>
-            </a:r>
-            <a:r>
-              <a:rPr lang="en-US" sz="4000" dirty="0" err="1" smtClean="0"/>
-              <a:t>classe</a:t>
-            </a:r>
-            <a:r>
-              <a:rPr lang="en-US" sz="4000" dirty="0" smtClean="0"/>
-              <a:t> CSS au body</a:t>
-            </a:r>
-            <a:endParaRPr sz="4000" dirty="0"/>
-          </a:p>
-          <a:p>
-            <a:r>
-              <a:rPr sz="4200" b="1" dirty="0" err="1"/>
-              <a:t>Filtrage</a:t>
-            </a:r>
-            <a:r>
-              <a:rPr sz="4200" b="1" dirty="0"/>
-              <a:t> </a:t>
-            </a:r>
-            <a:r>
-              <a:rPr sz="4200" b="1" dirty="0" err="1"/>
-              <a:t>dynamique</a:t>
-            </a:r>
-            <a:r>
-              <a:rPr sz="4200" b="1" dirty="0"/>
-              <a:t> des </a:t>
-            </a:r>
-            <a:r>
-              <a:rPr sz="4200" b="1" dirty="0" smtClean="0"/>
-              <a:t>freelances</a:t>
-            </a:r>
-            <a:endParaRPr lang="en-US" sz="4200" b="1" dirty="0" smtClean="0"/>
-          </a:p>
-          <a:p>
-            <a:r>
-              <a:rPr lang="en-US" sz="4000" dirty="0" err="1">
-                <a:solidFill>
-                  <a:srgbClr val="FF0000"/>
-                </a:solidFill>
-              </a:rPr>
-              <a:t>const</a:t>
-            </a:r>
-            <a:r>
-              <a:rPr lang="en-US" sz="4000" dirty="0"/>
-              <a:t> cards </a:t>
-            </a:r>
-            <a:r>
-              <a:rPr lang="en-US" sz="4000" dirty="0">
-                <a:solidFill>
-                  <a:srgbClr val="FF0000"/>
-                </a:solidFill>
-              </a:rPr>
-              <a:t>=</a:t>
-            </a:r>
-            <a:r>
-              <a:rPr lang="en-US" sz="4000" dirty="0"/>
-              <a:t> </a:t>
-            </a:r>
-            <a:r>
-              <a:rPr lang="en-US" sz="4000" dirty="0" err="1">
-                <a:solidFill>
-                  <a:srgbClr val="7030A0"/>
-                </a:solidFill>
-              </a:rPr>
-              <a:t>document</a:t>
-            </a:r>
-            <a:r>
-              <a:rPr lang="en-US" sz="4000" dirty="0" err="1"/>
-              <a:t>.querySelectorAll</a:t>
-            </a:r>
-            <a:r>
-              <a:rPr lang="en-US" sz="4000" dirty="0"/>
-              <a:t>("</a:t>
-            </a:r>
-            <a:r>
-              <a:rPr lang="en-US" sz="4000" dirty="0">
-                <a:solidFill>
-                  <a:srgbClr val="00B050"/>
-                </a:solidFill>
-              </a:rPr>
-              <a:t>.freelance-card</a:t>
-            </a:r>
-            <a:r>
-              <a:rPr lang="en-US" sz="4000" dirty="0" smtClean="0"/>
-              <a:t>");</a:t>
-            </a:r>
-            <a:r>
-              <a:rPr lang="en-US" sz="4000" dirty="0"/>
-              <a:t/>
-            </a:r>
-            <a:br>
-              <a:rPr lang="en-US" sz="4000" dirty="0"/>
-            </a:br>
-            <a:r>
-              <a:rPr lang="en-US" sz="4000" dirty="0">
-                <a:solidFill>
-                  <a:srgbClr val="FF0000"/>
-                </a:solidFill>
-              </a:rPr>
-              <a:t>function</a:t>
-            </a:r>
-            <a:r>
-              <a:rPr lang="en-US" sz="4000" dirty="0"/>
-              <a:t> </a:t>
-            </a:r>
-            <a:r>
-              <a:rPr lang="en-US" sz="4000" dirty="0" err="1">
-                <a:solidFill>
-                  <a:srgbClr val="7030A0"/>
-                </a:solidFill>
-              </a:rPr>
-              <a:t>filterFreelancers</a:t>
-            </a:r>
-            <a:r>
-              <a:rPr lang="en-US" sz="4000" dirty="0"/>
-              <a:t>(</a:t>
-            </a:r>
-            <a:r>
-              <a:rPr lang="en-US" sz="4000" dirty="0">
-                <a:solidFill>
-                  <a:srgbClr val="7030A0"/>
-                </a:solidFill>
-              </a:rPr>
-              <a:t>category</a:t>
-            </a:r>
-            <a:r>
-              <a:rPr lang="en-US" sz="4000" dirty="0"/>
-              <a:t>) {</a:t>
-            </a:r>
-            <a:br>
-              <a:rPr lang="en-US" sz="4000" dirty="0"/>
-            </a:br>
-            <a:r>
-              <a:rPr lang="en-US" sz="4000" dirty="0" err="1"/>
-              <a:t>cards.forEach</a:t>
-            </a:r>
-            <a:r>
-              <a:rPr lang="en-US" sz="4000" dirty="0"/>
-              <a:t>(card =&gt; {</a:t>
-            </a:r>
-            <a:endParaRPr lang="en-US" sz="4000" b="1" dirty="0" smtClean="0"/>
-          </a:p>
-          <a:p>
-            <a:r>
-              <a:rPr lang="fr-FR" sz="4000" dirty="0">
-                <a:solidFill>
-                  <a:srgbClr val="FF0000"/>
-                </a:solidFill>
-              </a:rPr>
-              <a:t>if </a:t>
-            </a:r>
-            <a:r>
-              <a:rPr lang="fr-FR" sz="4000" dirty="0"/>
-              <a:t>(</a:t>
-            </a:r>
-            <a:r>
-              <a:rPr lang="fr-FR" sz="4000" dirty="0" err="1">
-                <a:solidFill>
-                  <a:schemeClr val="accent4"/>
-                </a:solidFill>
-              </a:rPr>
-              <a:t>filter</a:t>
-            </a:r>
-            <a:r>
-              <a:rPr lang="fr-FR" sz="4000" dirty="0"/>
-              <a:t> </a:t>
-            </a:r>
-            <a:r>
-              <a:rPr lang="fr-FR" sz="4000" dirty="0">
-                <a:solidFill>
-                  <a:srgbClr val="FF0000"/>
-                </a:solidFill>
-              </a:rPr>
-              <a:t>===</a:t>
-            </a:r>
-            <a:r>
-              <a:rPr lang="fr-FR" sz="4000" dirty="0"/>
-              <a:t> </a:t>
-            </a:r>
-            <a:r>
-              <a:rPr lang="fr-FR" sz="4000" dirty="0">
-                <a:solidFill>
-                  <a:srgbClr val="00B050"/>
-                </a:solidFill>
-              </a:rPr>
-              <a:t>'all' </a:t>
-            </a:r>
-            <a:r>
-              <a:rPr lang="fr-FR" sz="4000" dirty="0">
-                <a:solidFill>
-                  <a:srgbClr val="FF0000"/>
-                </a:solidFill>
-              </a:rPr>
-              <a:t>||</a:t>
-            </a:r>
-            <a:r>
-              <a:rPr lang="fr-FR" sz="4000" dirty="0"/>
-              <a:t> </a:t>
-            </a:r>
-            <a:r>
-              <a:rPr lang="fr-FR" sz="4000" dirty="0" err="1">
-                <a:solidFill>
-                  <a:schemeClr val="accent4"/>
-                </a:solidFill>
-              </a:rPr>
-              <a:t>filter</a:t>
-            </a:r>
-            <a:r>
-              <a:rPr lang="fr-FR" sz="4000" dirty="0"/>
-              <a:t> </a:t>
-            </a:r>
-            <a:r>
-              <a:rPr lang="fr-FR" sz="4000" dirty="0">
-                <a:solidFill>
-                  <a:srgbClr val="FF0000"/>
-                </a:solidFill>
-              </a:rPr>
-              <a:t>===</a:t>
-            </a:r>
-            <a:r>
-              <a:rPr lang="fr-FR" sz="4000" dirty="0"/>
-              <a:t> </a:t>
-            </a:r>
-            <a:r>
-              <a:rPr lang="fr-FR" sz="4000" dirty="0" err="1">
-                <a:solidFill>
-                  <a:schemeClr val="accent4"/>
-                </a:solidFill>
-              </a:rPr>
-              <a:t>category</a:t>
-            </a:r>
-            <a:r>
-              <a:rPr lang="fr-FR" sz="4000" dirty="0"/>
-              <a:t>) {</a:t>
-            </a:r>
-          </a:p>
-          <a:p>
-            <a:r>
-              <a:rPr lang="fr-FR" sz="4000" dirty="0"/>
-              <a:t>    </a:t>
-            </a:r>
-            <a:r>
-              <a:rPr lang="fr-FR" sz="4000" dirty="0" err="1">
-                <a:solidFill>
-                  <a:schemeClr val="accent4"/>
-                </a:solidFill>
-              </a:rPr>
-              <a:t>item</a:t>
-            </a:r>
-            <a:r>
-              <a:rPr lang="fr-FR" sz="4000" dirty="0" err="1"/>
-              <a:t>.style.display</a:t>
-            </a:r>
-            <a:r>
-              <a:rPr lang="fr-FR" sz="4000" dirty="0"/>
-              <a:t> </a:t>
-            </a:r>
-            <a:r>
-              <a:rPr lang="fr-FR" sz="4000" dirty="0">
-                <a:solidFill>
-                  <a:srgbClr val="FF0000"/>
-                </a:solidFill>
-              </a:rPr>
-              <a:t>=</a:t>
-            </a:r>
-            <a:r>
-              <a:rPr lang="fr-FR" sz="4000" dirty="0">
-                <a:solidFill>
-                  <a:srgbClr val="00B050"/>
-                </a:solidFill>
-              </a:rPr>
-              <a:t> 'block'</a:t>
-            </a:r>
-            <a:r>
-              <a:rPr lang="fr-FR" sz="4000" dirty="0"/>
-              <a:t>;</a:t>
-            </a:r>
-          </a:p>
-          <a:p>
-            <a:r>
-              <a:rPr lang="fr-FR" sz="4000" dirty="0"/>
-              <a:t>} </a:t>
-            </a:r>
-            <a:r>
-              <a:rPr lang="fr-FR" sz="4000" dirty="0" err="1">
-                <a:solidFill>
-                  <a:srgbClr val="FF0000"/>
-                </a:solidFill>
-              </a:rPr>
-              <a:t>else</a:t>
-            </a:r>
-            <a:r>
-              <a:rPr lang="fr-FR" sz="4000" dirty="0"/>
-              <a:t> {</a:t>
-            </a:r>
-          </a:p>
-          <a:p>
-            <a:r>
-              <a:rPr lang="fr-FR" sz="4000" dirty="0"/>
-              <a:t>    </a:t>
-            </a:r>
-            <a:r>
-              <a:rPr lang="fr-FR" sz="4000" dirty="0" err="1">
-                <a:solidFill>
-                  <a:schemeClr val="accent4"/>
-                </a:solidFill>
-              </a:rPr>
-              <a:t>item</a:t>
-            </a:r>
-            <a:r>
-              <a:rPr lang="fr-FR" sz="4000" dirty="0" err="1"/>
-              <a:t>.style.display</a:t>
-            </a:r>
-            <a:r>
-              <a:rPr lang="fr-FR" sz="4000" dirty="0"/>
-              <a:t> </a:t>
-            </a:r>
-            <a:r>
-              <a:rPr lang="fr-FR" sz="4000" dirty="0">
-                <a:solidFill>
-                  <a:srgbClr val="FF0000"/>
-                </a:solidFill>
-              </a:rPr>
-              <a:t>=</a:t>
-            </a:r>
-            <a:r>
-              <a:rPr lang="fr-FR" sz="4000" dirty="0"/>
-              <a:t> </a:t>
-            </a:r>
-            <a:r>
-              <a:rPr lang="fr-FR" sz="4000" dirty="0" smtClean="0">
-                <a:solidFill>
-                  <a:srgbClr val="00B050"/>
-                </a:solidFill>
-              </a:rPr>
-              <a:t>'none'</a:t>
-            </a:r>
-            <a:r>
-              <a:rPr lang="fr-FR" sz="4000" dirty="0" smtClean="0"/>
-              <a:t>;</a:t>
-            </a:r>
-            <a:endParaRPr lang="fr-FR" sz="4000" dirty="0"/>
-          </a:p>
-          <a:p>
-            <a:r>
-              <a:rPr lang="fr-FR" sz="4000" dirty="0" smtClean="0"/>
-              <a:t>}</a:t>
-            </a:r>
-          </a:p>
-          <a:p>
-            <a:r>
-              <a:rPr lang="en-US" sz="4000" dirty="0" smtClean="0"/>
-              <a:t>});</a:t>
-            </a:r>
-          </a:p>
-          <a:p>
-            <a:r>
-              <a:rPr lang="en-US" sz="4000" dirty="0"/>
-              <a:t>}</a:t>
-            </a:r>
-            <a:endParaRPr lang="fr-FR" sz="4000" dirty="0" smtClean="0"/>
-          </a:p>
-          <a:p>
-            <a:r>
-              <a:rPr lang="en-US" sz="4200" b="1" u="sng" dirty="0" err="1" smtClean="0"/>
-              <a:t>Logique</a:t>
-            </a:r>
-            <a:r>
-              <a:rPr lang="en-US" sz="4200" b="1" u="sng" dirty="0" smtClean="0"/>
-              <a:t>: </a:t>
-            </a:r>
-            <a:r>
-              <a:rPr lang="fr-FR" sz="4200" dirty="0" smtClean="0"/>
-              <a:t>Cette </a:t>
-            </a:r>
-            <a:r>
-              <a:rPr lang="fr-FR" sz="4200" dirty="0"/>
-              <a:t>fonctionnalité permet d’afficher dynamiquement les freelances selon la catégorie choisie par l’utilisateur.</a:t>
-            </a:r>
-            <a:br>
-              <a:rPr lang="fr-FR" sz="4200" dirty="0"/>
-            </a:br>
-            <a:r>
-              <a:rPr lang="fr-FR" sz="4200" dirty="0"/>
-              <a:t>Lorsqu’un filtre est sélectionné, JavaScript compare la catégorie du bouton avec celle des cartes freelances afin d’afficher uniquement les profils correspondants</a:t>
-            </a:r>
-            <a:r>
-              <a:rPr lang="fr-FR" sz="4200" dirty="0" smtClean="0"/>
-              <a:t>.</a:t>
-            </a:r>
-            <a:endParaRPr lang="en-US" sz="4200" b="1" dirty="0" smtClean="0"/>
+              <a:rPr kumimoji="0" lang="fr-FR" altLang="fr-FR" sz="2000" b="0" i="0" u="none" strike="noStrike" cap="none" normalizeH="0" baseline="0" dirty="0" smtClean="0">
+                <a:ln>
+                  <a:noFill/>
+                </a:ln>
+                <a:solidFill>
+                  <a:srgbClr val="475569"/>
+                </a:solidFill>
+                <a:effectLst/>
+                <a:latin typeface="+mn-lt"/>
+              </a:rPr>
+              <a:t>Cette fonction permet d’activer ou désactiver le mode sombre dynamiquement en ajoutant une classe CSS au body</a:t>
+            </a:r>
+            <a:endParaRPr kumimoji="0" lang="fr-FR" altLang="fr-FR" sz="2000" b="0" i="0" u="none" strike="noStrike" cap="none" normalizeH="0" baseline="0" dirty="0" smtClean="0">
+              <a:ln>
+                <a:noFill/>
+              </a:ln>
+              <a:solidFill>
+                <a:schemeClr val="tx1"/>
+              </a:solidFill>
+              <a:effectLst/>
+              <a:latin typeface="+mn-lt"/>
+            </a:endParaRPr>
           </a:p>
         </p:txBody>
       </p:sp>
@@ -6362,6 +10418,9 @@
   <p:clrMapOvr>
     <a:masterClrMapping/>
   </p:clrMapOvr>
+  <p:transition spd="slow">
+    <p:wipe/>
+  </p:transition>
   <p:timing>
     <p:tnLst>
       <p:par>
@@ -6399,12 +10458,24 @@
             <p:ph type="title"/>
           </p:nvPr>
         </p:nvSpPr>
-        <p:spPr/>
+        <p:spPr>
+          <a:xfrm>
+            <a:off x="2171700" y="116681"/>
+            <a:ext cx="3797300" cy="528638"/>
+          </a:xfrm>
+        </p:spPr>
         <p:txBody>
-          <a:bodyPr/>
+          <a:bodyPr>
+            <a:normAutofit fontScale="90000"/>
+          </a:bodyPr>
           <a:lstStyle/>
           <a:p>
             <a:r>
+              <a:rPr b="1" dirty="0">
+                <a:solidFill>
+                  <a:srgbClr val="002060"/>
+                </a:solidFill>
+              </a:rPr>
               <a:t>CSS &amp; Bootstrap</a:t>
             </a:r>
           </a:p>
@@ -6422,164 +10493,470 @@
         </p:nvSpPr>
         <p:spPr>
           <a:xfrm>
-            <a:off x="457200" y="1600200"/>
-            <a:ext cx="8597900" cy="4525963"/>
+            <a:off x="127000" y="825501"/>
+            <a:ext cx="8166100" cy="2755900"/>
           </a:xfrm>
+          <a:solidFill>
+            <a:srgbClr val="EDF2F9"/>
+          </a:solidFill>
+          <a:effectLst>
+            <a:softEdge rad="63500"/>
+          </a:effectLst>
         </p:spPr>
         <p:txBody>
           <a:bodyPr>
-            <a:normAutofit fontScale="85000" lnSpcReduction="20000"/>
+            <a:normAutofit/>
           </a:bodyPr>
           <a:lstStyle/>
           <a:p>
-            <a:r>
-              <a:rPr lang="en-US" b="1" dirty="0" smtClean="0"/>
-              <a:t>CSS (style </a:t>
-            </a:r>
-            <a:r>
-              <a:rPr lang="en-US" b="1" dirty="0" err="1" smtClean="0"/>
-              <a:t>personnalis</a:t>
-            </a:r>
-            <a:r>
-              <a:rPr lang="fr-FR" b="1" dirty="0" smtClean="0"/>
+            <a:pPr marL="0" indent="0">
+              <a:buNone/>
+            </a:pPr>
+            <a:r>
+              <a:rPr lang="en-US" sz="2800" b="1" dirty="0" smtClean="0">
+                <a:solidFill>
+                  <a:srgbClr val="002060"/>
+                </a:solidFill>
+              </a:rPr>
+              <a:t>CSS (style personnalis</a:t>
+            </a:r>
+            <a:r>
+              <a:rPr lang="fr-FR" sz="2800" b="1" dirty="0" smtClean="0">
+                <a:solidFill>
+                  <a:srgbClr val="002060"/>
+                </a:solidFill>
+              </a:rPr>
               <a:t>é</a:t>
             </a:r>
             <a:r>
-              <a:rPr lang="en-US" b="1" dirty="0" smtClean="0"/>
+              <a:rPr lang="en-US" sz="2800" b="1" dirty="0" smtClean="0">
+                <a:solidFill>
+                  <a:srgbClr val="002060"/>
+                </a:solidFill>
+              </a:rPr>
               <a:t>)</a:t>
             </a:r>
           </a:p>
           <a:p>
-            <a:r>
-              <a:rPr lang="en-US" dirty="0" err="1" smtClean="0"/>
-              <a:t>Utilisation</a:t>
-            </a:r>
-            <a:r>
-              <a:rPr lang="en-US" dirty="0" smtClean="0"/>
-              <a:t> de Flexbox / Grid pour </a:t>
-            </a:r>
-            <a:r>
-              <a:rPr lang="en-US" dirty="0" err="1" smtClean="0"/>
-              <a:t>l’organisation</a:t>
-            </a:r>
-            <a:endParaRPr dirty="0" smtClean="0"/>
-          </a:p>
-          <a:p>
-            <a:r>
-              <a:rPr dirty="0" smtClean="0"/>
+            <a:pPr>
+              <a:buFont typeface="Wingdings" panose="05000000000000000000" pitchFamily="2" charset="2"/>
+              <a:buChar char="v"/>
+            </a:pPr>
+            <a:r>
+              <a:rPr lang="en-US" sz="2800" dirty="0" smtClean="0">
+                <a:solidFill>
+                  <a:schemeClr val="tx1">
+                    <a:lumMod val="75000"/>
+                    <a:lumOff val="25000"/>
+                  </a:schemeClr>
+                </a:solidFill>
+              </a:rPr>
+              <a:t>Utilisation de Flexbox / Grid pour l’organisation</a:t>
+            </a:r>
+            <a:endParaRPr sz="2800" dirty="0" smtClean="0">
+              <a:solidFill>
+                <a:schemeClr val="tx1">
+                  <a:lumMod val="75000"/>
+                  <a:lumOff val="25000"/>
+                </a:schemeClr>
+              </a:solidFill>
+            </a:endParaRPr>
+          </a:p>
+          <a:p>
+            <a:pPr>
+              <a:buFont typeface="Wingdings" panose="05000000000000000000" pitchFamily="2" charset="2"/>
+              <a:buChar char="v"/>
+            </a:pPr>
+            <a:r>
+              <a:rPr sz="2800" dirty="0" smtClean="0">
+                <a:solidFill>
+                  <a:schemeClr val="tx1">
+                    <a:lumMod val="75000"/>
+                    <a:lumOff val="25000"/>
+                  </a:schemeClr>
+                </a:solidFill>
+              </a:rPr>
               <a:t>Responsive design avec media queries</a:t>
             </a:r>
-            <a:endParaRPr lang="en-US" dirty="0" smtClean="0"/>
-          </a:p>
-          <a:p>
-            <a:r>
-              <a:rPr lang="en-US" dirty="0" smtClean="0"/>
-              <a:t>Styles </a:t>
-            </a:r>
-            <a:r>
-              <a:rPr lang="en-US" dirty="0" err="1" smtClean="0"/>
-              <a:t>personnalis</a:t>
-            </a:r>
-            <a:r>
-              <a:rPr lang="fr-FR" dirty="0" smtClean="0"/>
+            <a:endParaRPr lang="en-US" sz="2800" dirty="0" smtClean="0">
+              <a:solidFill>
+                <a:schemeClr val="tx1">
+                  <a:lumMod val="75000"/>
+                  <a:lumOff val="25000"/>
+                </a:schemeClr>
+              </a:solidFill>
+            </a:endParaRPr>
+          </a:p>
+          <a:p>
+            <a:pPr>
+              <a:buFont typeface="Wingdings" panose="05000000000000000000" pitchFamily="2" charset="2"/>
+              <a:buChar char="v"/>
+            </a:pPr>
+            <a:r>
+              <a:rPr lang="en-US" sz="2800" dirty="0" smtClean="0">
+                <a:solidFill>
+                  <a:schemeClr val="tx1">
+                    <a:lumMod val="75000"/>
+                    <a:lumOff val="25000"/>
+                  </a:schemeClr>
+                </a:solidFill>
+              </a:rPr>
+              <a:t>Styles personnalis</a:t>
+            </a:r>
+            <a:r>
+              <a:rPr lang="fr-FR" sz="2800" dirty="0" smtClean="0">
+                <a:solidFill>
+                  <a:schemeClr val="tx1">
+                    <a:lumMod val="75000"/>
+                    <a:lumOff val="25000"/>
+                  </a:schemeClr>
+                </a:solidFill>
+              </a:rPr>
               <a:t>é</a:t>
             </a:r>
             <a:r>
-              <a:rPr lang="en-US" dirty="0" smtClean="0"/>
-              <a:t>s pour les </a:t>
-            </a:r>
-            <a:r>
-              <a:rPr lang="en-US" dirty="0" err="1" smtClean="0"/>
-              <a:t>composants</a:t>
-            </a:r>
-            <a:endParaRPr lang="en-US" dirty="0" smtClean="0"/>
-          </a:p>
-          <a:p>
-            <a:r>
-              <a:rPr lang="en-US" dirty="0" err="1" smtClean="0"/>
-              <a:t>Effets</a:t>
-            </a:r>
-            <a:r>
-              <a:rPr lang="en-US" dirty="0" smtClean="0"/>
-              <a:t> hover et transitions pour am</a:t>
-            </a:r>
-            <a:r>
-              <a:rPr lang="fr-FR" dirty="0" smtClean="0"/>
+              <a:rPr lang="en-US" sz="2800" dirty="0" smtClean="0">
+                <a:solidFill>
+                  <a:schemeClr val="tx1">
+                    <a:lumMod val="75000"/>
+                    <a:lumOff val="25000"/>
+                  </a:schemeClr>
+                </a:solidFill>
+              </a:rPr>
+              <a:t>s pour les composants</a:t>
+            </a:r>
+          </a:p>
+          <a:p>
+            <a:pPr>
+              <a:buFont typeface="Wingdings" panose="05000000000000000000" pitchFamily="2" charset="2"/>
+              <a:buChar char="v"/>
+            </a:pPr>
+            <a:r>
+              <a:rPr lang="en-US" sz="2800" dirty="0" smtClean="0">
+                <a:solidFill>
+                  <a:schemeClr val="tx1">
+                    <a:lumMod val="75000"/>
+                    <a:lumOff val="25000"/>
+                  </a:schemeClr>
+                </a:solidFill>
+              </a:rPr>
+              <a:t>Effets hover et transitions pour am</a:t>
+            </a:r>
+            <a:r>
+              <a:rPr lang="fr-FR" sz="2800" dirty="0" smtClean="0">
+                <a:solidFill>
+                  <a:schemeClr val="tx1">
+                    <a:lumMod val="75000"/>
+                    <a:lumOff val="25000"/>
+                  </a:schemeClr>
+                </a:solidFill>
+              </a:rPr>
               <a:t>é</a:t>
             </a:r>
             <a:r>
-              <a:rPr lang="en-US" dirty="0" err="1" smtClean="0"/>
-              <a:t>liorer</a:t>
-            </a:r>
-            <a:r>
-              <a:rPr lang="en-US" dirty="0" smtClean="0"/>
-              <a:t> </a:t>
-            </a:r>
-            <a:r>
-              <a:rPr lang="en-US" dirty="0" err="1" smtClean="0"/>
-              <a:t>l’UX</a:t>
-            </a:r>
-            <a:endParaRPr dirty="0" smtClean="0"/>
-          </a:p>
-          <a:p>
-            <a:r>
-              <a:rPr b="1" dirty="0" smtClean="0"/>
-              <a:t>Bootstrap</a:t>
-            </a:r>
-            <a:r>
-              <a:rPr lang="en-US" b="1" dirty="0" smtClean="0"/>
-              <a:t> (framework)</a:t>
-            </a:r>
-            <a:r>
-              <a:rPr b="1" dirty="0" smtClean="0"/>
-              <a:t> </a:t>
-            </a:r>
-            <a:endParaRPr lang="en-US" b="1" dirty="0" smtClean="0"/>
-          </a:p>
-          <a:p>
-            <a:r>
-              <a:rPr dirty="0" err="1" smtClean="0"/>
+              <a:rPr lang="en-US" sz="2800" dirty="0" smtClean="0">
+                <a:solidFill>
+                  <a:schemeClr val="tx1">
+                    <a:lumMod val="75000"/>
+                    <a:lumOff val="25000"/>
+                  </a:schemeClr>
+                </a:solidFill>
+              </a:rPr>
+              <a:t>liorer l’UX</a:t>
+            </a:r>
+            <a:endParaRPr sz="2800" dirty="0" smtClean="0">
+              <a:solidFill>
+                <a:schemeClr val="tx1">
+                  <a:lumMod val="75000"/>
+                  <a:lumOff val="25000"/>
+                </a:schemeClr>
+              </a:solidFill>
+            </a:endParaRPr>
+          </a:p>
+        </p:txBody>
+      </p:sp>
+      <p:sp>
+        <p:nvSpPr>
+          <p:cNvPr id="4" name="Content Placeholder 2"/>
+          <p:cNvSpPr txBox="1">
+            <a:spLocks/>
+          </p:cNvSpPr>
+          <p:nvPr/>
+        </p:nvSpPr>
+        <p:spPr>
+          <a:xfrm>
+            <a:off x="127000" y="3941765"/>
+            <a:ext cx="8166100" cy="2611435"/>
+          </a:xfrm>
+          <a:prstGeom prst="rect">
+            <a:avLst/>
+          </a:prstGeom>
+          <a:solidFill>
+            <a:srgbClr val="EDF2F9"/>
+          </a:solidFill>
+          <a:effectLst>
+            <a:softEdge rad="63500"/>
+          </a:effectLst>
+        </p:spPr>
+        <p:txBody>
+          <a:bodyPr vert="horz" lIns="91440" tIns="45720" rIns="91440" bIns="45720" rtlCol="0">
+            <a:normAutofit/>
+          </a:bodyPr>
+          <a:lstStyle>
+            <a:lvl1pPr marL="342900" indent="-342900" algn="l" defTabSz="457200" rtl="0" eaLnBrk="1" latinLnBrk="0" hangingPunct="1">
+              <a:spcBef>
+                <a:spcPct val="20000"/>
+              </a:spcBef>
+              <a:buFont typeface="Arial"/>
+              <a:buChar char="•"/>
+              <a:defRPr sz="3200" kern="1200">
+                <a:solidFill>
+                  <a:schemeClr val="tx1"/>
+                </a:solidFill>
+                <a:latin typeface="+mn-lt"/>
+                <a:ea typeface="+mn-ea"/>
+                <a:cs typeface="+mn-cs"/>
+              </a:defRPr>
+            </a:lvl1pPr>
+            <a:lvl2pPr marL="742950" indent="-285750" algn="l" defTabSz="457200" rtl="0" eaLnBrk="1" latinLnBrk="0" hangingPunct="1">
+              <a:spcBef>
+                <a:spcPct val="20000"/>
+              </a:spcBef>
+              <a:buFont typeface="Arial"/>
+              <a:buChar char="–"/>
+              <a:defRPr sz="2800" kern="1200">
+                <a:solidFill>
+                  <a:schemeClr val="tx1"/>
+                </a:solidFill>
+                <a:latin typeface="+mn-lt"/>
+                <a:ea typeface="+mn-ea"/>
+                <a:cs typeface="+mn-cs"/>
+              </a:defRPr>
+            </a:lvl2pPr>
+            <a:lvl3pPr marL="1143000" indent="-228600" algn="l" defTabSz="457200" rtl="0" eaLnBrk="1" latinLnBrk="0" hangingPunct="1">
+              <a:spcBef>
+                <a:spcPct val="20000"/>
+              </a:spcBef>
+              <a:buFont typeface="Arial"/>
+              <a:buChar char="•"/>
+              <a:defRPr sz="2400" kern="1200">
+                <a:solidFill>
+                  <a:schemeClr val="tx1"/>
+                </a:solidFill>
+                <a:latin typeface="+mn-lt"/>
+                <a:ea typeface="+mn-ea"/>
+                <a:cs typeface="+mn-cs"/>
+              </a:defRPr>
+            </a:lvl3pPr>
+            <a:lvl4pPr marL="1600200" indent="-228600" algn="l" defTabSz="457200" rtl="0" eaLnBrk="1" latinLnBrk="0" hangingPunct="1">
+              <a:spcBef>
+                <a:spcPct val="20000"/>
+              </a:spcBef>
+              <a:buFont typeface="Arial"/>
+              <a:buChar char="–"/>
+              <a:defRPr sz="2000" kern="1200">
+                <a:solidFill>
+                  <a:schemeClr val="tx1"/>
+                </a:solidFill>
+                <a:latin typeface="+mn-lt"/>
+                <a:ea typeface="+mn-ea"/>
+                <a:cs typeface="+mn-cs"/>
+              </a:defRPr>
+            </a:lvl4pPr>
+            <a:lvl5pPr marL="2057400" indent="-228600" algn="l" defTabSz="457200" rtl="0" eaLnBrk="1" latinLnBrk="0" hangingPunct="1">
+              <a:spcBef>
+                <a:spcPct val="20000"/>
+              </a:spcBef>
+              <a:buFont typeface="Arial"/>
+              <a:buChar char="»"/>
+              <a:defRPr sz="2000" kern="1200">
+                <a:solidFill>
+                  <a:schemeClr val="tx1"/>
+                </a:solidFill>
+                <a:latin typeface="+mn-lt"/>
+                <a:ea typeface="+mn-ea"/>
+                <a:cs typeface="+mn-cs"/>
+              </a:defRPr>
+            </a:lvl5pPr>
+            <a:lvl6pPr marL="2514600" indent="-228600" algn="l" defTabSz="457200" rtl="0" eaLnBrk="1" latinLnBrk="0" hangingPunct="1">
+              <a:spcBef>
+                <a:spcPct val="20000"/>
+              </a:spcBef>
+              <a:buFont typeface="Arial"/>
+              <a:buChar char="•"/>
+              <a:defRPr sz="2000" kern="1200">
+                <a:solidFill>
+                  <a:schemeClr val="tx1"/>
+                </a:solidFill>
+                <a:latin typeface="+mn-lt"/>
+                <a:ea typeface="+mn-ea"/>
+                <a:cs typeface="+mn-cs"/>
+              </a:defRPr>
+            </a:lvl6pPr>
+            <a:lvl7pPr marL="2971800" indent="-228600" algn="l" defTabSz="457200" rtl="0" eaLnBrk="1" latinLnBrk="0" hangingPunct="1">
+              <a:spcBef>
+                <a:spcPct val="20000"/>
+              </a:spcBef>
+              <a:buFont typeface="Arial"/>
+              <a:buChar char="•"/>
+              <a:defRPr sz="2000" kern="1200">
+                <a:solidFill>
+                  <a:schemeClr val="tx1"/>
+                </a:solidFill>
+                <a:latin typeface="+mn-lt"/>
+                <a:ea typeface="+mn-ea"/>
+                <a:cs typeface="+mn-cs"/>
+              </a:defRPr>
+            </a:lvl7pPr>
+            <a:lvl8pPr marL="3429000" indent="-228600" algn="l" defTabSz="457200" rtl="0" eaLnBrk="1" latinLnBrk="0" hangingPunct="1">
+              <a:spcBef>
+                <a:spcPct val="20000"/>
+              </a:spcBef>
+              <a:buFont typeface="Arial"/>
+              <a:buChar char="•"/>
+              <a:defRPr sz="2000" kern="1200">
+                <a:solidFill>
+                  <a:schemeClr val="tx1"/>
+                </a:solidFill>
+                <a:latin typeface="+mn-lt"/>
+                <a:ea typeface="+mn-ea"/>
+                <a:cs typeface="+mn-cs"/>
+              </a:defRPr>
+            </a:lvl8pPr>
+            <a:lvl9pPr marL="3886200" indent="-228600" algn="l" defTabSz="457200" rtl="0" eaLnBrk="1" latinLnBrk="0" hangingPunct="1">
+              <a:spcBef>
+                <a:spcPct val="20000"/>
+              </a:spcBef>
+              <a:buFont typeface="Arial"/>
+              <a:buChar char="•"/>
+              <a:defRPr sz="2000" kern="1200">
+                <a:solidFill>
+                  <a:schemeClr val="tx1"/>
+                </a:solidFill>
+                <a:latin typeface="+mn-lt"/>
+                <a:ea typeface="+mn-ea"/>
+                <a:cs typeface="+mn-cs"/>
+              </a:defRPr>
+            </a:lvl9pPr>
+          </a:lstStyle>
+          <a:p>
+            <a:pPr marL="0" indent="0">
+              <a:buNone/>
+            </a:pPr>
+            <a:r>
+              <a:rPr lang="fr-FR" sz="2800" b="1" dirty="0">
+                <a:solidFill>
+                  <a:srgbClr val="002060"/>
+                </a:solidFill>
+              </a:rPr>
+              <a:t>Bootstrap (</a:t>
+            </a:r>
+            <a:r>
+              <a:rPr lang="fr-FR" sz="2800" b="1" dirty="0" err="1">
+                <a:solidFill>
+                  <a:srgbClr val="002060"/>
+                </a:solidFill>
+              </a:rPr>
+              <a:t>framework</a:t>
+            </a:r>
+            <a:r>
+              <a:rPr lang="fr-FR" sz="2800" b="1" dirty="0">
+                <a:solidFill>
+                  <a:srgbClr val="002060"/>
+                </a:solidFill>
+              </a:rPr>
+              <a:t>) </a:t>
+            </a:r>
+          </a:p>
+          <a:p>
+            <a:pPr>
+              <a:buFont typeface="Wingdings" panose="05000000000000000000" pitchFamily="2" charset="2"/>
+              <a:buChar char="v"/>
+            </a:pPr>
+            <a:r>
+              <a:rPr lang="fr-FR" sz="2800" dirty="0" err="1">
+                <a:solidFill>
+                  <a:schemeClr val="tx1">
+                    <a:lumMod val="85000"/>
+                    <a:lumOff val="15000"/>
+                  </a:schemeClr>
+                </a:solidFill>
+              </a:rPr>
               <a:t>Navbar</a:t>
             </a:r>
             <a:r>
-              <a:rPr lang="en-US" dirty="0" smtClean="0"/>
+              <a:rPr lang="fr-FR" sz="2800" dirty="0">
+                <a:solidFill>
+                  <a:schemeClr val="tx1">
+                    <a:lumMod val="85000"/>
+                    <a:lumOff val="15000"/>
+                  </a:schemeClr>
+                </a:solidFill>
+              </a:rPr>
               <a:t>(menu)</a:t>
             </a:r>
           </a:p>
           <a:p>
-            <a:r>
-              <a:rPr lang="en-US" dirty="0" smtClean="0"/>
-              <a:t>Cards (</a:t>
-            </a:r>
-            <a:r>
-              <a:rPr lang="en-US" dirty="0" err="1" smtClean="0"/>
-              <a:t>profils</a:t>
-            </a:r>
-            <a:r>
-              <a:rPr lang="en-US" dirty="0" smtClean="0"/>
-              <a:t> freelances)</a:t>
-            </a:r>
-          </a:p>
-          <a:p>
-            <a:r>
-              <a:rPr lang="en-US" dirty="0" smtClean="0"/>
-              <a:t>Buttons (actions et </a:t>
-            </a:r>
-            <a:r>
-              <a:rPr lang="en-US" dirty="0" err="1" smtClean="0"/>
-              <a:t>filtres</a:t>
-            </a:r>
-            <a:r>
-              <a:rPr lang="en-US" dirty="0" smtClean="0"/>
-              <a:t>)</a:t>
-            </a:r>
-          </a:p>
-          <a:p>
-            <a:r>
-              <a:rPr lang="en-US" dirty="0" smtClean="0"/>
+            <a:pPr>
+              <a:buFont typeface="Wingdings" panose="05000000000000000000" pitchFamily="2" charset="2"/>
+              <a:buChar char="v"/>
+            </a:pPr>
+            <a:r>
+              <a:rPr lang="fr-FR" sz="2800" dirty="0" err="1">
+                <a:solidFill>
+                  <a:schemeClr val="tx1">
+                    <a:lumMod val="85000"/>
+                    <a:lumOff val="15000"/>
+                  </a:schemeClr>
+                </a:solidFill>
+              </a:rPr>
+              <a:t>Cards</a:t>
+            </a:r>
+            <a:r>
+              <a:rPr lang="fr-FR" sz="2800" dirty="0">
+                <a:solidFill>
+                  <a:schemeClr val="tx1">
+                    <a:lumMod val="85000"/>
+                    <a:lumOff val="15000"/>
+                  </a:schemeClr>
+                </a:solidFill>
+              </a:rPr>
+              <a:t> (profils freelances)</a:t>
+            </a:r>
+          </a:p>
+          <a:p>
+            <a:pPr>
+              <a:buFont typeface="Wingdings" panose="05000000000000000000" pitchFamily="2" charset="2"/>
+              <a:buChar char="v"/>
+            </a:pPr>
+            <a:r>
+              <a:rPr lang="fr-FR" sz="2800" dirty="0">
+                <a:solidFill>
+                  <a:schemeClr val="tx1">
+                    <a:lumMod val="85000"/>
+                    <a:lumOff val="15000"/>
+                  </a:schemeClr>
+                </a:solidFill>
+              </a:rPr>
+              <a:t>Buttons (actions et filtres)</a:t>
+            </a:r>
+          </a:p>
+          <a:p>
+            <a:pPr>
+              <a:buFont typeface="Wingdings" panose="05000000000000000000" pitchFamily="2" charset="2"/>
+              <a:buChar char="v"/>
+            </a:pPr>
+            <a:r>
+              <a:rPr lang="fr-FR" sz="2800" dirty="0">
+                <a:solidFill>
+                  <a:schemeClr val="tx1">
+                    <a:lumMod val="85000"/>
+                    <a:lumOff val="15000"/>
+                  </a:schemeClr>
+                </a:solidFill>
+              </a:rPr>
               <a:t>Grid system (layout responsive)</a:t>
             </a:r>
-            <a:endParaRPr dirty="0"/>
           </a:p>
         </p:txBody>
       </p:sp>
@@ -6588,6 +10965,9 @@
   <p:clrMapOvr>
     <a:masterClrMapping/>
   </p:clrMapOvr>
+  <p:transition spd="slow">
+    <p:wipe/>
+  </p:transition>
   <p:timing>
     <p:tnLst>
       <p:par>
